--- a/documents/specs/OnlineAppointSystem_詳細設計書.pptx
+++ b/documents/specs/OnlineAppointSystem_詳細設計書.pptx
@@ -27,6 +27,12 @@
     <p:sldId id="275" r:id="rId26"/>
     <p:sldId id="276" r:id="rId27"/>
     <p:sldId id="277" r:id="rId28"/>
+    <p:sldId id="278" r:id="rId29"/>
+    <p:sldId id="279" r:id="rId30"/>
+    <p:sldId id="280" r:id="rId31"/>
+    <p:sldId id="281" r:id="rId32"/>
+    <p:sldId id="282" r:id="rId33"/>
+    <p:sldId id="283" r:id="rId34"/>
   </p:sldIdLst>
   <p:sldSz cx="12188952" cy="6858000" type="screen4x3"/>
   <p:notesSz cx="6858000" cy="9144000"/>
@@ -3338,7 +3344,7 @@
                 </a:solidFill>
                 <a:latin typeface="Noto Sans JP"/>
               </a:rPr>
-              <a:t>2026年3月  |  React SPA v3</a:t>
+              <a:t>2026年3月  |  React SPA v4（i18n / PWA / 問診票 / 診察履歴 / APPI対応）</a:t>
             </a:r>
           </a:p>
         </p:txBody>
@@ -8543,7 +8549,7 @@
                 </a:solidFill>
                 <a:latin typeface="Noto Sans JP"/>
               </a:rPr>
-              <a:t>  管理者ダッシュボード</a:t>
+              <a:t>  管理者ダッシュボード（KPI / 検索 / 詳細モーダル / completeVisit）</a:t>
             </a:r>
           </a:p>
         </p:txBody>
@@ -8578,7 +8584,7 @@
                 </a:solidFill>
                 <a:latin typeface="Noto Sans JP"/>
               </a:rPr>
-              <a:t>  設定画面（5 タブ）</a:t>
+              <a:t>  設定画面（6 タブ / ポリシー・APPI対応）</a:t>
             </a:r>
           </a:p>
         </p:txBody>
@@ -9297,7 +9303,7 @@
       </p:sp>
       <p:pic>
         <p:nvPicPr>
-          <p:cNvPr id="6" name="Picture 5" descr="09_dashboard.png"/>
+          <p:cNvPr id="6" name="Picture 5" descr="10_dashboard.png"/>
           <p:cNvPicPr>
             <a:picLocks noChangeAspect="1"/>
           </p:cNvPicPr>
@@ -9396,7 +9402,7 @@
                 </a:solidFill>
                 <a:latin typeface="Noto Sans JP"/>
               </a:rPr>
-              <a:t>## KPI カード</a:t>
+              <a:t>## KPI カード（4種）</a:t>
             </a:r>
           </a:p>
           <a:p>
@@ -9524,7 +9530,7 @@
                 </a:solidFill>
                 <a:latin typeface="Noto Sans JP"/>
               </a:rPr>
-              <a:t>　で絞り込み</a:t>
+              <a:t>　・郵便番号・電話番号で絞り込み</a:t>
             </a:r>
           </a:p>
           <a:p>
@@ -9556,6 +9562,22 @@
                 </a:solidFill>
                 <a:latin typeface="Noto Sans JP"/>
               </a:rPr>
+              <a:t>・ソート可（複数列対応）</a:t>
+            </a:r>
+          </a:p>
+          <a:p>
+            <a:pPr algn="l">
+              <a:lnSpc>
+                <a:spcPts val="2200"/>
+              </a:lnSpc>
+            </a:pPr>
+            <a:r>
+              <a:rPr sz="1300" b="0">
+                <a:solidFill>
+                  <a:srgbClr val="1A2B4A"/>
+                </a:solidFill>
+                <a:latin typeface="Noto Sans JP"/>
+              </a:rPr>
               <a:t/>
             </a:r>
           </a:p>
@@ -9572,6 +9594,166 @@
                 </a:solidFill>
                 <a:latin typeface="Noto Sans JP"/>
               </a:rPr>
+              <a:t>## 詳細モーダル</a:t>
+            </a:r>
+          </a:p>
+          <a:p>
+            <a:pPr algn="l">
+              <a:lnSpc>
+                <a:spcPts val="2200"/>
+              </a:lnSpc>
+            </a:pPr>
+            <a:r>
+              <a:rPr sz="1300" b="0">
+                <a:solidFill>
+                  <a:srgbClr val="1A2B4A"/>
+                </a:solidFill>
+                <a:latin typeface="Noto Sans JP"/>
+              </a:rPr>
+              <a:t>・ステータス変更</a:t>
+            </a:r>
+          </a:p>
+          <a:p>
+            <a:pPr algn="l">
+              <a:lnSpc>
+                <a:spcPts val="2200"/>
+              </a:lnSpc>
+            </a:pPr>
+            <a:r>
+              <a:rPr sz="1300" b="0">
+                <a:solidFill>
+                  <a:srgbClr val="1A2B4A"/>
+                </a:solidFill>
+                <a:latin typeface="Noto Sans JP"/>
+              </a:rPr>
+              <a:t>・診察完了（visit_histories 保存）</a:t>
+            </a:r>
+          </a:p>
+          <a:p>
+            <a:pPr algn="l">
+              <a:lnSpc>
+                <a:spcPts val="2200"/>
+              </a:lnSpc>
+            </a:pPr>
+            <a:r>
+              <a:rPr sz="1300" b="0">
+                <a:solidFill>
+                  <a:srgbClr val="1A2B4A"/>
+                </a:solidFill>
+                <a:latin typeface="Noto Sans JP"/>
+              </a:rPr>
+              <a:t>・問診票PDF ダウンロード（pdf-lib）</a:t>
+            </a:r>
+          </a:p>
+          <a:p>
+            <a:pPr algn="l">
+              <a:lnSpc>
+                <a:spcPts val="2200"/>
+              </a:lnSpc>
+            </a:pPr>
+            <a:r>
+              <a:rPr sz="1300" b="0">
+                <a:solidFill>
+                  <a:srgbClr val="1A2B4A"/>
+                </a:solidFill>
+                <a:latin typeface="Noto Sans JP"/>
+              </a:rPr>
+              <a:t>・キャンセル（理由選択必須）</a:t>
+            </a:r>
+          </a:p>
+          <a:p>
+            <a:pPr algn="l">
+              <a:lnSpc>
+                <a:spcPts val="2200"/>
+              </a:lnSpc>
+            </a:pPr>
+            <a:r>
+              <a:rPr sz="1300" b="0">
+                <a:solidFill>
+                  <a:srgbClr val="1A2B4A"/>
+                </a:solidFill>
+                <a:latin typeface="Noto Sans JP"/>
+              </a:rPr>
+              <a:t/>
+            </a:r>
+          </a:p>
+          <a:p>
+            <a:pPr algn="l">
+              <a:lnSpc>
+                <a:spcPts val="2200"/>
+              </a:lnSpc>
+            </a:pPr>
+            <a:r>
+              <a:rPr sz="1300" b="0">
+                <a:solidFill>
+                  <a:srgbClr val="1A2B4A"/>
+                </a:solidFill>
+                <a:latin typeface="Noto Sans JP"/>
+              </a:rPr>
+              <a:t>## アクセスログ</a:t>
+            </a:r>
+          </a:p>
+          <a:p>
+            <a:pPr algn="l">
+              <a:lnSpc>
+                <a:spcPts val="2200"/>
+              </a:lnSpc>
+            </a:pPr>
+            <a:r>
+              <a:rPr sz="1300" b="0">
+                <a:solidFill>
+                  <a:srgbClr val="1A2B4A"/>
+                </a:solidFill>
+                <a:latin typeface="Noto Sans JP"/>
+              </a:rPr>
+              <a:t>・詳細モーダル閲覧: logAccess()</a:t>
+            </a:r>
+          </a:p>
+          <a:p>
+            <a:pPr algn="l">
+              <a:lnSpc>
+                <a:spcPts val="2200"/>
+              </a:lnSpc>
+            </a:pPr>
+            <a:r>
+              <a:rPr sz="1300" b="0">
+                <a:solidFill>
+                  <a:srgbClr val="1A2B4A"/>
+                </a:solidFill>
+                <a:latin typeface="Noto Sans JP"/>
+              </a:rPr>
+              <a:t>・問診票PDF DL: logAccess()</a:t>
+            </a:r>
+          </a:p>
+          <a:p>
+            <a:pPr algn="l">
+              <a:lnSpc>
+                <a:spcPts val="2200"/>
+              </a:lnSpc>
+            </a:pPr>
+            <a:r>
+              <a:rPr sz="1300" b="0">
+                <a:solidFill>
+                  <a:srgbClr val="1A2B4A"/>
+                </a:solidFill>
+                <a:latin typeface="Noto Sans JP"/>
+              </a:rPr>
+              <a:t/>
+            </a:r>
+          </a:p>
+          <a:p>
+            <a:pPr algn="l">
+              <a:lnSpc>
+                <a:spcPts val="2200"/>
+              </a:lnSpc>
+            </a:pPr>
+            <a:r>
+              <a:rPr sz="1300" b="0">
+                <a:solidFill>
+                  <a:srgbClr val="1A2B4A"/>
+                </a:solidFill>
+                <a:latin typeface="Noto Sans JP"/>
+              </a:rPr>
               <a:t>## エクスポート</a:t>
             </a:r>
           </a:p>
@@ -9589,22 +9771,6 @@
                 <a:latin typeface="Noto Sans JP"/>
               </a:rPr>
               <a:t>・CSV ダウンロード</a:t>
-            </a:r>
-          </a:p>
-          <a:p>
-            <a:pPr algn="l">
-              <a:lnSpc>
-                <a:spcPts val="2200"/>
-              </a:lnSpc>
-            </a:pPr>
-            <a:r>
-              <a:rPr sz="1300" b="0">
-                <a:solidFill>
-                  <a:srgbClr val="1A2B4A"/>
-                </a:solidFill>
-                <a:latin typeface="Noto Sans JP"/>
-              </a:rPr>
-              <a:t>・PDF 印刷（pdf-lib）</a:t>
             </a:r>
           </a:p>
         </p:txBody>
@@ -9802,7 +9968,7 @@
       </p:sp>
       <p:pic>
         <p:nvPicPr>
-          <p:cNvPr id="6" name="Picture 5" descr="11_settings_clinic_info.png"/>
+          <p:cNvPr id="6" name="Picture 5" descr="13_settings_basic_info.png"/>
           <p:cNvPicPr>
             <a:picLocks noChangeAspect="1"/>
           </p:cNvPicPr>
@@ -9901,7 +10067,7 @@
                 </a:solidFill>
                 <a:latin typeface="Noto Sans JP"/>
               </a:rPr>
-              <a:t>## タブ構成（5 タブ）</a:t>
+              <a:t>## タブ構成（6 タブ）</a:t>
             </a:r>
           </a:p>
           <a:p>
@@ -9933,7 +10099,7 @@
                 </a:solidFill>
                 <a:latin typeface="Noto Sans JP"/>
               </a:rPr>
-              <a:t>　院名・住所・電話番号</a:t>
+              <a:t>　院名・住所・電話番号・Google Maps</a:t>
             </a:r>
           </a:p>
           <a:p>
@@ -9949,7 +10115,7 @@
                 </a:solidFill>
                 <a:latin typeface="Noto Sans JP"/>
               </a:rPr>
-              <a:t>・営業時間</a:t>
+              <a:t>・営業日設定</a:t>
             </a:r>
           </a:p>
           <a:p>
@@ -9965,7 +10131,7 @@
                 </a:solidFill>
                 <a:latin typeface="Noto Sans JP"/>
               </a:rPr>
-              <a:t>　曜日別 ON/OFF + 時間設定</a:t>
+              <a:t>　曜日別 ON/OFF + AM/PM 時間設定</a:t>
             </a:r>
           </a:p>
           <a:p>
@@ -9981,7 +10147,7 @@
                 </a:solidFill>
                 <a:latin typeface="Noto Sans JP"/>
               </a:rPr>
-              <a:t>・休日</a:t>
+              <a:t>　タイムラインバー・休日管理</a:t>
             </a:r>
           </a:p>
           <a:p>
@@ -9997,7 +10163,7 @@
                 </a:solidFill>
                 <a:latin typeface="Noto Sans JP"/>
               </a:rPr>
-              <a:t>　カレンダーで休診日登録</a:t>
+              <a:t>・お知らせ</a:t>
             </a:r>
           </a:p>
           <a:p>
@@ -10013,7 +10179,7 @@
                 </a:solidFill>
                 <a:latin typeface="Noto Sans JP"/>
               </a:rPr>
-              <a:t>・お知らせ</a:t>
+              <a:t>　バナー設定・メンテナンスモード</a:t>
             </a:r>
           </a:p>
           <a:p>
@@ -10029,7 +10195,87 @@
                 </a:solidFill>
                 <a:latin typeface="Noto Sans JP"/>
               </a:rPr>
-              <a:t>　トップバナーの ON/OFF + テキスト</a:t>
+              <a:t>・利用規約</a:t>
+            </a:r>
+          </a:p>
+          <a:p>
+            <a:pPr algn="l">
+              <a:lnSpc>
+                <a:spcPts val="2200"/>
+              </a:lnSpc>
+            </a:pPr>
+            <a:r>
+              <a:rPr sz="1300" b="0">
+                <a:solidFill>
+                  <a:srgbClr val="1A2B4A"/>
+                </a:solidFill>
+                <a:latin typeface="Noto Sans JP"/>
+              </a:rPr>
+              <a:t>　規約テキスト・バージョン管理</a:t>
+            </a:r>
+          </a:p>
+          <a:p>
+            <a:pPr algn="l">
+              <a:lnSpc>
+                <a:spcPts val="2200"/>
+              </a:lnSpc>
+            </a:pPr>
+            <a:r>
+              <a:rPr sz="1300" b="0">
+                <a:solidFill>
+                  <a:srgbClr val="1A2B4A"/>
+                </a:solidFill>
+                <a:latin typeface="Noto Sans JP"/>
+              </a:rPr>
+              <a:t>・ポリシー</a:t>
+            </a:r>
+          </a:p>
+          <a:p>
+            <a:pPr algn="l">
+              <a:lnSpc>
+                <a:spcPts val="2200"/>
+              </a:lnSpc>
+            </a:pPr>
+            <a:r>
+              <a:rPr sz="1300" b="0">
+                <a:solidFill>
+                  <a:srgbClr val="1A2B4A"/>
+                </a:solidFill>
+                <a:latin typeface="Noto Sans JP"/>
+              </a:rPr>
+              <a:t>　PP・要配慮同意・保存期間</a:t>
+            </a:r>
+          </a:p>
+          <a:p>
+            <a:pPr algn="l">
+              <a:lnSpc>
+                <a:spcPts val="2200"/>
+              </a:lnSpc>
+            </a:pPr>
+            <a:r>
+              <a:rPr sz="1300" b="0">
+                <a:solidFill>
+                  <a:srgbClr val="1A2B4A"/>
+                </a:solidFill>
+                <a:latin typeface="Noto Sans JP"/>
+              </a:rPr>
+              <a:t>　患者権利窓口（APPI 第28〜30条）</a:t>
+            </a:r>
+          </a:p>
+          <a:p>
+            <a:pPr algn="l">
+              <a:lnSpc>
+                <a:spcPts val="2200"/>
+              </a:lnSpc>
+            </a:pPr>
+            <a:r>
+              <a:rPr sz="1300" b="0">
+                <a:solidFill>
+                  <a:srgbClr val="1A2B4A"/>
+                </a:solidFill>
+                <a:latin typeface="Noto Sans JP"/>
+              </a:rPr>
+              <a:t>　リマインダーメール ON/OFF</a:t>
             </a:r>
           </a:p>
           <a:p>
@@ -11448,7 +11694,7 @@
         </p:nvSpPr>
         <p:spPr>
           <a:xfrm>
-            <a:off x="6217920" y="1051560"/>
+            <a:off x="457200" y="4379976"/>
             <a:ext cx="457200" cy="365760"/>
           </a:xfrm>
           <a:prstGeom prst="rect">
@@ -11500,7 +11746,7 @@
         </p:nvSpPr>
         <p:spPr>
           <a:xfrm>
-            <a:off x="6766560" y="1005840"/>
+            <a:off x="1005840" y="4334256"/>
             <a:ext cx="4114800" cy="457200"/>
           </a:xfrm>
           <a:prstGeom prst="rect">
@@ -11535,7 +11781,7 @@
         </p:nvSpPr>
         <p:spPr>
           <a:xfrm>
-            <a:off x="11064240" y="1005840"/>
+            <a:off x="5303520" y="4334256"/>
             <a:ext cx="731520" cy="457200"/>
           </a:xfrm>
           <a:prstGeom prst="rect">
@@ -11570,7 +11816,7 @@
         </p:nvSpPr>
         <p:spPr>
           <a:xfrm>
-            <a:off x="6217920" y="1463040"/>
+            <a:off x="457200" y="4791456"/>
             <a:ext cx="5486400" cy="18288"/>
           </a:xfrm>
           <a:prstGeom prst="rect">
@@ -11613,7 +11859,7 @@
         </p:nvSpPr>
         <p:spPr>
           <a:xfrm>
-            <a:off x="6217920" y="1527048"/>
+            <a:off x="457200" y="4855464"/>
             <a:ext cx="457200" cy="365760"/>
           </a:xfrm>
           <a:prstGeom prst="rect">
@@ -11665,7 +11911,7 @@
         </p:nvSpPr>
         <p:spPr>
           <a:xfrm>
-            <a:off x="6766560" y="1481328"/>
+            <a:off x="1005840" y="4809744"/>
             <a:ext cx="4114800" cy="457200"/>
           </a:xfrm>
           <a:prstGeom prst="rect">
@@ -11700,7 +11946,7 @@
         </p:nvSpPr>
         <p:spPr>
           <a:xfrm>
-            <a:off x="11064240" y="1481328"/>
+            <a:off x="5303520" y="4809744"/>
             <a:ext cx="731520" cy="457200"/>
           </a:xfrm>
           <a:prstGeom prst="rect">
@@ -11735,7 +11981,7 @@
         </p:nvSpPr>
         <p:spPr>
           <a:xfrm>
-            <a:off x="6217920" y="1938528"/>
+            <a:off x="457200" y="5266944"/>
             <a:ext cx="5486400" cy="18288"/>
           </a:xfrm>
           <a:prstGeom prst="rect">
@@ -11778,7 +12024,7 @@
         </p:nvSpPr>
         <p:spPr>
           <a:xfrm>
-            <a:off x="6217920" y="2002536"/>
+            <a:off x="457200" y="5330952"/>
             <a:ext cx="457200" cy="365760"/>
           </a:xfrm>
           <a:prstGeom prst="rect">
@@ -11830,7 +12076,7 @@
         </p:nvSpPr>
         <p:spPr>
           <a:xfrm>
-            <a:off x="6766560" y="1956816"/>
+            <a:off x="1005840" y="5285232"/>
             <a:ext cx="4114800" cy="457200"/>
           </a:xfrm>
           <a:prstGeom prst="rect">
@@ -11865,7 +12111,7 @@
         </p:nvSpPr>
         <p:spPr>
           <a:xfrm>
-            <a:off x="11064240" y="1956816"/>
+            <a:off x="5303520" y="5285232"/>
             <a:ext cx="731520" cy="457200"/>
           </a:xfrm>
           <a:prstGeom prst="rect">
@@ -11900,7 +12146,7 @@
         </p:nvSpPr>
         <p:spPr>
           <a:xfrm>
-            <a:off x="6217920" y="2414016"/>
+            <a:off x="457200" y="5742432"/>
             <a:ext cx="5486400" cy="18288"/>
           </a:xfrm>
           <a:prstGeom prst="rect">
@@ -11943,7 +12189,7 @@
         </p:nvSpPr>
         <p:spPr>
           <a:xfrm>
-            <a:off x="6217920" y="2478024"/>
+            <a:off x="6217920" y="1051560"/>
             <a:ext cx="457200" cy="365760"/>
           </a:xfrm>
           <a:prstGeom prst="rect">
@@ -11995,7 +12241,7 @@
         </p:nvSpPr>
         <p:spPr>
           <a:xfrm>
-            <a:off x="6766560" y="2432304"/>
+            <a:off x="6766560" y="1005840"/>
             <a:ext cx="4114800" cy="457200"/>
           </a:xfrm>
           <a:prstGeom prst="rect">
@@ -12030,7 +12276,7 @@
         </p:nvSpPr>
         <p:spPr>
           <a:xfrm>
-            <a:off x="11064240" y="2432304"/>
+            <a:off x="11064240" y="1005840"/>
             <a:ext cx="731520" cy="457200"/>
           </a:xfrm>
           <a:prstGeom prst="rect">
@@ -12065,7 +12311,7 @@
         </p:nvSpPr>
         <p:spPr>
           <a:xfrm>
-            <a:off x="6217920" y="2889504"/>
+            <a:off x="6217920" y="1463040"/>
             <a:ext cx="5486400" cy="18288"/>
           </a:xfrm>
           <a:prstGeom prst="rect">
@@ -12108,7 +12354,7 @@
         </p:nvSpPr>
         <p:spPr>
           <a:xfrm>
-            <a:off x="6217920" y="2953512"/>
+            <a:off x="6217920" y="1527048"/>
             <a:ext cx="457200" cy="365760"/>
           </a:xfrm>
           <a:prstGeom prst="rect">
@@ -12160,7 +12406,7 @@
         </p:nvSpPr>
         <p:spPr>
           <a:xfrm>
-            <a:off x="6766560" y="2907792"/>
+            <a:off x="6766560" y="1481328"/>
             <a:ext cx="4114800" cy="457200"/>
           </a:xfrm>
           <a:prstGeom prst="rect">
@@ -12195,7 +12441,7 @@
         </p:nvSpPr>
         <p:spPr>
           <a:xfrm>
-            <a:off x="11064240" y="2907792"/>
+            <a:off x="11064240" y="1481328"/>
             <a:ext cx="731520" cy="457200"/>
           </a:xfrm>
           <a:prstGeom prst="rect">
@@ -12230,7 +12476,7 @@
         </p:nvSpPr>
         <p:spPr>
           <a:xfrm>
-            <a:off x="6217920" y="3364992"/>
+            <a:off x="6217920" y="1938528"/>
             <a:ext cx="5486400" cy="18288"/>
           </a:xfrm>
           <a:prstGeom prst="rect">
@@ -12273,7 +12519,7 @@
         </p:nvSpPr>
         <p:spPr>
           <a:xfrm>
-            <a:off x="6217920" y="3429000"/>
+            <a:off x="6217920" y="2002536"/>
             <a:ext cx="457200" cy="365760"/>
           </a:xfrm>
           <a:prstGeom prst="rect">
@@ -12325,7 +12571,7 @@
         </p:nvSpPr>
         <p:spPr>
           <a:xfrm>
-            <a:off x="6766560" y="3383280"/>
+            <a:off x="6766560" y="1956816"/>
             <a:ext cx="4114800" cy="457200"/>
           </a:xfrm>
           <a:prstGeom prst="rect">
@@ -12360,7 +12606,7 @@
         </p:nvSpPr>
         <p:spPr>
           <a:xfrm>
-            <a:off x="11064240" y="3383280"/>
+            <a:off x="11064240" y="1956816"/>
             <a:ext cx="731520" cy="457200"/>
           </a:xfrm>
           <a:prstGeom prst="rect">
@@ -12395,7 +12641,7 @@
         </p:nvSpPr>
         <p:spPr>
           <a:xfrm>
-            <a:off x="6217920" y="3840480"/>
+            <a:off x="6217920" y="2414016"/>
             <a:ext cx="5486400" cy="18288"/>
           </a:xfrm>
           <a:prstGeom prst="rect">
@@ -12438,7 +12684,7 @@
         </p:nvSpPr>
         <p:spPr>
           <a:xfrm>
-            <a:off x="6217920" y="3904488"/>
+            <a:off x="6217920" y="2478024"/>
             <a:ext cx="457200" cy="365760"/>
           </a:xfrm>
           <a:prstGeom prst="rect">
@@ -12490,7 +12736,7 @@
         </p:nvSpPr>
         <p:spPr>
           <a:xfrm>
-            <a:off x="6766560" y="3858768"/>
+            <a:off x="6766560" y="2432304"/>
             <a:ext cx="4114800" cy="457200"/>
           </a:xfrm>
           <a:prstGeom prst="rect">
@@ -12525,7 +12771,7 @@
         </p:nvSpPr>
         <p:spPr>
           <a:xfrm>
-            <a:off x="11064240" y="3858768"/>
+            <a:off x="11064240" y="2432304"/>
             <a:ext cx="731520" cy="457200"/>
           </a:xfrm>
           <a:prstGeom prst="rect">
@@ -12560,7 +12806,832 @@
         </p:nvSpPr>
         <p:spPr>
           <a:xfrm>
+            <a:off x="6217920" y="2889504"/>
+            <a:ext cx="5486400" cy="18288"/>
+          </a:xfrm>
+          <a:prstGeom prst="rect">
+            <a:avLst/>
+          </a:prstGeom>
+          <a:solidFill>
+            <a:srgbClr val="6B7C9E"/>
+          </a:solidFill>
+          <a:ln>
+            <a:noFill/>
+          </a:ln>
+        </p:spPr>
+        <p:style>
+          <a:lnRef idx="1">
+            <a:schemeClr val="accent1"/>
+          </a:lnRef>
+          <a:fillRef idx="3">
+            <a:schemeClr val="accent1"/>
+          </a:fillRef>
+          <a:effectRef idx="2">
+            <a:schemeClr val="accent1"/>
+          </a:effectRef>
+          <a:fontRef idx="minor">
+            <a:schemeClr val="lt1"/>
+          </a:fontRef>
+        </p:style>
+        <p:txBody>
+          <a:bodyPr rtlCol="0" anchor="ctr"/>
+          <a:lstStyle/>
+          <a:p>
+            <a:pPr algn="ctr"/>
+          </a:p>
+        </p:txBody>
+      </p:sp>
+      <p:sp>
+        <p:nvSpPr>
+          <p:cNvPr id="61" name="Rectangle 60"/>
+          <p:cNvSpPr/>
+          <p:nvPr/>
+        </p:nvSpPr>
+        <p:spPr>
+          <a:xfrm>
+            <a:off x="6217920" y="2953512"/>
+            <a:ext cx="457200" cy="365760"/>
+          </a:xfrm>
+          <a:prstGeom prst="rect">
+            <a:avLst/>
+          </a:prstGeom>
+          <a:solidFill>
+            <a:srgbClr val="1A2B4A"/>
+          </a:solidFill>
+          <a:ln>
+            <a:noFill/>
+          </a:ln>
+        </p:spPr>
+        <p:style>
+          <a:lnRef idx="1">
+            <a:schemeClr val="accent1"/>
+          </a:lnRef>
+          <a:fillRef idx="3">
+            <a:schemeClr val="accent1"/>
+          </a:fillRef>
+          <a:effectRef idx="2">
+            <a:schemeClr val="accent1"/>
+          </a:effectRef>
+          <a:fontRef idx="minor">
+            <a:schemeClr val="lt1"/>
+          </a:fontRef>
+        </p:style>
+        <p:txBody>
+          <a:bodyPr rtlCol="0" anchor="ctr"/>
+          <a:lstStyle/>
+          <a:p>
+            <a:pPr algn="ctr"/>
+            <a:r>
+              <a:rPr sz="1100" b="1">
+                <a:solidFill>
+                  <a:srgbClr val="FFFFFF"/>
+                </a:solidFill>
+                <a:latin typeface="Noto Sans JP"/>
+              </a:rPr>
+              <a:t>15</a:t>
+            </a:r>
+          </a:p>
+        </p:txBody>
+      </p:sp>
+      <p:sp>
+        <p:nvSpPr>
+          <p:cNvPr id="62" name="TextBox 61"/>
+          <p:cNvSpPr txBox="1"/>
+          <p:nvPr/>
+        </p:nvSpPr>
+        <p:spPr>
+          <a:xfrm>
+            <a:off x="6766560" y="2907792"/>
+            <a:ext cx="4114800" cy="457200"/>
+          </a:xfrm>
+          <a:prstGeom prst="rect">
+            <a:avLst/>
+          </a:prstGeom>
+          <a:noFill/>
+        </p:spPr>
+        <p:txBody>
+          <a:bodyPr wrap="square">
+            <a:spAutoFit/>
+          </a:bodyPr>
+          <a:lstStyle/>
+          <a:p>
+            <a:pPr algn="l"/>
+            <a:r>
+              <a:rPr sz="1400" b="0">
+                <a:solidFill>
+                  <a:srgbClr val="1A2B4A"/>
+                </a:solidFill>
+                <a:latin typeface="Noto Sans JP"/>
+              </a:rPr>
+              <a:t>i18n 多言語対応</a:t>
+            </a:r>
+          </a:p>
+        </p:txBody>
+      </p:sp>
+      <p:sp>
+        <p:nvSpPr>
+          <p:cNvPr id="63" name="TextBox 62"/>
+          <p:cNvSpPr txBox="1"/>
+          <p:nvPr/>
+        </p:nvSpPr>
+        <p:spPr>
+          <a:xfrm>
+            <a:off x="11064240" y="2907792"/>
+            <a:ext cx="731520" cy="457200"/>
+          </a:xfrm>
+          <a:prstGeom prst="rect">
+            <a:avLst/>
+          </a:prstGeom>
+          <a:noFill/>
+        </p:spPr>
+        <p:txBody>
+          <a:bodyPr wrap="square">
+            <a:spAutoFit/>
+          </a:bodyPr>
+          <a:lstStyle/>
+          <a:p>
+            <a:pPr algn="r"/>
+            <a:r>
+              <a:rPr sz="1300" b="0">
+                <a:solidFill>
+                  <a:srgbClr val="6B7C9E"/>
+                </a:solidFill>
+                <a:latin typeface="Noto Sans JP"/>
+              </a:rPr>
+              <a:t>p.24</a:t>
+            </a:r>
+          </a:p>
+        </p:txBody>
+      </p:sp>
+      <p:sp>
+        <p:nvSpPr>
+          <p:cNvPr id="64" name="Rectangle 63"/>
+          <p:cNvSpPr/>
+          <p:nvPr/>
+        </p:nvSpPr>
+        <p:spPr>
+          <a:xfrm>
+            <a:off x="6217920" y="3364992"/>
+            <a:ext cx="5486400" cy="18288"/>
+          </a:xfrm>
+          <a:prstGeom prst="rect">
+            <a:avLst/>
+          </a:prstGeom>
+          <a:solidFill>
+            <a:srgbClr val="6B7C9E"/>
+          </a:solidFill>
+          <a:ln>
+            <a:noFill/>
+          </a:ln>
+        </p:spPr>
+        <p:style>
+          <a:lnRef idx="1">
+            <a:schemeClr val="accent1"/>
+          </a:lnRef>
+          <a:fillRef idx="3">
+            <a:schemeClr val="accent1"/>
+          </a:fillRef>
+          <a:effectRef idx="2">
+            <a:schemeClr val="accent1"/>
+          </a:effectRef>
+          <a:fontRef idx="minor">
+            <a:schemeClr val="lt1"/>
+          </a:fontRef>
+        </p:style>
+        <p:txBody>
+          <a:bodyPr rtlCol="0" anchor="ctr"/>
+          <a:lstStyle/>
+          <a:p>
+            <a:pPr algn="ctr"/>
+          </a:p>
+        </p:txBody>
+      </p:sp>
+      <p:sp>
+        <p:nvSpPr>
+          <p:cNvPr id="65" name="Rectangle 64"/>
+          <p:cNvSpPr/>
+          <p:nvPr/>
+        </p:nvSpPr>
+        <p:spPr>
+          <a:xfrm>
+            <a:off x="6217920" y="3429000"/>
+            <a:ext cx="457200" cy="365760"/>
+          </a:xfrm>
+          <a:prstGeom prst="rect">
+            <a:avLst/>
+          </a:prstGeom>
+          <a:solidFill>
+            <a:srgbClr val="1A2B4A"/>
+          </a:solidFill>
+          <a:ln>
+            <a:noFill/>
+          </a:ln>
+        </p:spPr>
+        <p:style>
+          <a:lnRef idx="1">
+            <a:schemeClr val="accent1"/>
+          </a:lnRef>
+          <a:fillRef idx="3">
+            <a:schemeClr val="accent1"/>
+          </a:fillRef>
+          <a:effectRef idx="2">
+            <a:schemeClr val="accent1"/>
+          </a:effectRef>
+          <a:fontRef idx="minor">
+            <a:schemeClr val="lt1"/>
+          </a:fontRef>
+        </p:style>
+        <p:txBody>
+          <a:bodyPr rtlCol="0" anchor="ctr"/>
+          <a:lstStyle/>
+          <a:p>
+            <a:pPr algn="ctr"/>
+            <a:r>
+              <a:rPr sz="1100" b="1">
+                <a:solidFill>
+                  <a:srgbClr val="FFFFFF"/>
+                </a:solidFill>
+                <a:latin typeface="Noto Sans JP"/>
+              </a:rPr>
+              <a:t>16</a:t>
+            </a:r>
+          </a:p>
+        </p:txBody>
+      </p:sp>
+      <p:sp>
+        <p:nvSpPr>
+          <p:cNvPr id="66" name="TextBox 65"/>
+          <p:cNvSpPr txBox="1"/>
+          <p:nvPr/>
+        </p:nvSpPr>
+        <p:spPr>
+          <a:xfrm>
+            <a:off x="6766560" y="3383280"/>
+            <a:ext cx="4114800" cy="457200"/>
+          </a:xfrm>
+          <a:prstGeom prst="rect">
+            <a:avLst/>
+          </a:prstGeom>
+          <a:noFill/>
+        </p:spPr>
+        <p:txBody>
+          <a:bodyPr wrap="square">
+            <a:spAutoFit/>
+          </a:bodyPr>
+          <a:lstStyle/>
+          <a:p>
+            <a:pPr algn="l"/>
+            <a:r>
+              <a:rPr sz="1400" b="0">
+                <a:solidFill>
+                  <a:srgbClr val="1A2B4A"/>
+                </a:solidFill>
+                <a:latin typeface="Noto Sans JP"/>
+              </a:rPr>
+              <a:t>PWA 対応</a:t>
+            </a:r>
+          </a:p>
+        </p:txBody>
+      </p:sp>
+      <p:sp>
+        <p:nvSpPr>
+          <p:cNvPr id="67" name="TextBox 66"/>
+          <p:cNvSpPr txBox="1"/>
+          <p:nvPr/>
+        </p:nvSpPr>
+        <p:spPr>
+          <a:xfrm>
+            <a:off x="11064240" y="3383280"/>
+            <a:ext cx="731520" cy="457200"/>
+          </a:xfrm>
+          <a:prstGeom prst="rect">
+            <a:avLst/>
+          </a:prstGeom>
+          <a:noFill/>
+        </p:spPr>
+        <p:txBody>
+          <a:bodyPr wrap="square">
+            <a:spAutoFit/>
+          </a:bodyPr>
+          <a:lstStyle/>
+          <a:p>
+            <a:pPr algn="r"/>
+            <a:r>
+              <a:rPr sz="1300" b="0">
+                <a:solidFill>
+                  <a:srgbClr val="6B7C9E"/>
+                </a:solidFill>
+                <a:latin typeface="Noto Sans JP"/>
+              </a:rPr>
+              <a:t>p.25</a:t>
+            </a:r>
+          </a:p>
+        </p:txBody>
+      </p:sp>
+      <p:sp>
+        <p:nvSpPr>
+          <p:cNvPr id="68" name="Rectangle 67"/>
+          <p:cNvSpPr/>
+          <p:nvPr/>
+        </p:nvSpPr>
+        <p:spPr>
+          <a:xfrm>
+            <a:off x="6217920" y="3840480"/>
+            <a:ext cx="5486400" cy="18288"/>
+          </a:xfrm>
+          <a:prstGeom prst="rect">
+            <a:avLst/>
+          </a:prstGeom>
+          <a:solidFill>
+            <a:srgbClr val="6B7C9E"/>
+          </a:solidFill>
+          <a:ln>
+            <a:noFill/>
+          </a:ln>
+        </p:spPr>
+        <p:style>
+          <a:lnRef idx="1">
+            <a:schemeClr val="accent1"/>
+          </a:lnRef>
+          <a:fillRef idx="3">
+            <a:schemeClr val="accent1"/>
+          </a:fillRef>
+          <a:effectRef idx="2">
+            <a:schemeClr val="accent1"/>
+          </a:effectRef>
+          <a:fontRef idx="minor">
+            <a:schemeClr val="lt1"/>
+          </a:fontRef>
+        </p:style>
+        <p:txBody>
+          <a:bodyPr rtlCol="0" anchor="ctr"/>
+          <a:lstStyle/>
+          <a:p>
+            <a:pPr algn="ctr"/>
+          </a:p>
+        </p:txBody>
+      </p:sp>
+      <p:sp>
+        <p:nvSpPr>
+          <p:cNvPr id="69" name="Rectangle 68"/>
+          <p:cNvSpPr/>
+          <p:nvPr/>
+        </p:nvSpPr>
+        <p:spPr>
+          <a:xfrm>
+            <a:off x="6217920" y="3904488"/>
+            <a:ext cx="457200" cy="365760"/>
+          </a:xfrm>
+          <a:prstGeom prst="rect">
+            <a:avLst/>
+          </a:prstGeom>
+          <a:solidFill>
+            <a:srgbClr val="1A2B4A"/>
+          </a:solidFill>
+          <a:ln>
+            <a:noFill/>
+          </a:ln>
+        </p:spPr>
+        <p:style>
+          <a:lnRef idx="1">
+            <a:schemeClr val="accent1"/>
+          </a:lnRef>
+          <a:fillRef idx="3">
+            <a:schemeClr val="accent1"/>
+          </a:fillRef>
+          <a:effectRef idx="2">
+            <a:schemeClr val="accent1"/>
+          </a:effectRef>
+          <a:fontRef idx="minor">
+            <a:schemeClr val="lt1"/>
+          </a:fontRef>
+        </p:style>
+        <p:txBody>
+          <a:bodyPr rtlCol="0" anchor="ctr"/>
+          <a:lstStyle/>
+          <a:p>
+            <a:pPr algn="ctr"/>
+            <a:r>
+              <a:rPr sz="1100" b="1">
+                <a:solidFill>
+                  <a:srgbClr val="FFFFFF"/>
+                </a:solidFill>
+                <a:latin typeface="Noto Sans JP"/>
+              </a:rPr>
+              <a:t>17</a:t>
+            </a:r>
+          </a:p>
+        </p:txBody>
+      </p:sp>
+      <p:sp>
+        <p:nvSpPr>
+          <p:cNvPr id="70" name="TextBox 69"/>
+          <p:cNvSpPr txBox="1"/>
+          <p:nvPr/>
+        </p:nvSpPr>
+        <p:spPr>
+          <a:xfrm>
+            <a:off x="6766560" y="3858768"/>
+            <a:ext cx="4114800" cy="457200"/>
+          </a:xfrm>
+          <a:prstGeom prst="rect">
+            <a:avLst/>
+          </a:prstGeom>
+          <a:noFill/>
+        </p:spPr>
+        <p:txBody>
+          <a:bodyPr wrap="square">
+            <a:spAutoFit/>
+          </a:bodyPr>
+          <a:lstStyle/>
+          <a:p>
+            <a:pPr algn="l"/>
+            <a:r>
+              <a:rPr sz="1400" b="0">
+                <a:solidFill>
+                  <a:srgbClr val="1A2B4A"/>
+                </a:solidFill>
+                <a:latin typeface="Noto Sans JP"/>
+              </a:rPr>
+              <a:t>問診票機能</a:t>
+            </a:r>
+          </a:p>
+        </p:txBody>
+      </p:sp>
+      <p:sp>
+        <p:nvSpPr>
+          <p:cNvPr id="71" name="TextBox 70"/>
+          <p:cNvSpPr txBox="1"/>
+          <p:nvPr/>
+        </p:nvSpPr>
+        <p:spPr>
+          <a:xfrm>
+            <a:off x="11064240" y="3858768"/>
+            <a:ext cx="731520" cy="457200"/>
+          </a:xfrm>
+          <a:prstGeom prst="rect">
+            <a:avLst/>
+          </a:prstGeom>
+          <a:noFill/>
+        </p:spPr>
+        <p:txBody>
+          <a:bodyPr wrap="square">
+            <a:spAutoFit/>
+          </a:bodyPr>
+          <a:lstStyle/>
+          <a:p>
+            <a:pPr algn="r"/>
+            <a:r>
+              <a:rPr sz="1300" b="0">
+                <a:solidFill>
+                  <a:srgbClr val="6B7C9E"/>
+                </a:solidFill>
+                <a:latin typeface="Noto Sans JP"/>
+              </a:rPr>
+              <a:t>p.26</a:t>
+            </a:r>
+          </a:p>
+        </p:txBody>
+      </p:sp>
+      <p:sp>
+        <p:nvSpPr>
+          <p:cNvPr id="72" name="Rectangle 71"/>
+          <p:cNvSpPr/>
+          <p:nvPr/>
+        </p:nvSpPr>
+        <p:spPr>
+          <a:xfrm>
             <a:off x="6217920" y="4315968"/>
+            <a:ext cx="5486400" cy="18288"/>
+          </a:xfrm>
+          <a:prstGeom prst="rect">
+            <a:avLst/>
+          </a:prstGeom>
+          <a:solidFill>
+            <a:srgbClr val="6B7C9E"/>
+          </a:solidFill>
+          <a:ln>
+            <a:noFill/>
+          </a:ln>
+        </p:spPr>
+        <p:style>
+          <a:lnRef idx="1">
+            <a:schemeClr val="accent1"/>
+          </a:lnRef>
+          <a:fillRef idx="3">
+            <a:schemeClr val="accent1"/>
+          </a:fillRef>
+          <a:effectRef idx="2">
+            <a:schemeClr val="accent1"/>
+          </a:effectRef>
+          <a:fontRef idx="minor">
+            <a:schemeClr val="lt1"/>
+          </a:fontRef>
+        </p:style>
+        <p:txBody>
+          <a:bodyPr rtlCol="0" anchor="ctr"/>
+          <a:lstStyle/>
+          <a:p>
+            <a:pPr algn="ctr"/>
+          </a:p>
+        </p:txBody>
+      </p:sp>
+      <p:sp>
+        <p:nvSpPr>
+          <p:cNvPr id="73" name="Rectangle 72"/>
+          <p:cNvSpPr/>
+          <p:nvPr/>
+        </p:nvSpPr>
+        <p:spPr>
+          <a:xfrm>
+            <a:off x="6217920" y="4379976"/>
+            <a:ext cx="457200" cy="365760"/>
+          </a:xfrm>
+          <a:prstGeom prst="rect">
+            <a:avLst/>
+          </a:prstGeom>
+          <a:solidFill>
+            <a:srgbClr val="1A2B4A"/>
+          </a:solidFill>
+          <a:ln>
+            <a:noFill/>
+          </a:ln>
+        </p:spPr>
+        <p:style>
+          <a:lnRef idx="1">
+            <a:schemeClr val="accent1"/>
+          </a:lnRef>
+          <a:fillRef idx="3">
+            <a:schemeClr val="accent1"/>
+          </a:fillRef>
+          <a:effectRef idx="2">
+            <a:schemeClr val="accent1"/>
+          </a:effectRef>
+          <a:fontRef idx="minor">
+            <a:schemeClr val="lt1"/>
+          </a:fontRef>
+        </p:style>
+        <p:txBody>
+          <a:bodyPr rtlCol="0" anchor="ctr"/>
+          <a:lstStyle/>
+          <a:p>
+            <a:pPr algn="ctr"/>
+            <a:r>
+              <a:rPr sz="1100" b="1">
+                <a:solidFill>
+                  <a:srgbClr val="FFFFFF"/>
+                </a:solidFill>
+                <a:latin typeface="Noto Sans JP"/>
+              </a:rPr>
+              <a:t>18</a:t>
+            </a:r>
+          </a:p>
+        </p:txBody>
+      </p:sp>
+      <p:sp>
+        <p:nvSpPr>
+          <p:cNvPr id="74" name="TextBox 73"/>
+          <p:cNvSpPr txBox="1"/>
+          <p:nvPr/>
+        </p:nvSpPr>
+        <p:spPr>
+          <a:xfrm>
+            <a:off x="6766560" y="4334256"/>
+            <a:ext cx="4114800" cy="457200"/>
+          </a:xfrm>
+          <a:prstGeom prst="rect">
+            <a:avLst/>
+          </a:prstGeom>
+          <a:noFill/>
+        </p:spPr>
+        <p:txBody>
+          <a:bodyPr wrap="square">
+            <a:spAutoFit/>
+          </a:bodyPr>
+          <a:lstStyle/>
+          <a:p>
+            <a:pPr algn="l"/>
+            <a:r>
+              <a:rPr sz="1400" b="0">
+                <a:solidFill>
+                  <a:srgbClr val="1A2B4A"/>
+                </a:solidFill>
+                <a:latin typeface="Noto Sans JP"/>
+              </a:rPr>
+              <a:t>診察履歴・APPI対応</a:t>
+            </a:r>
+          </a:p>
+        </p:txBody>
+      </p:sp>
+      <p:sp>
+        <p:nvSpPr>
+          <p:cNvPr id="75" name="TextBox 74"/>
+          <p:cNvSpPr txBox="1"/>
+          <p:nvPr/>
+        </p:nvSpPr>
+        <p:spPr>
+          <a:xfrm>
+            <a:off x="11064240" y="4334256"/>
+            <a:ext cx="731520" cy="457200"/>
+          </a:xfrm>
+          <a:prstGeom prst="rect">
+            <a:avLst/>
+          </a:prstGeom>
+          <a:noFill/>
+        </p:spPr>
+        <p:txBody>
+          <a:bodyPr wrap="square">
+            <a:spAutoFit/>
+          </a:bodyPr>
+          <a:lstStyle/>
+          <a:p>
+            <a:pPr algn="r"/>
+            <a:r>
+              <a:rPr sz="1300" b="0">
+                <a:solidFill>
+                  <a:srgbClr val="6B7C9E"/>
+                </a:solidFill>
+                <a:latin typeface="Noto Sans JP"/>
+              </a:rPr>
+              <a:t>p.27</a:t>
+            </a:r>
+          </a:p>
+        </p:txBody>
+      </p:sp>
+      <p:sp>
+        <p:nvSpPr>
+          <p:cNvPr id="76" name="Rectangle 75"/>
+          <p:cNvSpPr/>
+          <p:nvPr/>
+        </p:nvSpPr>
+        <p:spPr>
+          <a:xfrm>
+            <a:off x="6217920" y="4791456"/>
+            <a:ext cx="5486400" cy="18288"/>
+          </a:xfrm>
+          <a:prstGeom prst="rect">
+            <a:avLst/>
+          </a:prstGeom>
+          <a:solidFill>
+            <a:srgbClr val="6B7C9E"/>
+          </a:solidFill>
+          <a:ln>
+            <a:noFill/>
+          </a:ln>
+        </p:spPr>
+        <p:style>
+          <a:lnRef idx="1">
+            <a:schemeClr val="accent1"/>
+          </a:lnRef>
+          <a:fillRef idx="3">
+            <a:schemeClr val="accent1"/>
+          </a:fillRef>
+          <a:effectRef idx="2">
+            <a:schemeClr val="accent1"/>
+          </a:effectRef>
+          <a:fontRef idx="minor">
+            <a:schemeClr val="lt1"/>
+          </a:fontRef>
+        </p:style>
+        <p:txBody>
+          <a:bodyPr rtlCol="0" anchor="ctr"/>
+          <a:lstStyle/>
+          <a:p>
+            <a:pPr algn="ctr"/>
+          </a:p>
+        </p:txBody>
+      </p:sp>
+      <p:sp>
+        <p:nvSpPr>
+          <p:cNvPr id="77" name="Rectangle 76"/>
+          <p:cNvSpPr/>
+          <p:nvPr/>
+        </p:nvSpPr>
+        <p:spPr>
+          <a:xfrm>
+            <a:off x="6217920" y="4855464"/>
+            <a:ext cx="457200" cy="365760"/>
+          </a:xfrm>
+          <a:prstGeom prst="rect">
+            <a:avLst/>
+          </a:prstGeom>
+          <a:solidFill>
+            <a:srgbClr val="1A2B4A"/>
+          </a:solidFill>
+          <a:ln>
+            <a:noFill/>
+          </a:ln>
+        </p:spPr>
+        <p:style>
+          <a:lnRef idx="1">
+            <a:schemeClr val="accent1"/>
+          </a:lnRef>
+          <a:fillRef idx="3">
+            <a:schemeClr val="accent1"/>
+          </a:fillRef>
+          <a:effectRef idx="2">
+            <a:schemeClr val="accent1"/>
+          </a:effectRef>
+          <a:fontRef idx="minor">
+            <a:schemeClr val="lt1"/>
+          </a:fontRef>
+        </p:style>
+        <p:txBody>
+          <a:bodyPr rtlCol="0" anchor="ctr"/>
+          <a:lstStyle/>
+          <a:p>
+            <a:pPr algn="ctr"/>
+            <a:r>
+              <a:rPr sz="1100" b="1">
+                <a:solidFill>
+                  <a:srgbClr val="FFFFFF"/>
+                </a:solidFill>
+                <a:latin typeface="Noto Sans JP"/>
+              </a:rPr>
+              <a:t>19</a:t>
+            </a:r>
+          </a:p>
+        </p:txBody>
+      </p:sp>
+      <p:sp>
+        <p:nvSpPr>
+          <p:cNvPr id="78" name="TextBox 77"/>
+          <p:cNvSpPr txBox="1"/>
+          <p:nvPr/>
+        </p:nvSpPr>
+        <p:spPr>
+          <a:xfrm>
+            <a:off x="6766560" y="4809744"/>
+            <a:ext cx="4114800" cy="457200"/>
+          </a:xfrm>
+          <a:prstGeom prst="rect">
+            <a:avLst/>
+          </a:prstGeom>
+          <a:noFill/>
+        </p:spPr>
+        <p:txBody>
+          <a:bodyPr wrap="square">
+            <a:spAutoFit/>
+          </a:bodyPr>
+          <a:lstStyle/>
+          <a:p>
+            <a:pPr algn="l"/>
+            <a:r>
+              <a:rPr sz="1400" b="0">
+                <a:solidFill>
+                  <a:srgbClr val="1A2B4A"/>
+                </a:solidFill>
+                <a:latin typeface="Noto Sans JP"/>
+              </a:rPr>
+              <a:t>アクセスログ・リマインダー</a:t>
+            </a:r>
+          </a:p>
+        </p:txBody>
+      </p:sp>
+      <p:sp>
+        <p:nvSpPr>
+          <p:cNvPr id="79" name="TextBox 78"/>
+          <p:cNvSpPr txBox="1"/>
+          <p:nvPr/>
+        </p:nvSpPr>
+        <p:spPr>
+          <a:xfrm>
+            <a:off x="11064240" y="4809744"/>
+            <a:ext cx="731520" cy="457200"/>
+          </a:xfrm>
+          <a:prstGeom prst="rect">
+            <a:avLst/>
+          </a:prstGeom>
+          <a:noFill/>
+        </p:spPr>
+        <p:txBody>
+          <a:bodyPr wrap="square">
+            <a:spAutoFit/>
+          </a:bodyPr>
+          <a:lstStyle/>
+          <a:p>
+            <a:pPr algn="r"/>
+            <a:r>
+              <a:rPr sz="1300" b="0">
+                <a:solidFill>
+                  <a:srgbClr val="6B7C9E"/>
+                </a:solidFill>
+                <a:latin typeface="Noto Sans JP"/>
+              </a:rPr>
+              <a:t>p.28</a:t>
+            </a:r>
+          </a:p>
+        </p:txBody>
+      </p:sp>
+      <p:sp>
+        <p:nvSpPr>
+          <p:cNvPr id="80" name="Rectangle 79"/>
+          <p:cNvSpPr/>
+          <p:nvPr/>
+        </p:nvSpPr>
+        <p:spPr>
+          <a:xfrm>
+            <a:off x="6217920" y="5266944"/>
             <a:ext cx="5486400" cy="18288"/>
           </a:xfrm>
           <a:prstGeom prst="rect">
@@ -12772,7 +13843,7 @@
                 </a:solidFill>
                 <a:latin typeface="Noto Sans JP"/>
               </a:rPr>
-              <a:t>5. 運用・デプロイ</a:t>
+              <a:t>5. 新機能（v4 エンハンス）</a:t>
             </a:r>
           </a:p>
         </p:txBody>
@@ -12807,7 +13878,7 @@
                 </a:solidFill>
                 <a:latin typeface="Noto Sans JP"/>
               </a:rPr>
-              <a:t>  Firebase Hosting マルチサイト構成</a:t>
+              <a:t>  i18n 多言語対応（react-i18next / 7言語 / 5ネームスペース）</a:t>
             </a:r>
           </a:p>
         </p:txBody>
@@ -12842,7 +13913,7 @@
                 </a:solidFill>
                 <a:latin typeface="Noto Sans JP"/>
               </a:rPr>
-              <a:t>  デプロイコマンド（--only スコープ厳守）</a:t>
+              <a:t>  PWA 対応（vite-plugin-pwa / Workbox / offline cache / InstallBanner）</a:t>
             </a:r>
           </a:p>
         </p:txBody>
@@ -12877,7 +13948,77 @@
                 </a:solidFill>
                 <a:latin typeface="Noto Sans JP"/>
               </a:rPr>
-              <a:t>  レガシー URL リダイレクト</a:t>
+              <a:t>  問診票機能（/questionnaire / 18フィールド / pdf-lib PDF出力）</a:t>
+            </a:r>
+          </a:p>
+        </p:txBody>
+      </p:sp>
+      <p:sp>
+        <p:nvSpPr>
+          <p:cNvPr id="9" name="TextBox 8"/>
+          <p:cNvSpPr txBox="1"/>
+          <p:nvPr/>
+        </p:nvSpPr>
+        <p:spPr>
+          <a:xfrm>
+            <a:off x="640080" y="3474720"/>
+            <a:ext cx="10972800" cy="457200"/>
+          </a:xfrm>
+          <a:prstGeom prst="rect">
+            <a:avLst/>
+          </a:prstGeom>
+          <a:noFill/>
+        </p:spPr>
+        <p:txBody>
+          <a:bodyPr wrap="square">
+            <a:spAutoFit/>
+          </a:bodyPr>
+          <a:lstStyle/>
+          <a:p>
+            <a:pPr algn="l"/>
+            <a:r>
+              <a:rPr sz="1600" b="0">
+                <a:solidFill>
+                  <a:srgbClr val="F8F5EE"/>
+                </a:solidFill>
+                <a:latin typeface="Noto Sans JP"/>
+              </a:rPr>
+              <a:t>  診察履歴・APPI訂正権（completeVisit CF / visit_histories / corrections）</a:t>
+            </a:r>
+          </a:p>
+        </p:txBody>
+      </p:sp>
+      <p:sp>
+        <p:nvSpPr>
+          <p:cNvPr id="10" name="TextBox 9"/>
+          <p:cNvSpPr txBox="1"/>
+          <p:nvPr/>
+        </p:nvSpPr>
+        <p:spPr>
+          <a:xfrm>
+            <a:off x="640080" y="3931920"/>
+            <a:ext cx="10972800" cy="457200"/>
+          </a:xfrm>
+          <a:prstGeom prst="rect">
+            <a:avLst/>
+          </a:prstGeom>
+          <a:noFill/>
+        </p:spPr>
+        <p:txBody>
+          <a:bodyPr wrap="square">
+            <a:spAutoFit/>
+          </a:bodyPr>
+          <a:lstStyle/>
+          <a:p>
+            <a:pPr algn="l"/>
+            <a:r>
+              <a:rPr sz="1600" b="0">
+                <a:solidFill>
+                  <a:srgbClr val="F8F5EE"/>
+                </a:solidFill>
+                <a:latin typeface="Noto Sans JP"/>
+              </a:rPr>
+              <a:t>  アクセスログ・リマインダーopt-out（logAccess / HMAC-SHA256）</a:t>
             </a:r>
           </a:p>
         </p:txBody>
@@ -13016,7 +14157,7 @@
                 </a:solidFill>
                 <a:latin typeface="Noto Sans JP"/>
               </a:rPr>
-              <a:t>デプロイ構成</a:t>
+              <a:t>i18n 多言語対応</a:t>
             </a:r>
           </a:p>
         </p:txBody>
@@ -13068,7 +14209,7 @@
                 </a:solidFill>
                 <a:latin typeface="Noto Sans JP"/>
               </a:rPr>
-              <a:t>運用</a:t>
+              <a:t>新機能</a:t>
             </a:r>
           </a:p>
         </p:txBody>
@@ -13082,7 +14223,7 @@
         <p:spPr>
           <a:xfrm>
             <a:off x="457200" y="1005840"/>
-            <a:ext cx="11274552" cy="5303520"/>
+            <a:ext cx="5394960" cy="5303520"/>
           </a:xfrm>
           <a:prstGeom prst="rect">
             <a:avLst/>
@@ -13118,14 +14259,57 @@
       </p:sp>
       <p:sp>
         <p:nvSpPr>
-          <p:cNvPr id="7" name="TextBox 6"/>
+          <p:cNvPr id="7" name="Rectangle 6"/>
+          <p:cNvSpPr/>
+          <p:nvPr/>
+        </p:nvSpPr>
+        <p:spPr>
+          <a:xfrm>
+            <a:off x="457200" y="1005840"/>
+            <a:ext cx="5394960" cy="502920"/>
+          </a:xfrm>
+          <a:prstGeom prst="rect">
+            <a:avLst/>
+          </a:prstGeom>
+          <a:solidFill>
+            <a:srgbClr val="1A2B4A"/>
+          </a:solidFill>
+          <a:ln>
+            <a:noFill/>
+          </a:ln>
+        </p:spPr>
+        <p:style>
+          <a:lnRef idx="1">
+            <a:schemeClr val="accent1"/>
+          </a:lnRef>
+          <a:fillRef idx="3">
+            <a:schemeClr val="accent1"/>
+          </a:fillRef>
+          <a:effectRef idx="2">
+            <a:schemeClr val="accent1"/>
+          </a:effectRef>
+          <a:fontRef idx="minor">
+            <a:schemeClr val="lt1"/>
+          </a:fontRef>
+        </p:style>
+        <p:txBody>
+          <a:bodyPr rtlCol="0" anchor="ctr"/>
+          <a:lstStyle/>
+          <a:p>
+            <a:pPr algn="ctr"/>
+          </a:p>
+        </p:txBody>
+      </p:sp>
+      <p:sp>
+        <p:nvSpPr>
+          <p:cNvPr id="8" name="TextBox 7"/>
           <p:cNvSpPr txBox="1"/>
           <p:nvPr/>
         </p:nvSpPr>
         <p:spPr>
           <a:xfrm>
-            <a:off x="731520" y="1188720"/>
-            <a:ext cx="10972800" cy="5029200"/>
+            <a:off x="548640" y="1051560"/>
+            <a:ext cx="5212080" cy="457200"/>
           </a:xfrm>
           <a:prstGeom prst="rect">
             <a:avLst/>
@@ -13138,65 +14322,100 @@
           </a:bodyPr>
           <a:lstStyle/>
           <a:p>
-            <a:pPr algn="l">
-              <a:lnSpc>
-                <a:spcPts val="2100"/>
-              </a:lnSpc>
-            </a:pPr>
-            <a:r>
-              <a:rPr sz="1250" b="0">
-                <a:solidFill>
-                  <a:srgbClr val="1A2B4A"/>
-                </a:solidFill>
-                <a:latin typeface="Courier New"/>
-              </a:rPr>
-              <a:t>## Firebase Hosting マルチサイト</a:t>
-            </a:r>
-          </a:p>
-          <a:p>
-            <a:pPr algn="l">
-              <a:lnSpc>
-                <a:spcPts val="2100"/>
-              </a:lnSpc>
-            </a:pPr>
-            <a:r>
-              <a:rPr sz="1250" b="0">
-                <a:solidFill>
-                  <a:srgbClr val="1A2B4A"/>
-                </a:solidFill>
-                <a:latin typeface="Courier New"/>
-              </a:rPr>
-              <a:t>・portfolio: kojinius.jp</a:t>
-            </a:r>
-          </a:p>
-          <a:p>
-            <a:pPr algn="l">
-              <a:lnSpc>
-                <a:spcPts val="2100"/>
-              </a:lnSpc>
-            </a:pPr>
-            <a:r>
-              <a:rPr sz="1250" b="0">
-                <a:solidFill>
-                  <a:srgbClr val="1A2B4A"/>
-                </a:solidFill>
-                <a:latin typeface="Courier New"/>
-              </a:rPr>
-              <a:t>・oas: oas.kojinius.jp  ← OAS SPA の配信先</a:t>
-            </a:r>
-          </a:p>
-          <a:p>
-            <a:pPr algn="l">
-              <a:lnSpc>
-                <a:spcPts val="2100"/>
-              </a:lnSpc>
-            </a:pPr>
-            <a:r>
-              <a:rPr sz="1250" b="0">
-                <a:solidFill>
-                  <a:srgbClr val="1A2B4A"/>
-                </a:solidFill>
-                <a:latin typeface="Courier New"/>
+            <a:pPr algn="l"/>
+            <a:r>
+              <a:rPr sz="1500" b="1">
+                <a:solidFill>
+                  <a:srgbClr val="FFFFFF"/>
+                </a:solidFill>
+                <a:latin typeface="Noto Sans JP"/>
+              </a:rPr>
+              <a:t>構成・対応言語</a:t>
+            </a:r>
+          </a:p>
+        </p:txBody>
+      </p:sp>
+      <p:sp>
+        <p:nvSpPr>
+          <p:cNvPr id="9" name="TextBox 8"/>
+          <p:cNvSpPr txBox="1"/>
+          <p:nvPr/>
+        </p:nvSpPr>
+        <p:spPr>
+          <a:xfrm>
+            <a:off x="594360" y="1600200"/>
+            <a:ext cx="5120640" cy="4617720"/>
+          </a:xfrm>
+          <a:prstGeom prst="rect">
+            <a:avLst/>
+          </a:prstGeom>
+          <a:noFill/>
+        </p:spPr>
+        <p:txBody>
+          <a:bodyPr wrap="square">
+            <a:spAutoFit/>
+          </a:bodyPr>
+          <a:lstStyle/>
+          <a:p>
+            <a:pPr algn="l">
+              <a:lnSpc>
+                <a:spcPts val="2000"/>
+              </a:lnSpc>
+            </a:pPr>
+            <a:r>
+              <a:rPr sz="1300" b="0">
+                <a:solidFill>
+                  <a:srgbClr val="1A2B4A"/>
+                </a:solidFill>
+                <a:latin typeface="Noto Sans JP"/>
+              </a:rPr>
+              <a:t>## ライブラリ</a:t>
+            </a:r>
+          </a:p>
+          <a:p>
+            <a:pPr algn="l">
+              <a:lnSpc>
+                <a:spcPts val="2000"/>
+              </a:lnSpc>
+            </a:pPr>
+            <a:r>
+              <a:rPr sz="1300" b="0">
+                <a:solidFill>
+                  <a:srgbClr val="1A2B4A"/>
+                </a:solidFill>
+                <a:latin typeface="Noto Sans JP"/>
+              </a:rPr>
+              <a:t>・react-i18next</a:t>
+            </a:r>
+          </a:p>
+          <a:p>
+            <a:pPr algn="l">
+              <a:lnSpc>
+                <a:spcPts val="2000"/>
+              </a:lnSpc>
+            </a:pPr>
+            <a:r>
+              <a:rPr sz="1300" b="0">
+                <a:solidFill>
+                  <a:srgbClr val="1A2B4A"/>
+                </a:solidFill>
+                <a:latin typeface="Noto Sans JP"/>
+              </a:rPr>
+              <a:t>・i18next-browser-languagedetector</a:t>
+            </a:r>
+          </a:p>
+          <a:p>
+            <a:pPr algn="l">
+              <a:lnSpc>
+                <a:spcPts val="2000"/>
+              </a:lnSpc>
+            </a:pPr>
+            <a:r>
+              <a:rPr sz="1300" b="0">
+                <a:solidFill>
+                  <a:srgbClr val="1A2B4A"/>
+                </a:solidFill>
+                <a:latin typeface="Noto Sans JP"/>
               </a:rPr>
               <a:t/>
             </a:r>
@@ -13204,63 +14423,143 @@
           <a:p>
             <a:pPr algn="l">
               <a:lnSpc>
-                <a:spcPts val="2100"/>
-              </a:lnSpc>
-            </a:pPr>
-            <a:r>
-              <a:rPr sz="1250" b="0">
-                <a:solidFill>
-                  <a:srgbClr val="1A2B4A"/>
-                </a:solidFill>
-                <a:latin typeface="Courier New"/>
-              </a:rPr>
-              <a:t>## デプロイコマンド（スコープ指定を厳守）</a:t>
-            </a:r>
-          </a:p>
-          <a:p>
-            <a:pPr algn="l">
-              <a:lnSpc>
-                <a:spcPts val="2100"/>
-              </a:lnSpc>
-            </a:pPr>
-            <a:r>
-              <a:rPr sz="1250" b="0">
-                <a:solidFill>
-                  <a:srgbClr val="1A2B4A"/>
-                </a:solidFill>
-                <a:latin typeface="Courier New"/>
-              </a:rPr>
-              <a:t># Firestore ルール</a:t>
-            </a:r>
-          </a:p>
-          <a:p>
-            <a:pPr algn="l">
-              <a:lnSpc>
-                <a:spcPts val="2100"/>
-              </a:lnSpc>
-            </a:pPr>
-            <a:r>
-              <a:rPr sz="1250" b="0">
-                <a:solidFill>
-                  <a:srgbClr val="1A2B4A"/>
-                </a:solidFill>
-                <a:latin typeface="Courier New"/>
-              </a:rPr>
-              <a:t>firebase deploy --only firestore:rules --project project-3040e21e-879f-4c66-a7d</a:t>
-            </a:r>
-          </a:p>
-          <a:p>
-            <a:pPr algn="l">
-              <a:lnSpc>
-                <a:spcPts val="2100"/>
-              </a:lnSpc>
-            </a:pPr>
-            <a:r>
-              <a:rPr sz="1250" b="0">
-                <a:solidFill>
-                  <a:srgbClr val="1A2B4A"/>
-                </a:solidFill>
-                <a:latin typeface="Courier New"/>
+                <a:spcPts val="2000"/>
+              </a:lnSpc>
+            </a:pPr>
+            <a:r>
+              <a:rPr sz="1300" b="0">
+                <a:solidFill>
+                  <a:srgbClr val="1A2B4A"/>
+                </a:solidFill>
+                <a:latin typeface="Noto Sans JP"/>
+              </a:rPr>
+              <a:t>## 対応言語（7言語）</a:t>
+            </a:r>
+          </a:p>
+          <a:p>
+            <a:pPr algn="l">
+              <a:lnSpc>
+                <a:spcPts val="2000"/>
+              </a:lnSpc>
+            </a:pPr>
+            <a:r>
+              <a:rPr sz="1300" b="0">
+                <a:solidFill>
+                  <a:srgbClr val="1A2B4A"/>
+                </a:solidFill>
+                <a:latin typeface="Noto Sans JP"/>
+              </a:rPr>
+              <a:t>・ja  日本語（デフォルト）</a:t>
+            </a:r>
+          </a:p>
+          <a:p>
+            <a:pPr algn="l">
+              <a:lnSpc>
+                <a:spcPts val="2000"/>
+              </a:lnSpc>
+            </a:pPr>
+            <a:r>
+              <a:rPr sz="1300" b="0">
+                <a:solidFill>
+                  <a:srgbClr val="1A2B4A"/>
+                </a:solidFill>
+                <a:latin typeface="Noto Sans JP"/>
+              </a:rPr>
+              <a:t>・en  英語</a:t>
+            </a:r>
+          </a:p>
+          <a:p>
+            <a:pPr algn="l">
+              <a:lnSpc>
+                <a:spcPts val="2000"/>
+              </a:lnSpc>
+            </a:pPr>
+            <a:r>
+              <a:rPr sz="1300" b="0">
+                <a:solidFill>
+                  <a:srgbClr val="1A2B4A"/>
+                </a:solidFill>
+                <a:latin typeface="Noto Sans JP"/>
+              </a:rPr>
+              <a:t>・zh  中国語（簡体字）</a:t>
+            </a:r>
+          </a:p>
+          <a:p>
+            <a:pPr algn="l">
+              <a:lnSpc>
+                <a:spcPts val="2000"/>
+              </a:lnSpc>
+            </a:pPr>
+            <a:r>
+              <a:rPr sz="1300" b="0">
+                <a:solidFill>
+                  <a:srgbClr val="1A2B4A"/>
+                </a:solidFill>
+                <a:latin typeface="Noto Sans JP"/>
+              </a:rPr>
+              <a:t>・ko  韓国語</a:t>
+            </a:r>
+          </a:p>
+          <a:p>
+            <a:pPr algn="l">
+              <a:lnSpc>
+                <a:spcPts val="2000"/>
+              </a:lnSpc>
+            </a:pPr>
+            <a:r>
+              <a:rPr sz="1300" b="0">
+                <a:solidFill>
+                  <a:srgbClr val="1A2B4A"/>
+                </a:solidFill>
+                <a:latin typeface="Noto Sans JP"/>
+              </a:rPr>
+              <a:t>・vi  ベトナム語</a:t>
+            </a:r>
+          </a:p>
+          <a:p>
+            <a:pPr algn="l">
+              <a:lnSpc>
+                <a:spcPts val="2000"/>
+              </a:lnSpc>
+            </a:pPr>
+            <a:r>
+              <a:rPr sz="1300" b="0">
+                <a:solidFill>
+                  <a:srgbClr val="1A2B4A"/>
+                </a:solidFill>
+                <a:latin typeface="Noto Sans JP"/>
+              </a:rPr>
+              <a:t>・pt  ポルトガル語</a:t>
+            </a:r>
+          </a:p>
+          <a:p>
+            <a:pPr algn="l">
+              <a:lnSpc>
+                <a:spcPts val="2000"/>
+              </a:lnSpc>
+            </a:pPr>
+            <a:r>
+              <a:rPr sz="1300" b="0">
+                <a:solidFill>
+                  <a:srgbClr val="1A2B4A"/>
+                </a:solidFill>
+                <a:latin typeface="Noto Sans JP"/>
+              </a:rPr>
+              <a:t>・es  スペイン語</a:t>
+            </a:r>
+          </a:p>
+          <a:p>
+            <a:pPr algn="l">
+              <a:lnSpc>
+                <a:spcPts val="2000"/>
+              </a:lnSpc>
+            </a:pPr>
+            <a:r>
+              <a:rPr sz="1300" b="0">
+                <a:solidFill>
+                  <a:srgbClr val="1A2B4A"/>
+                </a:solidFill>
+                <a:latin typeface="Noto Sans JP"/>
               </a:rPr>
               <a:t/>
             </a:r>
@@ -13268,47 +14567,111 @@
           <a:p>
             <a:pPr algn="l">
               <a:lnSpc>
-                <a:spcPts val="2100"/>
-              </a:lnSpc>
-            </a:pPr>
-            <a:r>
-              <a:rPr sz="1250" b="0">
-                <a:solidFill>
-                  <a:srgbClr val="1A2B4A"/>
-                </a:solidFill>
-                <a:latin typeface="Courier New"/>
-              </a:rPr>
-              <a:t># Cloud Functions</a:t>
-            </a:r>
-          </a:p>
-          <a:p>
-            <a:pPr algn="l">
-              <a:lnSpc>
-                <a:spcPts val="2100"/>
-              </a:lnSpc>
-            </a:pPr>
-            <a:r>
-              <a:rPr sz="1250" b="0">
-                <a:solidFill>
-                  <a:srgbClr val="1A2B4A"/>
-                </a:solidFill>
-                <a:latin typeface="Courier New"/>
-              </a:rPr>
-              <a:t>firebase deploy --only functions --project project-3040e21e-879f-4c66-a7d</a:t>
-            </a:r>
-          </a:p>
-          <a:p>
-            <a:pPr algn="l">
-              <a:lnSpc>
-                <a:spcPts val="2100"/>
-              </a:lnSpc>
-            </a:pPr>
-            <a:r>
-              <a:rPr sz="1250" b="0">
-                <a:solidFill>
-                  <a:srgbClr val="1A2B4A"/>
-                </a:solidFill>
-                <a:latin typeface="Courier New"/>
+                <a:spcPts val="2000"/>
+              </a:lnSpc>
+            </a:pPr>
+            <a:r>
+              <a:rPr sz="1300" b="0">
+                <a:solidFill>
+                  <a:srgbClr val="1A2B4A"/>
+                </a:solidFill>
+                <a:latin typeface="Noto Sans JP"/>
+              </a:rPr>
+              <a:t>## ネームスペース（5種）</a:t>
+            </a:r>
+          </a:p>
+          <a:p>
+            <a:pPr algn="l">
+              <a:lnSpc>
+                <a:spcPts val="2000"/>
+              </a:lnSpc>
+            </a:pPr>
+            <a:r>
+              <a:rPr sz="1300" b="0">
+                <a:solidFill>
+                  <a:srgbClr val="1A2B4A"/>
+                </a:solidFill>
+                <a:latin typeface="Noto Sans JP"/>
+              </a:rPr>
+              <a:t>・common   共通</a:t>
+            </a:r>
+          </a:p>
+          <a:p>
+            <a:pPr algn="l">
+              <a:lnSpc>
+                <a:spcPts val="2000"/>
+              </a:lnSpc>
+            </a:pPr>
+            <a:r>
+              <a:rPr sz="1300" b="0">
+                <a:solidFill>
+                  <a:srgbClr val="1A2B4A"/>
+                </a:solidFill>
+                <a:latin typeface="Noto Sans JP"/>
+              </a:rPr>
+              <a:t>・admin    管理者画面</a:t>
+            </a:r>
+          </a:p>
+          <a:p>
+            <a:pPr algn="l">
+              <a:lnSpc>
+                <a:spcPts val="2000"/>
+              </a:lnSpc>
+            </a:pPr>
+            <a:r>
+              <a:rPr sz="1300" b="0">
+                <a:solidFill>
+                  <a:srgbClr val="1A2B4A"/>
+                </a:solidFill>
+                <a:latin typeface="Noto Sans JP"/>
+              </a:rPr>
+              <a:t>・booking  予約フロー</a:t>
+            </a:r>
+          </a:p>
+          <a:p>
+            <a:pPr algn="l">
+              <a:lnSpc>
+                <a:spcPts val="2000"/>
+              </a:lnSpc>
+            </a:pPr>
+            <a:r>
+              <a:rPr sz="1300" b="0">
+                <a:solidFill>
+                  <a:srgbClr val="1A2B4A"/>
+                </a:solidFill>
+                <a:latin typeface="Noto Sans JP"/>
+              </a:rPr>
+              <a:t>・toast    通知</a:t>
+            </a:r>
+          </a:p>
+          <a:p>
+            <a:pPr algn="l">
+              <a:lnSpc>
+                <a:spcPts val="2000"/>
+              </a:lnSpc>
+            </a:pPr>
+            <a:r>
+              <a:rPr sz="1300" b="0">
+                <a:solidFill>
+                  <a:srgbClr val="1A2B4A"/>
+                </a:solidFill>
+                <a:latin typeface="Noto Sans JP"/>
+              </a:rPr>
+              <a:t>・questionnaire  問診票</a:t>
+            </a:r>
+          </a:p>
+          <a:p>
+            <a:pPr algn="l">
+              <a:lnSpc>
+                <a:spcPts val="2000"/>
+              </a:lnSpc>
+            </a:pPr>
+            <a:r>
+              <a:rPr sz="1300" b="0">
+                <a:solidFill>
+                  <a:srgbClr val="1A2B4A"/>
+                </a:solidFill>
+                <a:latin typeface="Noto Sans JP"/>
               </a:rPr>
               <a:t/>
             </a:r>
@@ -13316,47 +14679,271 @@
           <a:p>
             <a:pPr algn="l">
               <a:lnSpc>
-                <a:spcPts val="2100"/>
-              </a:lnSpc>
-            </a:pPr>
-            <a:r>
-              <a:rPr sz="1250" b="0">
-                <a:solidFill>
-                  <a:srgbClr val="1A2B4A"/>
-                </a:solidFill>
-                <a:latin typeface="Courier New"/>
-              </a:rPr>
-              <a:t># Hosting (OAS SPA + portfolio)</a:t>
-            </a:r>
-          </a:p>
-          <a:p>
-            <a:pPr algn="l">
-              <a:lnSpc>
-                <a:spcPts val="2100"/>
-              </a:lnSpc>
-            </a:pPr>
-            <a:r>
-              <a:rPr sz="1250" b="0">
-                <a:solidFill>
-                  <a:srgbClr val="1A2B4A"/>
-                </a:solidFill>
-                <a:latin typeface="Courier New"/>
-              </a:rPr>
-              <a:t>firebase deploy --only hosting:oas,hosting:portfolio --project project-3040e21e-879f-4c66-a7d</a:t>
-            </a:r>
-          </a:p>
-          <a:p>
-            <a:pPr algn="l">
-              <a:lnSpc>
-                <a:spcPts val="2100"/>
-              </a:lnSpc>
-            </a:pPr>
-            <a:r>
-              <a:rPr sz="1250" b="0">
-                <a:solidFill>
-                  <a:srgbClr val="1A2B4A"/>
-                </a:solidFill>
-                <a:latin typeface="Courier New"/>
+                <a:spcPts val="2000"/>
+              </a:lnSpc>
+            </a:pPr>
+            <a:r>
+              <a:rPr sz="1300" b="0">
+                <a:solidFill>
+                  <a:srgbClr val="1A2B4A"/>
+                </a:solidFill>
+                <a:latin typeface="Noto Sans JP"/>
+              </a:rPr>
+              <a:t>## LanguageSwitcher</a:t>
+            </a:r>
+          </a:p>
+          <a:p>
+            <a:pPr algn="l">
+              <a:lnSpc>
+                <a:spcPts val="2000"/>
+              </a:lnSpc>
+            </a:pPr>
+            <a:r>
+              <a:rPr sz="1300" b="0">
+                <a:solidFill>
+                  <a:srgbClr val="1A2B4A"/>
+                </a:solidFill>
+                <a:latin typeface="Noto Sans JP"/>
+              </a:rPr>
+              <a:t>・ヘッダーに variant=header で表示</a:t>
+            </a:r>
+          </a:p>
+          <a:p>
+            <a:pPr algn="l">
+              <a:lnSpc>
+                <a:spcPts val="2000"/>
+              </a:lnSpc>
+            </a:pPr>
+            <a:r>
+              <a:rPr sz="1300" b="0">
+                <a:solidFill>
+                  <a:srgbClr val="1A2B4A"/>
+                </a:solidFill>
+                <a:latin typeface="Noto Sans JP"/>
+              </a:rPr>
+              <a:t>・患者・管理者両方のヘッダーに配置</a:t>
+            </a:r>
+          </a:p>
+        </p:txBody>
+      </p:sp>
+      <p:sp>
+        <p:nvSpPr>
+          <p:cNvPr id="10" name="Rectangle 9"/>
+          <p:cNvSpPr/>
+          <p:nvPr/>
+        </p:nvSpPr>
+        <p:spPr>
+          <a:xfrm>
+            <a:off x="6217920" y="1005840"/>
+            <a:ext cx="5394960" cy="5303520"/>
+          </a:xfrm>
+          <a:prstGeom prst="rect">
+            <a:avLst/>
+          </a:prstGeom>
+          <a:solidFill>
+            <a:srgbClr val="F8F5EE"/>
+          </a:solidFill>
+          <a:ln>
+            <a:noFill/>
+          </a:ln>
+        </p:spPr>
+        <p:style>
+          <a:lnRef idx="1">
+            <a:schemeClr val="accent1"/>
+          </a:lnRef>
+          <a:fillRef idx="3">
+            <a:schemeClr val="accent1"/>
+          </a:fillRef>
+          <a:effectRef idx="2">
+            <a:schemeClr val="accent1"/>
+          </a:effectRef>
+          <a:fontRef idx="minor">
+            <a:schemeClr val="lt1"/>
+          </a:fontRef>
+        </p:style>
+        <p:txBody>
+          <a:bodyPr rtlCol="0" anchor="ctr"/>
+          <a:lstStyle/>
+          <a:p>
+            <a:pPr algn="ctr"/>
+          </a:p>
+        </p:txBody>
+      </p:sp>
+      <p:sp>
+        <p:nvSpPr>
+          <p:cNvPr id="11" name="Rectangle 10"/>
+          <p:cNvSpPr/>
+          <p:nvPr/>
+        </p:nvSpPr>
+        <p:spPr>
+          <a:xfrm>
+            <a:off x="6217920" y="1005840"/>
+            <a:ext cx="5394960" cy="502920"/>
+          </a:xfrm>
+          <a:prstGeom prst="rect">
+            <a:avLst/>
+          </a:prstGeom>
+          <a:solidFill>
+            <a:srgbClr val="1A2B4A"/>
+          </a:solidFill>
+          <a:ln>
+            <a:noFill/>
+          </a:ln>
+        </p:spPr>
+        <p:style>
+          <a:lnRef idx="1">
+            <a:schemeClr val="accent1"/>
+          </a:lnRef>
+          <a:fillRef idx="3">
+            <a:schemeClr val="accent1"/>
+          </a:fillRef>
+          <a:effectRef idx="2">
+            <a:schemeClr val="accent1"/>
+          </a:effectRef>
+          <a:fontRef idx="minor">
+            <a:schemeClr val="lt1"/>
+          </a:fontRef>
+        </p:style>
+        <p:txBody>
+          <a:bodyPr rtlCol="0" anchor="ctr"/>
+          <a:lstStyle/>
+          <a:p>
+            <a:pPr algn="ctr"/>
+          </a:p>
+        </p:txBody>
+      </p:sp>
+      <p:sp>
+        <p:nvSpPr>
+          <p:cNvPr id="12" name="TextBox 11"/>
+          <p:cNvSpPr txBox="1"/>
+          <p:nvPr/>
+        </p:nvSpPr>
+        <p:spPr>
+          <a:xfrm>
+            <a:off x="6309360" y="1051560"/>
+            <a:ext cx="5212080" cy="457200"/>
+          </a:xfrm>
+          <a:prstGeom prst="rect">
+            <a:avLst/>
+          </a:prstGeom>
+          <a:noFill/>
+        </p:spPr>
+        <p:txBody>
+          <a:bodyPr wrap="square">
+            <a:spAutoFit/>
+          </a:bodyPr>
+          <a:lstStyle/>
+          <a:p>
+            <a:pPr algn="l"/>
+            <a:r>
+              <a:rPr sz="1500" b="1">
+                <a:solidFill>
+                  <a:srgbClr val="FFFFFF"/>
+                </a:solidFill>
+                <a:latin typeface="Noto Sans JP"/>
+              </a:rPr>
+              <a:t>実装詳細</a:t>
+            </a:r>
+          </a:p>
+        </p:txBody>
+      </p:sp>
+      <p:sp>
+        <p:nvSpPr>
+          <p:cNvPr id="13" name="TextBox 12"/>
+          <p:cNvSpPr txBox="1"/>
+          <p:nvPr/>
+        </p:nvSpPr>
+        <p:spPr>
+          <a:xfrm>
+            <a:off x="6355080" y="1600200"/>
+            <a:ext cx="5120640" cy="4617720"/>
+          </a:xfrm>
+          <a:prstGeom prst="rect">
+            <a:avLst/>
+          </a:prstGeom>
+          <a:noFill/>
+        </p:spPr>
+        <p:txBody>
+          <a:bodyPr wrap="square">
+            <a:spAutoFit/>
+          </a:bodyPr>
+          <a:lstStyle/>
+          <a:p>
+            <a:pPr algn="l">
+              <a:lnSpc>
+                <a:spcPts val="2000"/>
+              </a:lnSpc>
+            </a:pPr>
+            <a:r>
+              <a:rPr sz="1300" b="0">
+                <a:solidFill>
+                  <a:srgbClr val="1A2B4A"/>
+                </a:solidFill>
+                <a:latin typeface="Noto Sans JP"/>
+              </a:rPr>
+              <a:t>## 初期化（i18n/index.ts）</a:t>
+            </a:r>
+          </a:p>
+          <a:p>
+            <a:pPr algn="l">
+              <a:lnSpc>
+                <a:spcPts val="2000"/>
+              </a:lnSpc>
+            </a:pPr>
+            <a:r>
+              <a:rPr sz="1300" b="0">
+                <a:solidFill>
+                  <a:srgbClr val="1A2B4A"/>
+                </a:solidFill>
+                <a:latin typeface="Noto Sans JP"/>
+              </a:rPr>
+              <a:t>・I18nextProvider でアプリをラップ</a:t>
+            </a:r>
+          </a:p>
+          <a:p>
+            <a:pPr algn="l">
+              <a:lnSpc>
+                <a:spcPts val="2000"/>
+              </a:lnSpc>
+            </a:pPr>
+            <a:r>
+              <a:rPr sz="1300" b="0">
+                <a:solidFill>
+                  <a:srgbClr val="1A2B4A"/>
+                </a:solidFill>
+                <a:latin typeface="Noto Sans JP"/>
+              </a:rPr>
+              <a:t>・ブラウザ言語を自動検出</a:t>
+            </a:r>
+          </a:p>
+          <a:p>
+            <a:pPr algn="l">
+              <a:lnSpc>
+                <a:spcPts val="2000"/>
+              </a:lnSpc>
+            </a:pPr>
+            <a:r>
+              <a:rPr sz="1300" b="0">
+                <a:solidFill>
+                  <a:srgbClr val="1A2B4A"/>
+                </a:solidFill>
+                <a:latin typeface="Noto Sans JP"/>
+              </a:rPr>
+              <a:t>・fallbackLng: ja</a:t>
+            </a:r>
+          </a:p>
+          <a:p>
+            <a:pPr algn="l">
+              <a:lnSpc>
+                <a:spcPts val="2000"/>
+              </a:lnSpc>
+            </a:pPr>
+            <a:r>
+              <a:rPr sz="1300" b="0">
+                <a:solidFill>
+                  <a:srgbClr val="1A2B4A"/>
+                </a:solidFill>
+                <a:latin typeface="Noto Sans JP"/>
               </a:rPr>
               <a:t/>
             </a:r>
@@ -13364,63 +14951,143 @@
           <a:p>
             <a:pPr algn="l">
               <a:lnSpc>
-                <a:spcPts val="2100"/>
-              </a:lnSpc>
-            </a:pPr>
-            <a:r>
-              <a:rPr sz="1250" b="0">
-                <a:solidFill>
-                  <a:srgbClr val="1A2B4A"/>
-                </a:solidFill>
-                <a:latin typeface="Courier New"/>
-              </a:rPr>
-              <a:t>## レガシー URL リダイレクト</a:t>
-            </a:r>
-          </a:p>
-          <a:p>
-            <a:pPr algn="l">
-              <a:lnSpc>
-                <a:spcPts val="2100"/>
-              </a:lnSpc>
-            </a:pPr>
-            <a:r>
-              <a:rPr sz="1250" b="0">
-                <a:solidFill>
-                  <a:srgbClr val="1A2B4A"/>
-                </a:solidFill>
-                <a:latin typeface="Courier New"/>
-              </a:rPr>
-              <a:t>・旧 MPA URL（/index.html 等）→ SPA ルート（/）に 301 リダイレクト</a:t>
-            </a:r>
-          </a:p>
-          <a:p>
-            <a:pPr algn="l">
-              <a:lnSpc>
-                <a:spcPts val="2100"/>
-              </a:lnSpc>
-            </a:pPr>
-            <a:r>
-              <a:rPr sz="1250" b="0">
-                <a:solidFill>
-                  <a:srgbClr val="1A2B4A"/>
-                </a:solidFill>
-                <a:latin typeface="Courier New"/>
-              </a:rPr>
-              <a:t>・クライアントへ旧 URL を案内済みの場合も自動転送</a:t>
-            </a:r>
-          </a:p>
-          <a:p>
-            <a:pPr algn="l">
-              <a:lnSpc>
-                <a:spcPts val="2100"/>
-              </a:lnSpc>
-            </a:pPr>
-            <a:r>
-              <a:rPr sz="1250" b="0">
-                <a:solidFill>
-                  <a:srgbClr val="1A2B4A"/>
-                </a:solidFill>
-                <a:latin typeface="Courier New"/>
+                <a:spcPts val="2000"/>
+              </a:lnSpc>
+            </a:pPr>
+            <a:r>
+              <a:rPr sz="1300" b="0">
+                <a:solidFill>
+                  <a:srgbClr val="1A2B4A"/>
+                </a:solidFill>
+                <a:latin typeface="Noto Sans JP"/>
+              </a:rPr>
+              <a:t>## 翻訳ファイル構成</a:t>
+            </a:r>
+          </a:p>
+          <a:p>
+            <a:pPr algn="l">
+              <a:lnSpc>
+                <a:spcPts val="2000"/>
+              </a:lnSpc>
+            </a:pPr>
+            <a:r>
+              <a:rPr sz="1300" b="0">
+                <a:solidFill>
+                  <a:srgbClr val="1A2B4A"/>
+                </a:solidFill>
+                <a:latin typeface="Noto Sans JP"/>
+              </a:rPr>
+              <a:t>src/i18n/locales/</a:t>
+            </a:r>
+          </a:p>
+          <a:p>
+            <a:pPr algn="l">
+              <a:lnSpc>
+                <a:spcPts val="2000"/>
+              </a:lnSpc>
+            </a:pPr>
+            <a:r>
+              <a:rPr sz="1300" b="0">
+                <a:solidFill>
+                  <a:srgbClr val="1A2B4A"/>
+                </a:solidFill>
+                <a:latin typeface="Noto Sans JP"/>
+              </a:rPr>
+              <a:t>  {lang}/</a:t>
+            </a:r>
+          </a:p>
+          <a:p>
+            <a:pPr algn="l">
+              <a:lnSpc>
+                <a:spcPts val="2000"/>
+              </a:lnSpc>
+            </a:pPr>
+            <a:r>
+              <a:rPr sz="1300" b="0">
+                <a:solidFill>
+                  <a:srgbClr val="1A2B4A"/>
+                </a:solidFill>
+                <a:latin typeface="Noto Sans JP"/>
+              </a:rPr>
+              <a:t>    common.json</a:t>
+            </a:r>
+          </a:p>
+          <a:p>
+            <a:pPr algn="l">
+              <a:lnSpc>
+                <a:spcPts val="2000"/>
+              </a:lnSpc>
+            </a:pPr>
+            <a:r>
+              <a:rPr sz="1300" b="0">
+                <a:solidFill>
+                  <a:srgbClr val="1A2B4A"/>
+                </a:solidFill>
+                <a:latin typeface="Noto Sans JP"/>
+              </a:rPr>
+              <a:t>    admin.json</a:t>
+            </a:r>
+          </a:p>
+          <a:p>
+            <a:pPr algn="l">
+              <a:lnSpc>
+                <a:spcPts val="2000"/>
+              </a:lnSpc>
+            </a:pPr>
+            <a:r>
+              <a:rPr sz="1300" b="0">
+                <a:solidFill>
+                  <a:srgbClr val="1A2B4A"/>
+                </a:solidFill>
+                <a:latin typeface="Noto Sans JP"/>
+              </a:rPr>
+              <a:t>    booking.json</a:t>
+            </a:r>
+          </a:p>
+          <a:p>
+            <a:pPr algn="l">
+              <a:lnSpc>
+                <a:spcPts val="2000"/>
+              </a:lnSpc>
+            </a:pPr>
+            <a:r>
+              <a:rPr sz="1300" b="0">
+                <a:solidFill>
+                  <a:srgbClr val="1A2B4A"/>
+                </a:solidFill>
+                <a:latin typeface="Noto Sans JP"/>
+              </a:rPr>
+              <a:t>    toast.json</a:t>
+            </a:r>
+          </a:p>
+          <a:p>
+            <a:pPr algn="l">
+              <a:lnSpc>
+                <a:spcPts val="2000"/>
+              </a:lnSpc>
+            </a:pPr>
+            <a:r>
+              <a:rPr sz="1300" b="0">
+                <a:solidFill>
+                  <a:srgbClr val="1A2B4A"/>
+                </a:solidFill>
+                <a:latin typeface="Noto Sans JP"/>
+              </a:rPr>
+              <a:t>    questionnaire.json</a:t>
+            </a:r>
+          </a:p>
+          <a:p>
+            <a:pPr algn="l">
+              <a:lnSpc>
+                <a:spcPts val="2000"/>
+              </a:lnSpc>
+            </a:pPr>
+            <a:r>
+              <a:rPr sz="1300" b="0">
+                <a:solidFill>
+                  <a:srgbClr val="1A2B4A"/>
+                </a:solidFill>
+                <a:latin typeface="Noto Sans JP"/>
               </a:rPr>
               <a:t/>
             </a:r>
@@ -13428,33 +15095,113 @@
           <a:p>
             <a:pPr algn="l">
               <a:lnSpc>
-                <a:spcPts val="2100"/>
-              </a:lnSpc>
-            </a:pPr>
-            <a:r>
-              <a:rPr sz="1250" b="0">
-                <a:solidFill>
-                  <a:srgbClr val="1A2B4A"/>
-                </a:solidFill>
-                <a:latin typeface="Courier New"/>
-              </a:rPr>
-              <a:t>## Firebase プロジェクト</a:t>
-            </a:r>
-          </a:p>
-          <a:p>
-            <a:pPr algn="l">
-              <a:lnSpc>
-                <a:spcPts val="2100"/>
-              </a:lnSpc>
-            </a:pPr>
-            <a:r>
-              <a:rPr sz="1250" b="0">
-                <a:solidFill>
-                  <a:srgbClr val="1A2B4A"/>
-                </a:solidFill>
-                <a:latin typeface="Courier New"/>
-              </a:rPr>
-              <a:t>・project-3040e21e-879f-4c66-a7d（AMS と共有）</a:t>
+                <a:spcPts val="2000"/>
+              </a:lnSpc>
+            </a:pPr>
+            <a:r>
+              <a:rPr sz="1300" b="0">
+                <a:solidFill>
+                  <a:srgbClr val="1A2B4A"/>
+                </a:solidFill>
+                <a:latin typeface="Noto Sans JP"/>
+              </a:rPr>
+              <a:t>## 使い方</a:t>
+            </a:r>
+          </a:p>
+          <a:p>
+            <a:pPr algn="l">
+              <a:lnSpc>
+                <a:spcPts val="2000"/>
+              </a:lnSpc>
+            </a:pPr>
+            <a:r>
+              <a:rPr sz="1300" b="0">
+                <a:solidFill>
+                  <a:srgbClr val="1A2B4A"/>
+                </a:solidFill>
+                <a:latin typeface="Noto Sans JP"/>
+              </a:rPr>
+              <a:t>const { t } = useTranslation('admin');</a:t>
+            </a:r>
+          </a:p>
+          <a:p>
+            <a:pPr algn="l">
+              <a:lnSpc>
+                <a:spcPts val="2000"/>
+              </a:lnSpc>
+            </a:pPr>
+            <a:r>
+              <a:rPr sz="1300" b="0">
+                <a:solidFill>
+                  <a:srgbClr val="1A2B4A"/>
+                </a:solidFill>
+                <a:latin typeface="Noto Sans JP"/>
+              </a:rPr>
+              <a:t>t('dashboard.kpi.todayReservations')</a:t>
+            </a:r>
+          </a:p>
+          <a:p>
+            <a:pPr algn="l">
+              <a:lnSpc>
+                <a:spcPts val="2000"/>
+              </a:lnSpc>
+            </a:pPr>
+            <a:r>
+              <a:rPr sz="1300" b="0">
+                <a:solidFill>
+                  <a:srgbClr val="1A2B4A"/>
+                </a:solidFill>
+                <a:latin typeface="Noto Sans JP"/>
+              </a:rPr>
+              <a:t/>
+            </a:r>
+          </a:p>
+          <a:p>
+            <a:pPr algn="l">
+              <a:lnSpc>
+                <a:spcPts val="2000"/>
+              </a:lnSpc>
+            </a:pPr>
+            <a:r>
+              <a:rPr sz="1300" b="0">
+                <a:solidFill>
+                  <a:srgbClr val="1A2B4A"/>
+                </a:solidFill>
+                <a:latin typeface="Noto Sans JP"/>
+              </a:rPr>
+              <a:t>## PDF出力での多言語対応</a:t>
+            </a:r>
+          </a:p>
+          <a:p>
+            <a:pPr algn="l">
+              <a:lnSpc>
+                <a:spcPts val="2000"/>
+              </a:lnSpc>
+            </a:pPr>
+            <a:r>
+              <a:rPr sz="1300" b="0">
+                <a:solidFill>
+                  <a:srgbClr val="1A2B4A"/>
+                </a:solidFill>
+                <a:latin typeface="Noto Sans JP"/>
+              </a:rPr>
+              <a:t>・問診票PDFラベルは t() で取得</a:t>
+            </a:r>
+          </a:p>
+          <a:p>
+            <a:pPr algn="l">
+              <a:lnSpc>
+                <a:spcPts val="2000"/>
+              </a:lnSpc>
+            </a:pPr>
+            <a:r>
+              <a:rPr sz="1300" b="0">
+                <a:solidFill>
+                  <a:srgbClr val="1A2B4A"/>
+                </a:solidFill>
+                <a:latin typeface="Noto Sans JP"/>
+              </a:rPr>
+              <a:t>・管理者の表示言語に応じて出力</a:t>
             </a:r>
           </a:p>
         </p:txBody>
@@ -13492,6 +15239,5340 @@
             <a:avLst/>
           </a:prstGeom>
           <a:solidFill>
+            <a:srgbClr val="F8F5EE"/>
+          </a:solidFill>
+          <a:ln>
+            <a:noFill/>
+          </a:ln>
+        </p:spPr>
+        <p:style>
+          <a:lnRef idx="1">
+            <a:schemeClr val="accent1"/>
+          </a:lnRef>
+          <a:fillRef idx="3">
+            <a:schemeClr val="accent1"/>
+          </a:fillRef>
+          <a:effectRef idx="2">
+            <a:schemeClr val="accent1"/>
+          </a:effectRef>
+          <a:fontRef idx="minor">
+            <a:schemeClr val="lt1"/>
+          </a:fontRef>
+        </p:style>
+        <p:txBody>
+          <a:bodyPr rtlCol="0" anchor="ctr"/>
+          <a:lstStyle/>
+          <a:p>
+            <a:pPr algn="ctr"/>
+          </a:p>
+        </p:txBody>
+      </p:sp>
+      <p:sp>
+        <p:nvSpPr>
+          <p:cNvPr id="3" name="Rectangle 2"/>
+          <p:cNvSpPr/>
+          <p:nvPr/>
+        </p:nvSpPr>
+        <p:spPr>
+          <a:xfrm>
+            <a:off x="0" y="0"/>
+            <a:ext cx="12188952" cy="822960"/>
+          </a:xfrm>
+          <a:prstGeom prst="rect">
+            <a:avLst/>
+          </a:prstGeom>
+          <a:solidFill>
+            <a:srgbClr val="1A2B4A"/>
+          </a:solidFill>
+          <a:ln>
+            <a:noFill/>
+          </a:ln>
+        </p:spPr>
+        <p:style>
+          <a:lnRef idx="1">
+            <a:schemeClr val="accent1"/>
+          </a:lnRef>
+          <a:fillRef idx="3">
+            <a:schemeClr val="accent1"/>
+          </a:fillRef>
+          <a:effectRef idx="2">
+            <a:schemeClr val="accent1"/>
+          </a:effectRef>
+          <a:fontRef idx="minor">
+            <a:schemeClr val="lt1"/>
+          </a:fontRef>
+        </p:style>
+        <p:txBody>
+          <a:bodyPr rtlCol="0" anchor="ctr"/>
+          <a:lstStyle/>
+          <a:p>
+            <a:pPr algn="ctr"/>
+          </a:p>
+        </p:txBody>
+      </p:sp>
+      <p:sp>
+        <p:nvSpPr>
+          <p:cNvPr id="4" name="TextBox 3"/>
+          <p:cNvSpPr txBox="1"/>
+          <p:nvPr/>
+        </p:nvSpPr>
+        <p:spPr>
+          <a:xfrm>
+            <a:off x="365760" y="91440"/>
+            <a:ext cx="9144000" cy="685800"/>
+          </a:xfrm>
+          <a:prstGeom prst="rect">
+            <a:avLst/>
+          </a:prstGeom>
+          <a:noFill/>
+        </p:spPr>
+        <p:txBody>
+          <a:bodyPr wrap="square">
+            <a:spAutoFit/>
+          </a:bodyPr>
+          <a:lstStyle/>
+          <a:p>
+            <a:pPr algn="l"/>
+            <a:r>
+              <a:rPr sz="2600" b="1">
+                <a:solidFill>
+                  <a:srgbClr val="FFFFFF"/>
+                </a:solidFill>
+                <a:latin typeface="Noto Sans JP"/>
+              </a:rPr>
+              <a:t>PWA 対応</a:t>
+            </a:r>
+          </a:p>
+        </p:txBody>
+      </p:sp>
+      <p:sp>
+        <p:nvSpPr>
+          <p:cNvPr id="5" name="Rectangle 4"/>
+          <p:cNvSpPr/>
+          <p:nvPr/>
+        </p:nvSpPr>
+        <p:spPr>
+          <a:xfrm>
+            <a:off x="10332720" y="182880"/>
+            <a:ext cx="1645920" cy="457200"/>
+          </a:xfrm>
+          <a:prstGeom prst="rect">
+            <a:avLst/>
+          </a:prstGeom>
+          <a:solidFill>
+            <a:srgbClr val="D4AF37"/>
+          </a:solidFill>
+          <a:ln>
+            <a:noFill/>
+          </a:ln>
+        </p:spPr>
+        <p:style>
+          <a:lnRef idx="1">
+            <a:schemeClr val="accent1"/>
+          </a:lnRef>
+          <a:fillRef idx="3">
+            <a:schemeClr val="accent1"/>
+          </a:fillRef>
+          <a:effectRef idx="2">
+            <a:schemeClr val="accent1"/>
+          </a:effectRef>
+          <a:fontRef idx="minor">
+            <a:schemeClr val="lt1"/>
+          </a:fontRef>
+        </p:style>
+        <p:txBody>
+          <a:bodyPr rtlCol="0" anchor="ctr"/>
+          <a:lstStyle/>
+          <a:p>
+            <a:pPr algn="ctr"/>
+            <a:r>
+              <a:rPr sz="1200" b="1">
+                <a:solidFill>
+                  <a:srgbClr val="1A2B4A"/>
+                </a:solidFill>
+                <a:latin typeface="Noto Sans JP"/>
+              </a:rPr>
+              <a:t>新機能</a:t>
+            </a:r>
+          </a:p>
+        </p:txBody>
+      </p:sp>
+      <p:sp>
+        <p:nvSpPr>
+          <p:cNvPr id="6" name="Rectangle 5"/>
+          <p:cNvSpPr/>
+          <p:nvPr/>
+        </p:nvSpPr>
+        <p:spPr>
+          <a:xfrm>
+            <a:off x="457200" y="1005840"/>
+            <a:ext cx="5394960" cy="5303520"/>
+          </a:xfrm>
+          <a:prstGeom prst="rect">
+            <a:avLst/>
+          </a:prstGeom>
+          <a:solidFill>
+            <a:srgbClr val="F8F5EE"/>
+          </a:solidFill>
+          <a:ln>
+            <a:noFill/>
+          </a:ln>
+        </p:spPr>
+        <p:style>
+          <a:lnRef idx="1">
+            <a:schemeClr val="accent1"/>
+          </a:lnRef>
+          <a:fillRef idx="3">
+            <a:schemeClr val="accent1"/>
+          </a:fillRef>
+          <a:effectRef idx="2">
+            <a:schemeClr val="accent1"/>
+          </a:effectRef>
+          <a:fontRef idx="minor">
+            <a:schemeClr val="lt1"/>
+          </a:fontRef>
+        </p:style>
+        <p:txBody>
+          <a:bodyPr rtlCol="0" anchor="ctr"/>
+          <a:lstStyle/>
+          <a:p>
+            <a:pPr algn="ctr"/>
+          </a:p>
+        </p:txBody>
+      </p:sp>
+      <p:sp>
+        <p:nvSpPr>
+          <p:cNvPr id="7" name="Rectangle 6"/>
+          <p:cNvSpPr/>
+          <p:nvPr/>
+        </p:nvSpPr>
+        <p:spPr>
+          <a:xfrm>
+            <a:off x="457200" y="1005840"/>
+            <a:ext cx="5394960" cy="502920"/>
+          </a:xfrm>
+          <a:prstGeom prst="rect">
+            <a:avLst/>
+          </a:prstGeom>
+          <a:solidFill>
+            <a:srgbClr val="1A2B4A"/>
+          </a:solidFill>
+          <a:ln>
+            <a:noFill/>
+          </a:ln>
+        </p:spPr>
+        <p:style>
+          <a:lnRef idx="1">
+            <a:schemeClr val="accent1"/>
+          </a:lnRef>
+          <a:fillRef idx="3">
+            <a:schemeClr val="accent1"/>
+          </a:fillRef>
+          <a:effectRef idx="2">
+            <a:schemeClr val="accent1"/>
+          </a:effectRef>
+          <a:fontRef idx="minor">
+            <a:schemeClr val="lt1"/>
+          </a:fontRef>
+        </p:style>
+        <p:txBody>
+          <a:bodyPr rtlCol="0" anchor="ctr"/>
+          <a:lstStyle/>
+          <a:p>
+            <a:pPr algn="ctr"/>
+          </a:p>
+        </p:txBody>
+      </p:sp>
+      <p:sp>
+        <p:nvSpPr>
+          <p:cNvPr id="8" name="TextBox 7"/>
+          <p:cNvSpPr txBox="1"/>
+          <p:nvPr/>
+        </p:nvSpPr>
+        <p:spPr>
+          <a:xfrm>
+            <a:off x="548640" y="1051560"/>
+            <a:ext cx="5212080" cy="457200"/>
+          </a:xfrm>
+          <a:prstGeom prst="rect">
+            <a:avLst/>
+          </a:prstGeom>
+          <a:noFill/>
+        </p:spPr>
+        <p:txBody>
+          <a:bodyPr wrap="square">
+            <a:spAutoFit/>
+          </a:bodyPr>
+          <a:lstStyle/>
+          <a:p>
+            <a:pPr algn="l"/>
+            <a:r>
+              <a:rPr sz="1500" b="1">
+                <a:solidFill>
+                  <a:srgbClr val="FFFFFF"/>
+                </a:solidFill>
+                <a:latin typeface="Noto Sans JP"/>
+              </a:rPr>
+              <a:t>技術構成</a:t>
+            </a:r>
+          </a:p>
+        </p:txBody>
+      </p:sp>
+      <p:sp>
+        <p:nvSpPr>
+          <p:cNvPr id="9" name="TextBox 8"/>
+          <p:cNvSpPr txBox="1"/>
+          <p:nvPr/>
+        </p:nvSpPr>
+        <p:spPr>
+          <a:xfrm>
+            <a:off x="594360" y="1600200"/>
+            <a:ext cx="5120640" cy="4617720"/>
+          </a:xfrm>
+          <a:prstGeom prst="rect">
+            <a:avLst/>
+          </a:prstGeom>
+          <a:noFill/>
+        </p:spPr>
+        <p:txBody>
+          <a:bodyPr wrap="square">
+            <a:spAutoFit/>
+          </a:bodyPr>
+          <a:lstStyle/>
+          <a:p>
+            <a:pPr algn="l">
+              <a:lnSpc>
+                <a:spcPts val="2000"/>
+              </a:lnSpc>
+            </a:pPr>
+            <a:r>
+              <a:rPr sz="1300" b="0">
+                <a:solidFill>
+                  <a:srgbClr val="1A2B4A"/>
+                </a:solidFill>
+                <a:latin typeface="Noto Sans JP"/>
+              </a:rPr>
+              <a:t>## ライブラリ</a:t>
+            </a:r>
+          </a:p>
+          <a:p>
+            <a:pPr algn="l">
+              <a:lnSpc>
+                <a:spcPts val="2000"/>
+              </a:lnSpc>
+            </a:pPr>
+            <a:r>
+              <a:rPr sz="1300" b="0">
+                <a:solidFill>
+                  <a:srgbClr val="1A2B4A"/>
+                </a:solidFill>
+                <a:latin typeface="Noto Sans JP"/>
+              </a:rPr>
+              <a:t>・vite-plugin-pwa</a:t>
+            </a:r>
+          </a:p>
+          <a:p>
+            <a:pPr algn="l">
+              <a:lnSpc>
+                <a:spcPts val="2000"/>
+              </a:lnSpc>
+            </a:pPr>
+            <a:r>
+              <a:rPr sz="1300" b="0">
+                <a:solidFill>
+                  <a:srgbClr val="1A2B4A"/>
+                </a:solidFill>
+                <a:latin typeface="Noto Sans JP"/>
+              </a:rPr>
+              <a:t>・Workbox（Service Worker 生成）</a:t>
+            </a:r>
+          </a:p>
+          <a:p>
+            <a:pPr algn="l">
+              <a:lnSpc>
+                <a:spcPts val="2000"/>
+              </a:lnSpc>
+            </a:pPr>
+            <a:r>
+              <a:rPr sz="1300" b="0">
+                <a:solidFill>
+                  <a:srgbClr val="1A2B4A"/>
+                </a:solidFill>
+                <a:latin typeface="Noto Sans JP"/>
+              </a:rPr>
+              <a:t/>
+            </a:r>
+          </a:p>
+          <a:p>
+            <a:pPr algn="l">
+              <a:lnSpc>
+                <a:spcPts val="2000"/>
+              </a:lnSpc>
+            </a:pPr>
+            <a:r>
+              <a:rPr sz="1300" b="0">
+                <a:solidFill>
+                  <a:srgbClr val="1A2B4A"/>
+                </a:solidFill>
+                <a:latin typeface="Noto Sans JP"/>
+              </a:rPr>
+              <a:t>## vite.config.ts 設定</a:t>
+            </a:r>
+          </a:p>
+          <a:p>
+            <a:pPr algn="l">
+              <a:lnSpc>
+                <a:spcPts val="2000"/>
+              </a:lnSpc>
+            </a:pPr>
+            <a:r>
+              <a:rPr sz="1300" b="0">
+                <a:solidFill>
+                  <a:srgbClr val="1A2B4A"/>
+                </a:solidFill>
+                <a:latin typeface="Noto Sans JP"/>
+              </a:rPr>
+              <a:t>・VitePWA プラグイン追加</a:t>
+            </a:r>
+          </a:p>
+          <a:p>
+            <a:pPr algn="l">
+              <a:lnSpc>
+                <a:spcPts val="2000"/>
+              </a:lnSpc>
+            </a:pPr>
+            <a:r>
+              <a:rPr sz="1300" b="0">
+                <a:solidFill>
+                  <a:srgbClr val="1A2B4A"/>
+                </a:solidFill>
+                <a:latin typeface="Noto Sans JP"/>
+              </a:rPr>
+              <a:t>・registerType: autoUpdate</a:t>
+            </a:r>
+          </a:p>
+          <a:p>
+            <a:pPr algn="l">
+              <a:lnSpc>
+                <a:spcPts val="2000"/>
+              </a:lnSpc>
+            </a:pPr>
+            <a:r>
+              <a:rPr sz="1300" b="0">
+                <a:solidFill>
+                  <a:srgbClr val="1A2B4A"/>
+                </a:solidFill>
+                <a:latin typeface="Noto Sans JP"/>
+              </a:rPr>
+              <a:t>・workbox:</a:t>
+            </a:r>
+          </a:p>
+          <a:p>
+            <a:pPr algn="l">
+              <a:lnSpc>
+                <a:spcPts val="2000"/>
+              </a:lnSpc>
+            </a:pPr>
+            <a:r>
+              <a:rPr sz="1300" b="0">
+                <a:solidFill>
+                  <a:srgbClr val="1A2B4A"/>
+                </a:solidFill>
+                <a:latin typeface="Noto Sans JP"/>
+              </a:rPr>
+              <a:t>  globPatterns: ['**/*.{js,css,html}']</a:t>
+            </a:r>
+          </a:p>
+          <a:p>
+            <a:pPr algn="l">
+              <a:lnSpc>
+                <a:spcPts val="2000"/>
+              </a:lnSpc>
+            </a:pPr>
+            <a:r>
+              <a:rPr sz="1300" b="0">
+                <a:solidFill>
+                  <a:srgbClr val="1A2B4A"/>
+                </a:solidFill>
+                <a:latin typeface="Noto Sans JP"/>
+              </a:rPr>
+              <a:t>  runtimeCaching で API キャッシュ</a:t>
+            </a:r>
+          </a:p>
+          <a:p>
+            <a:pPr algn="l">
+              <a:lnSpc>
+                <a:spcPts val="2000"/>
+              </a:lnSpc>
+            </a:pPr>
+            <a:r>
+              <a:rPr sz="1300" b="0">
+                <a:solidFill>
+                  <a:srgbClr val="1A2B4A"/>
+                </a:solidFill>
+                <a:latin typeface="Noto Sans JP"/>
+              </a:rPr>
+              <a:t/>
+            </a:r>
+          </a:p>
+          <a:p>
+            <a:pPr algn="l">
+              <a:lnSpc>
+                <a:spcPts val="2000"/>
+              </a:lnSpc>
+            </a:pPr>
+            <a:r>
+              <a:rPr sz="1300" b="0">
+                <a:solidFill>
+                  <a:srgbClr val="1A2B4A"/>
+                </a:solidFill>
+                <a:latin typeface="Noto Sans JP"/>
+              </a:rPr>
+              <a:t>## Web App Manifest</a:t>
+            </a:r>
+          </a:p>
+          <a:p>
+            <a:pPr algn="l">
+              <a:lnSpc>
+                <a:spcPts val="2000"/>
+              </a:lnSpc>
+            </a:pPr>
+            <a:r>
+              <a:rPr sz="1300" b="0">
+                <a:solidFill>
+                  <a:srgbClr val="1A2B4A"/>
+                </a:solidFill>
+                <a:latin typeface="Noto Sans JP"/>
+              </a:rPr>
+              <a:t>・name: OAS 予約システム</a:t>
+            </a:r>
+          </a:p>
+          <a:p>
+            <a:pPr algn="l">
+              <a:lnSpc>
+                <a:spcPts val="2000"/>
+              </a:lnSpc>
+            </a:pPr>
+            <a:r>
+              <a:rPr sz="1300" b="0">
+                <a:solidFill>
+                  <a:srgbClr val="1A2B4A"/>
+                </a:solidFill>
+                <a:latin typeface="Noto Sans JP"/>
+              </a:rPr>
+              <a:t>・short_name: OAS</a:t>
+            </a:r>
+          </a:p>
+          <a:p>
+            <a:pPr algn="l">
+              <a:lnSpc>
+                <a:spcPts val="2000"/>
+              </a:lnSpc>
+            </a:pPr>
+            <a:r>
+              <a:rPr sz="1300" b="0">
+                <a:solidFill>
+                  <a:srgbClr val="1A2B4A"/>
+                </a:solidFill>
+                <a:latin typeface="Noto Sans JP"/>
+              </a:rPr>
+              <a:t>・display: standalone</a:t>
+            </a:r>
+          </a:p>
+          <a:p>
+            <a:pPr algn="l">
+              <a:lnSpc>
+                <a:spcPts val="2000"/>
+              </a:lnSpc>
+            </a:pPr>
+            <a:r>
+              <a:rPr sz="1300" b="0">
+                <a:solidFill>
+                  <a:srgbClr val="1A2B4A"/>
+                </a:solidFill>
+                <a:latin typeface="Noto Sans JP"/>
+              </a:rPr>
+              <a:t>・theme_color: #1A2B4A（ネイビー）</a:t>
+            </a:r>
+          </a:p>
+          <a:p>
+            <a:pPr algn="l">
+              <a:lnSpc>
+                <a:spcPts val="2000"/>
+              </a:lnSpc>
+            </a:pPr>
+            <a:r>
+              <a:rPr sz="1300" b="0">
+                <a:solidFill>
+                  <a:srgbClr val="1A2B4A"/>
+                </a:solidFill>
+                <a:latin typeface="Noto Sans JP"/>
+              </a:rPr>
+              <a:t>・background_color: #F8F5EE（クリーム）</a:t>
+            </a:r>
+          </a:p>
+          <a:p>
+            <a:pPr algn="l">
+              <a:lnSpc>
+                <a:spcPts val="2000"/>
+              </a:lnSpc>
+            </a:pPr>
+            <a:r>
+              <a:rPr sz="1300" b="0">
+                <a:solidFill>
+                  <a:srgbClr val="1A2B4A"/>
+                </a:solidFill>
+                <a:latin typeface="Noto Sans JP"/>
+              </a:rPr>
+              <a:t>・icons: 192px / 512px</a:t>
+            </a:r>
+          </a:p>
+        </p:txBody>
+      </p:sp>
+      <p:sp>
+        <p:nvSpPr>
+          <p:cNvPr id="10" name="Rectangle 9"/>
+          <p:cNvSpPr/>
+          <p:nvPr/>
+        </p:nvSpPr>
+        <p:spPr>
+          <a:xfrm>
+            <a:off x="6217920" y="1005840"/>
+            <a:ext cx="5394960" cy="5303520"/>
+          </a:xfrm>
+          <a:prstGeom prst="rect">
+            <a:avLst/>
+          </a:prstGeom>
+          <a:solidFill>
+            <a:srgbClr val="F8F5EE"/>
+          </a:solidFill>
+          <a:ln>
+            <a:noFill/>
+          </a:ln>
+        </p:spPr>
+        <p:style>
+          <a:lnRef idx="1">
+            <a:schemeClr val="accent1"/>
+          </a:lnRef>
+          <a:fillRef idx="3">
+            <a:schemeClr val="accent1"/>
+          </a:fillRef>
+          <a:effectRef idx="2">
+            <a:schemeClr val="accent1"/>
+          </a:effectRef>
+          <a:fontRef idx="minor">
+            <a:schemeClr val="lt1"/>
+          </a:fontRef>
+        </p:style>
+        <p:txBody>
+          <a:bodyPr rtlCol="0" anchor="ctr"/>
+          <a:lstStyle/>
+          <a:p>
+            <a:pPr algn="ctr"/>
+          </a:p>
+        </p:txBody>
+      </p:sp>
+      <p:sp>
+        <p:nvSpPr>
+          <p:cNvPr id="11" name="Rectangle 10"/>
+          <p:cNvSpPr/>
+          <p:nvPr/>
+        </p:nvSpPr>
+        <p:spPr>
+          <a:xfrm>
+            <a:off x="6217920" y="1005840"/>
+            <a:ext cx="5394960" cy="502920"/>
+          </a:xfrm>
+          <a:prstGeom prst="rect">
+            <a:avLst/>
+          </a:prstGeom>
+          <a:solidFill>
+            <a:srgbClr val="1A2B4A"/>
+          </a:solidFill>
+          <a:ln>
+            <a:noFill/>
+          </a:ln>
+        </p:spPr>
+        <p:style>
+          <a:lnRef idx="1">
+            <a:schemeClr val="accent1"/>
+          </a:lnRef>
+          <a:fillRef idx="3">
+            <a:schemeClr val="accent1"/>
+          </a:fillRef>
+          <a:effectRef idx="2">
+            <a:schemeClr val="accent1"/>
+          </a:effectRef>
+          <a:fontRef idx="minor">
+            <a:schemeClr val="lt1"/>
+          </a:fontRef>
+        </p:style>
+        <p:txBody>
+          <a:bodyPr rtlCol="0" anchor="ctr"/>
+          <a:lstStyle/>
+          <a:p>
+            <a:pPr algn="ctr"/>
+          </a:p>
+        </p:txBody>
+      </p:sp>
+      <p:sp>
+        <p:nvSpPr>
+          <p:cNvPr id="12" name="TextBox 11"/>
+          <p:cNvSpPr txBox="1"/>
+          <p:nvPr/>
+        </p:nvSpPr>
+        <p:spPr>
+          <a:xfrm>
+            <a:off x="6309360" y="1051560"/>
+            <a:ext cx="5212080" cy="457200"/>
+          </a:xfrm>
+          <a:prstGeom prst="rect">
+            <a:avLst/>
+          </a:prstGeom>
+          <a:noFill/>
+        </p:spPr>
+        <p:txBody>
+          <a:bodyPr wrap="square">
+            <a:spAutoFit/>
+          </a:bodyPr>
+          <a:lstStyle/>
+          <a:p>
+            <a:pPr algn="l"/>
+            <a:r>
+              <a:rPr sz="1500" b="1">
+                <a:solidFill>
+                  <a:srgbClr val="FFFFFF"/>
+                </a:solidFill>
+                <a:latin typeface="Noto Sans JP"/>
+              </a:rPr>
+              <a:t>オフライン・インストール</a:t>
+            </a:r>
+          </a:p>
+        </p:txBody>
+      </p:sp>
+      <p:sp>
+        <p:nvSpPr>
+          <p:cNvPr id="13" name="TextBox 12"/>
+          <p:cNvSpPr txBox="1"/>
+          <p:nvPr/>
+        </p:nvSpPr>
+        <p:spPr>
+          <a:xfrm>
+            <a:off x="6355080" y="1600200"/>
+            <a:ext cx="5120640" cy="4617720"/>
+          </a:xfrm>
+          <a:prstGeom prst="rect">
+            <a:avLst/>
+          </a:prstGeom>
+          <a:noFill/>
+        </p:spPr>
+        <p:txBody>
+          <a:bodyPr wrap="square">
+            <a:spAutoFit/>
+          </a:bodyPr>
+          <a:lstStyle/>
+          <a:p>
+            <a:pPr algn="l">
+              <a:lnSpc>
+                <a:spcPts val="2000"/>
+              </a:lnSpc>
+            </a:pPr>
+            <a:r>
+              <a:rPr sz="1300" b="0">
+                <a:solidFill>
+                  <a:srgbClr val="1A2B4A"/>
+                </a:solidFill>
+                <a:latin typeface="Noto Sans JP"/>
+              </a:rPr>
+              <a:t>## オフラインキャッシュ戦略</a:t>
+            </a:r>
+          </a:p>
+          <a:p>
+            <a:pPr algn="l">
+              <a:lnSpc>
+                <a:spcPts val="2000"/>
+              </a:lnSpc>
+            </a:pPr>
+            <a:r>
+              <a:rPr sz="1300" b="0">
+                <a:solidFill>
+                  <a:srgbClr val="1A2B4A"/>
+                </a:solidFill>
+                <a:latin typeface="Noto Sans JP"/>
+              </a:rPr>
+              <a:t>・Shell (HTML/CSS/JS): precache</a:t>
+            </a:r>
+          </a:p>
+          <a:p>
+            <a:pPr algn="l">
+              <a:lnSpc>
+                <a:spcPts val="2000"/>
+              </a:lnSpc>
+            </a:pPr>
+            <a:r>
+              <a:rPr sz="1300" b="0">
+                <a:solidFill>
+                  <a:srgbClr val="1A2B4A"/>
+                </a:solidFill>
+                <a:latin typeface="Noto Sans JP"/>
+              </a:rPr>
+              <a:t>・静的アセット: CacheFirst</a:t>
+            </a:r>
+          </a:p>
+          <a:p>
+            <a:pPr algn="l">
+              <a:lnSpc>
+                <a:spcPts val="2000"/>
+              </a:lnSpc>
+            </a:pPr>
+            <a:r>
+              <a:rPr sz="1300" b="0">
+                <a:solidFill>
+                  <a:srgbClr val="1A2B4A"/>
+                </a:solidFill>
+                <a:latin typeface="Noto Sans JP"/>
+              </a:rPr>
+              <a:t>  最大30日 / 60エントリ</a:t>
+            </a:r>
+          </a:p>
+          <a:p>
+            <a:pPr algn="l">
+              <a:lnSpc>
+                <a:spcPts val="2000"/>
+              </a:lnSpc>
+            </a:pPr>
+            <a:r>
+              <a:rPr sz="1300" b="0">
+                <a:solidFill>
+                  <a:srgbClr val="1A2B4A"/>
+                </a:solidFill>
+                <a:latin typeface="Noto Sans JP"/>
+              </a:rPr>
+              <a:t>・Firebase API: NetworkFirst</a:t>
+            </a:r>
+          </a:p>
+          <a:p>
+            <a:pPr algn="l">
+              <a:lnSpc>
+                <a:spcPts val="2000"/>
+              </a:lnSpc>
+            </a:pPr>
+            <a:r>
+              <a:rPr sz="1300" b="0">
+                <a:solidFill>
+                  <a:srgbClr val="1A2B4A"/>
+                </a:solidFill>
+                <a:latin typeface="Noto Sans JP"/>
+              </a:rPr>
+              <a:t>  オフライン時はキャッシュから提供</a:t>
+            </a:r>
+          </a:p>
+          <a:p>
+            <a:pPr algn="l">
+              <a:lnSpc>
+                <a:spcPts val="2000"/>
+              </a:lnSpc>
+            </a:pPr>
+            <a:r>
+              <a:rPr sz="1300" b="0">
+                <a:solidFill>
+                  <a:srgbClr val="1A2B4A"/>
+                </a:solidFill>
+                <a:latin typeface="Noto Sans JP"/>
+              </a:rPr>
+              <a:t/>
+            </a:r>
+          </a:p>
+          <a:p>
+            <a:pPr algn="l">
+              <a:lnSpc>
+                <a:spcPts val="2000"/>
+              </a:lnSpc>
+            </a:pPr>
+            <a:r>
+              <a:rPr sz="1300" b="0">
+                <a:solidFill>
+                  <a:srgbClr val="1A2B4A"/>
+                </a:solidFill>
+                <a:latin typeface="Noto Sans JP"/>
+              </a:rPr>
+              <a:t>## InstallBanner コンポーネント</a:t>
+            </a:r>
+          </a:p>
+          <a:p>
+            <a:pPr algn="l">
+              <a:lnSpc>
+                <a:spcPts val="2000"/>
+              </a:lnSpc>
+            </a:pPr>
+            <a:r>
+              <a:rPr sz="1300" b="0">
+                <a:solidFill>
+                  <a:srgbClr val="1A2B4A"/>
+                </a:solidFill>
+                <a:latin typeface="Noto Sans JP"/>
+              </a:rPr>
+              <a:t>・beforeinstallprompt イベントを</a:t>
+            </a:r>
+          </a:p>
+          <a:p>
+            <a:pPr algn="l">
+              <a:lnSpc>
+                <a:spcPts val="2000"/>
+              </a:lnSpc>
+            </a:pPr>
+            <a:r>
+              <a:rPr sz="1300" b="0">
+                <a:solidFill>
+                  <a:srgbClr val="1A2B4A"/>
+                </a:solidFill>
+                <a:latin typeface="Noto Sans JP"/>
+              </a:rPr>
+              <a:t>  キャプチャして表示</a:t>
+            </a:r>
+          </a:p>
+          <a:p>
+            <a:pPr algn="l">
+              <a:lnSpc>
+                <a:spcPts val="2000"/>
+              </a:lnSpc>
+            </a:pPr>
+            <a:r>
+              <a:rPr sz="1300" b="0">
+                <a:solidFill>
+                  <a:srgbClr val="1A2B4A"/>
+                </a:solidFill>
+                <a:latin typeface="Noto Sans JP"/>
+              </a:rPr>
+              <a:t>・「ホーム画面に追加」ボタン</a:t>
+            </a:r>
+          </a:p>
+          <a:p>
+            <a:pPr algn="l">
+              <a:lnSpc>
+                <a:spcPts val="2000"/>
+              </a:lnSpc>
+            </a:pPr>
+            <a:r>
+              <a:rPr sz="1300" b="0">
+                <a:solidFill>
+                  <a:srgbClr val="1A2B4A"/>
+                </a:solidFill>
+                <a:latin typeface="Noto Sans JP"/>
+              </a:rPr>
+              <a:t>・一度閉じると localStorage に</a:t>
+            </a:r>
+          </a:p>
+          <a:p>
+            <a:pPr algn="l">
+              <a:lnSpc>
+                <a:spcPts val="2000"/>
+              </a:lnSpc>
+            </a:pPr>
+            <a:r>
+              <a:rPr sz="1300" b="0">
+                <a:solidFill>
+                  <a:srgbClr val="1A2B4A"/>
+                </a:solidFill>
+                <a:latin typeface="Noto Sans JP"/>
+              </a:rPr>
+              <a:t>  dismissed=true を保存</a:t>
+            </a:r>
+          </a:p>
+          <a:p>
+            <a:pPr algn="l">
+              <a:lnSpc>
+                <a:spcPts val="2000"/>
+              </a:lnSpc>
+            </a:pPr>
+            <a:r>
+              <a:rPr sz="1300" b="0">
+                <a:solidFill>
+                  <a:srgbClr val="1A2B4A"/>
+                </a:solidFill>
+                <a:latin typeface="Noto Sans JP"/>
+              </a:rPr>
+              <a:t/>
+            </a:r>
+          </a:p>
+          <a:p>
+            <a:pPr algn="l">
+              <a:lnSpc>
+                <a:spcPts val="2000"/>
+              </a:lnSpc>
+            </a:pPr>
+            <a:r>
+              <a:rPr sz="1300" b="0">
+                <a:solidFill>
+                  <a:srgbClr val="1A2B4A"/>
+                </a:solidFill>
+                <a:latin typeface="Noto Sans JP"/>
+              </a:rPr>
+              <a:t>## Service Worker 更新</a:t>
+            </a:r>
+          </a:p>
+          <a:p>
+            <a:pPr algn="l">
+              <a:lnSpc>
+                <a:spcPts val="2000"/>
+              </a:lnSpc>
+            </a:pPr>
+            <a:r>
+              <a:rPr sz="1300" b="0">
+                <a:solidFill>
+                  <a:srgbClr val="1A2B4A"/>
+                </a:solidFill>
+                <a:latin typeface="Noto Sans JP"/>
+              </a:rPr>
+              <a:t>・autoUpdate: バックグラウンドで</a:t>
+            </a:r>
+          </a:p>
+          <a:p>
+            <a:pPr algn="l">
+              <a:lnSpc>
+                <a:spcPts val="2000"/>
+              </a:lnSpc>
+            </a:pPr>
+            <a:r>
+              <a:rPr sz="1300" b="0">
+                <a:solidFill>
+                  <a:srgbClr val="1A2B4A"/>
+                </a:solidFill>
+                <a:latin typeface="Noto Sans JP"/>
+              </a:rPr>
+              <a:t>  自動更新・即時適用</a:t>
+            </a:r>
+          </a:p>
+          <a:p>
+            <a:pPr algn="l">
+              <a:lnSpc>
+                <a:spcPts val="2000"/>
+              </a:lnSpc>
+            </a:pPr>
+            <a:r>
+              <a:rPr sz="1300" b="0">
+                <a:solidFill>
+                  <a:srgbClr val="1A2B4A"/>
+                </a:solidFill>
+                <a:latin typeface="Noto Sans JP"/>
+              </a:rPr>
+              <a:t>・skipWaiting: true</a:t>
+            </a:r>
+          </a:p>
+        </p:txBody>
+      </p:sp>
+    </p:spTree>
+  </p:cSld>
+  <p:clrMapOvr>
+    <a:masterClrMapping/>
+  </p:clrMapOvr>
+</p:sld>
+</file>
+
+<file path=ppt/slides/slide23.xml><?xml version="1.0" encoding="utf-8"?>
+<p:sld xmlns:a="http://schemas.openxmlformats.org/drawingml/2006/main" xmlns:p="http://schemas.openxmlformats.org/presentationml/2006/main" xmlns:r="http://schemas.openxmlformats.org/officeDocument/2006/relationships">
+  <p:cSld>
+    <p:spTree>
+      <p:nvGrpSpPr>
+        <p:cNvPr id="1" name=""/>
+        <p:cNvGrpSpPr/>
+        <p:nvPr/>
+      </p:nvGrpSpPr>
+      <p:grpSpPr/>
+      <p:sp>
+        <p:nvSpPr>
+          <p:cNvPr id="2" name="Rectangle 1"/>
+          <p:cNvSpPr/>
+          <p:nvPr/>
+        </p:nvSpPr>
+        <p:spPr>
+          <a:xfrm>
+            <a:off x="0" y="0"/>
+            <a:ext cx="12188952" cy="6858000"/>
+          </a:xfrm>
+          <a:prstGeom prst="rect">
+            <a:avLst/>
+          </a:prstGeom>
+          <a:solidFill>
+            <a:srgbClr val="F8F5EE"/>
+          </a:solidFill>
+          <a:ln>
+            <a:noFill/>
+          </a:ln>
+        </p:spPr>
+        <p:style>
+          <a:lnRef idx="1">
+            <a:schemeClr val="accent1"/>
+          </a:lnRef>
+          <a:fillRef idx="3">
+            <a:schemeClr val="accent1"/>
+          </a:fillRef>
+          <a:effectRef idx="2">
+            <a:schemeClr val="accent1"/>
+          </a:effectRef>
+          <a:fontRef idx="minor">
+            <a:schemeClr val="lt1"/>
+          </a:fontRef>
+        </p:style>
+        <p:txBody>
+          <a:bodyPr rtlCol="0" anchor="ctr"/>
+          <a:lstStyle/>
+          <a:p>
+            <a:pPr algn="ctr"/>
+          </a:p>
+        </p:txBody>
+      </p:sp>
+      <p:sp>
+        <p:nvSpPr>
+          <p:cNvPr id="3" name="Rectangle 2"/>
+          <p:cNvSpPr/>
+          <p:nvPr/>
+        </p:nvSpPr>
+        <p:spPr>
+          <a:xfrm>
+            <a:off x="0" y="0"/>
+            <a:ext cx="12188952" cy="822960"/>
+          </a:xfrm>
+          <a:prstGeom prst="rect">
+            <a:avLst/>
+          </a:prstGeom>
+          <a:solidFill>
+            <a:srgbClr val="1A2B4A"/>
+          </a:solidFill>
+          <a:ln>
+            <a:noFill/>
+          </a:ln>
+        </p:spPr>
+        <p:style>
+          <a:lnRef idx="1">
+            <a:schemeClr val="accent1"/>
+          </a:lnRef>
+          <a:fillRef idx="3">
+            <a:schemeClr val="accent1"/>
+          </a:fillRef>
+          <a:effectRef idx="2">
+            <a:schemeClr val="accent1"/>
+          </a:effectRef>
+          <a:fontRef idx="minor">
+            <a:schemeClr val="lt1"/>
+          </a:fontRef>
+        </p:style>
+        <p:txBody>
+          <a:bodyPr rtlCol="0" anchor="ctr"/>
+          <a:lstStyle/>
+          <a:p>
+            <a:pPr algn="ctr"/>
+          </a:p>
+        </p:txBody>
+      </p:sp>
+      <p:sp>
+        <p:nvSpPr>
+          <p:cNvPr id="4" name="TextBox 3"/>
+          <p:cNvSpPr txBox="1"/>
+          <p:nvPr/>
+        </p:nvSpPr>
+        <p:spPr>
+          <a:xfrm>
+            <a:off x="365760" y="91440"/>
+            <a:ext cx="9144000" cy="685800"/>
+          </a:xfrm>
+          <a:prstGeom prst="rect">
+            <a:avLst/>
+          </a:prstGeom>
+          <a:noFill/>
+        </p:spPr>
+        <p:txBody>
+          <a:bodyPr wrap="square">
+            <a:spAutoFit/>
+          </a:bodyPr>
+          <a:lstStyle/>
+          <a:p>
+            <a:pPr algn="l"/>
+            <a:r>
+              <a:rPr sz="2600" b="1">
+                <a:solidFill>
+                  <a:srgbClr val="FFFFFF"/>
+                </a:solidFill>
+                <a:latin typeface="Noto Sans JP"/>
+              </a:rPr>
+              <a:t>問診票機能（/questionnaire）</a:t>
+            </a:r>
+          </a:p>
+        </p:txBody>
+      </p:sp>
+      <p:sp>
+        <p:nvSpPr>
+          <p:cNvPr id="5" name="Rectangle 4"/>
+          <p:cNvSpPr/>
+          <p:nvPr/>
+        </p:nvSpPr>
+        <p:spPr>
+          <a:xfrm>
+            <a:off x="10332720" y="182880"/>
+            <a:ext cx="1645920" cy="457200"/>
+          </a:xfrm>
+          <a:prstGeom prst="rect">
+            <a:avLst/>
+          </a:prstGeom>
+          <a:solidFill>
+            <a:srgbClr val="D4AF37"/>
+          </a:solidFill>
+          <a:ln>
+            <a:noFill/>
+          </a:ln>
+        </p:spPr>
+        <p:style>
+          <a:lnRef idx="1">
+            <a:schemeClr val="accent1"/>
+          </a:lnRef>
+          <a:fillRef idx="3">
+            <a:schemeClr val="accent1"/>
+          </a:fillRef>
+          <a:effectRef idx="2">
+            <a:schemeClr val="accent1"/>
+          </a:effectRef>
+          <a:fontRef idx="minor">
+            <a:schemeClr val="lt1"/>
+          </a:fontRef>
+        </p:style>
+        <p:txBody>
+          <a:bodyPr rtlCol="0" anchor="ctr"/>
+          <a:lstStyle/>
+          <a:p>
+            <a:pPr algn="ctr"/>
+            <a:r>
+              <a:rPr sz="1200" b="1">
+                <a:solidFill>
+                  <a:srgbClr val="1A2B4A"/>
+                </a:solidFill>
+                <a:latin typeface="Noto Sans JP"/>
+              </a:rPr>
+              <a:t>新機能</a:t>
+            </a:r>
+          </a:p>
+        </p:txBody>
+      </p:sp>
+      <p:pic>
+        <p:nvPicPr>
+          <p:cNvPr id="6" name="Picture 5" descr="08_questionnaire.png"/>
+          <p:cNvPicPr>
+            <a:picLocks noChangeAspect="1"/>
+          </p:cNvPicPr>
+          <p:nvPr/>
+        </p:nvPicPr>
+        <p:blipFill>
+          <a:blip r:embed="rId2"/>
+          <a:stretch>
+            <a:fillRect/>
+          </a:stretch>
+        </p:blipFill>
+        <p:spPr>
+          <a:xfrm>
+            <a:off x="365760" y="1371600"/>
+            <a:ext cx="7315200" cy="4572000"/>
+          </a:xfrm>
+          <a:prstGeom prst="rect">
+            <a:avLst/>
+          </a:prstGeom>
+        </p:spPr>
+      </p:pic>
+      <p:sp>
+        <p:nvSpPr>
+          <p:cNvPr id="7" name="Rectangle 6"/>
+          <p:cNvSpPr/>
+          <p:nvPr/>
+        </p:nvSpPr>
+        <p:spPr>
+          <a:xfrm>
+            <a:off x="7955279" y="1005840"/>
+            <a:ext cx="3931920" cy="5303520"/>
+          </a:xfrm>
+          <a:prstGeom prst="rect">
+            <a:avLst/>
+          </a:prstGeom>
+          <a:solidFill>
+            <a:srgbClr val="F8F5EE"/>
+          </a:solidFill>
+          <a:ln>
+            <a:noFill/>
+          </a:ln>
+        </p:spPr>
+        <p:style>
+          <a:lnRef idx="1">
+            <a:schemeClr val="accent1"/>
+          </a:lnRef>
+          <a:fillRef idx="3">
+            <a:schemeClr val="accent1"/>
+          </a:fillRef>
+          <a:effectRef idx="2">
+            <a:schemeClr val="accent1"/>
+          </a:effectRef>
+          <a:fontRef idx="minor">
+            <a:schemeClr val="lt1"/>
+          </a:fontRef>
+        </p:style>
+        <p:txBody>
+          <a:bodyPr rtlCol="0" anchor="ctr"/>
+          <a:lstStyle/>
+          <a:p>
+            <a:pPr algn="ctr"/>
+          </a:p>
+        </p:txBody>
+      </p:sp>
+      <p:sp>
+        <p:nvSpPr>
+          <p:cNvPr id="8" name="TextBox 7"/>
+          <p:cNvSpPr txBox="1"/>
+          <p:nvPr/>
+        </p:nvSpPr>
+        <p:spPr>
+          <a:xfrm>
+            <a:off x="8092439" y="1188720"/>
+            <a:ext cx="3657600" cy="4937760"/>
+          </a:xfrm>
+          <a:prstGeom prst="rect">
+            <a:avLst/>
+          </a:prstGeom>
+          <a:noFill/>
+        </p:spPr>
+        <p:txBody>
+          <a:bodyPr wrap="square">
+            <a:spAutoFit/>
+          </a:bodyPr>
+          <a:lstStyle/>
+          <a:p>
+            <a:pPr algn="l">
+              <a:lnSpc>
+                <a:spcPts val="2200"/>
+              </a:lnSpc>
+            </a:pPr>
+            <a:r>
+              <a:rPr sz="1300" b="0">
+                <a:solidFill>
+                  <a:srgbClr val="1A2B4A"/>
+                </a:solidFill>
+                <a:latin typeface="Noto Sans JP"/>
+              </a:rPr>
+              <a:t>## ルート</a:t>
+            </a:r>
+          </a:p>
+          <a:p>
+            <a:pPr algn="l">
+              <a:lnSpc>
+                <a:spcPts val="2200"/>
+              </a:lnSpc>
+            </a:pPr>
+            <a:r>
+              <a:rPr sz="1300" b="0">
+                <a:solidFill>
+                  <a:srgbClr val="1A2B4A"/>
+                </a:solidFill>
+                <a:latin typeface="Noto Sans JP"/>
+              </a:rPr>
+              <a:t>・/questionnaire?id={reservationId}</a:t>
+            </a:r>
+          </a:p>
+          <a:p>
+            <a:pPr algn="l">
+              <a:lnSpc>
+                <a:spcPts val="2200"/>
+              </a:lnSpc>
+            </a:pPr>
+            <a:r>
+              <a:rPr sz="1300" b="0">
+                <a:solidFill>
+                  <a:srgbClr val="1A2B4A"/>
+                </a:solidFill>
+                <a:latin typeface="Noto Sans JP"/>
+              </a:rPr>
+              <a:t>  予約確認メール内リンクから遷移</a:t>
+            </a:r>
+          </a:p>
+          <a:p>
+            <a:pPr algn="l">
+              <a:lnSpc>
+                <a:spcPts val="2200"/>
+              </a:lnSpc>
+            </a:pPr>
+            <a:r>
+              <a:rPr sz="1300" b="0">
+                <a:solidFill>
+                  <a:srgbClr val="1A2B4A"/>
+                </a:solidFill>
+                <a:latin typeface="Noto Sans JP"/>
+              </a:rPr>
+              <a:t/>
+            </a:r>
+          </a:p>
+          <a:p>
+            <a:pPr algn="l">
+              <a:lnSpc>
+                <a:spcPts val="2200"/>
+              </a:lnSpc>
+            </a:pPr>
+            <a:r>
+              <a:rPr sz="1300" b="0">
+                <a:solidFill>
+                  <a:srgbClr val="1A2B4A"/>
+                </a:solidFill>
+                <a:latin typeface="Noto Sans JP"/>
+              </a:rPr>
+              <a:t>## 18フィールド（5セクション）</a:t>
+            </a:r>
+          </a:p>
+          <a:p>
+            <a:pPr algn="l">
+              <a:lnSpc>
+                <a:spcPts val="2200"/>
+              </a:lnSpc>
+            </a:pPr>
+            <a:r>
+              <a:rPr sz="1300" b="0">
+                <a:solidFill>
+                  <a:srgbClr val="1A2B4A"/>
+                </a:solidFill>
+                <a:latin typeface="Noto Sans JP"/>
+              </a:rPr>
+              <a:t>《主訴・症状》</a:t>
+            </a:r>
+          </a:p>
+          <a:p>
+            <a:pPr algn="l">
+              <a:lnSpc>
+                <a:spcPts val="2200"/>
+              </a:lnSpc>
+            </a:pPr>
+            <a:r>
+              <a:rPr sz="1300" b="0">
+                <a:solidFill>
+                  <a:srgbClr val="1A2B4A"/>
+                </a:solidFill>
+                <a:latin typeface="Noto Sans JP"/>
+              </a:rPr>
+              <a:t>・主訴 / 発症時期 / 痛み程度</a:t>
+            </a:r>
+          </a:p>
+          <a:p>
+            <a:pPr algn="l">
+              <a:lnSpc>
+                <a:spcPts val="2200"/>
+              </a:lnSpc>
+            </a:pPr>
+            <a:r>
+              <a:rPr sz="1300" b="0">
+                <a:solidFill>
+                  <a:srgbClr val="1A2B4A"/>
+                </a:solidFill>
+                <a:latin typeface="Noto Sans JP"/>
+              </a:rPr>
+              <a:t>・痛みの部位（複数選択）</a:t>
+            </a:r>
+          </a:p>
+          <a:p>
+            <a:pPr algn="l">
+              <a:lnSpc>
+                <a:spcPts val="2200"/>
+              </a:lnSpc>
+            </a:pPr>
+            <a:r>
+              <a:rPr sz="1300" b="0">
+                <a:solidFill>
+                  <a:srgbClr val="1A2B4A"/>
+                </a:solidFill>
+                <a:latin typeface="Noto Sans JP"/>
+              </a:rPr>
+              <a:t>・痛みの性質 / 日常生活への影響</a:t>
+            </a:r>
+          </a:p>
+          <a:p>
+            <a:pPr algn="l">
+              <a:lnSpc>
+                <a:spcPts val="2200"/>
+              </a:lnSpc>
+            </a:pPr>
+            <a:r>
+              <a:rPr sz="1300" b="0">
+                <a:solidFill>
+                  <a:srgbClr val="1A2B4A"/>
+                </a:solidFill>
+                <a:latin typeface="Noto Sans JP"/>
+              </a:rPr>
+              <a:t>《既往歴・治療状況》</a:t>
+            </a:r>
+          </a:p>
+          <a:p>
+            <a:pPr algn="l">
+              <a:lnSpc>
+                <a:spcPts val="2200"/>
+              </a:lnSpc>
+            </a:pPr>
+            <a:r>
+              <a:rPr sz="1300" b="0">
+                <a:solidFill>
+                  <a:srgbClr val="1A2B4A"/>
+                </a:solidFill>
+                <a:latin typeface="Noto Sans JP"/>
+              </a:rPr>
+              <a:t>・既往歴 / 現在の通院</a:t>
+            </a:r>
+          </a:p>
+          <a:p>
+            <a:pPr algn="l">
+              <a:lnSpc>
+                <a:spcPts val="2200"/>
+              </a:lnSpc>
+            </a:pPr>
+            <a:r>
+              <a:rPr sz="1300" b="0">
+                <a:solidFill>
+                  <a:srgbClr val="1A2B4A"/>
+                </a:solidFill>
+                <a:latin typeface="Noto Sans JP"/>
+              </a:rPr>
+              <a:t>・服用中の薬 / アレルギー / 手術歴</a:t>
+            </a:r>
+          </a:p>
+          <a:p>
+            <a:pPr algn="l">
+              <a:lnSpc>
+                <a:spcPts val="2200"/>
+              </a:lnSpc>
+            </a:pPr>
+            <a:r>
+              <a:rPr sz="1300" b="0">
+                <a:solidFill>
+                  <a:srgbClr val="1A2B4A"/>
+                </a:solidFill>
+                <a:latin typeface="Noto Sans JP"/>
+              </a:rPr>
+              <a:t>《生活習慣》</a:t>
+            </a:r>
+          </a:p>
+          <a:p>
+            <a:pPr algn="l">
+              <a:lnSpc>
+                <a:spcPts val="2200"/>
+              </a:lnSpc>
+            </a:pPr>
+            <a:r>
+              <a:rPr sz="1300" b="0">
+                <a:solidFill>
+                  <a:srgbClr val="1A2B4A"/>
+                </a:solidFill>
+                <a:latin typeface="Noto Sans JP"/>
+              </a:rPr>
+              <a:t>・睡眠 / 食事 / 運動 / ストレス</a:t>
+            </a:r>
+          </a:p>
+          <a:p>
+            <a:pPr algn="l">
+              <a:lnSpc>
+                <a:spcPts val="2200"/>
+              </a:lnSpc>
+            </a:pPr>
+            <a:r>
+              <a:rPr sz="1300" b="0">
+                <a:solidFill>
+                  <a:srgbClr val="1A2B4A"/>
+                </a:solidFill>
+                <a:latin typeface="Noto Sans JP"/>
+              </a:rPr>
+              <a:t>《その他》</a:t>
+            </a:r>
+          </a:p>
+          <a:p>
+            <a:pPr algn="l">
+              <a:lnSpc>
+                <a:spcPts val="2200"/>
+              </a:lnSpc>
+            </a:pPr>
+            <a:r>
+              <a:rPr sz="1300" b="0">
+                <a:solidFill>
+                  <a:srgbClr val="1A2B4A"/>
+                </a:solidFill>
+                <a:latin typeface="Noto Sans JP"/>
+              </a:rPr>
+              <a:t>・妊娠の可能性（3択）</a:t>
+            </a:r>
+          </a:p>
+          <a:p>
+            <a:pPr algn="l">
+              <a:lnSpc>
+                <a:spcPts val="2200"/>
+              </a:lnSpc>
+            </a:pPr>
+            <a:r>
+              <a:rPr sz="1300" b="0">
+                <a:solidFill>
+                  <a:srgbClr val="1A2B4A"/>
+                </a:solidFill>
+                <a:latin typeface="Noto Sans JP"/>
+              </a:rPr>
+              <a:t>・希望する施術 / その他</a:t>
+            </a:r>
+          </a:p>
+          <a:p>
+            <a:pPr algn="l">
+              <a:lnSpc>
+                <a:spcPts val="2200"/>
+              </a:lnSpc>
+            </a:pPr>
+            <a:r>
+              <a:rPr sz="1300" b="0">
+                <a:solidFill>
+                  <a:srgbClr val="1A2B4A"/>
+                </a:solidFill>
+                <a:latin typeface="Noto Sans JP"/>
+              </a:rPr>
+              <a:t/>
+            </a:r>
+          </a:p>
+          <a:p>
+            <a:pPr algn="l">
+              <a:lnSpc>
+                <a:spcPts val="2200"/>
+              </a:lnSpc>
+            </a:pPr>
+            <a:r>
+              <a:rPr sz="1300" b="0">
+                <a:solidFill>
+                  <a:srgbClr val="1A2B4A"/>
+                </a:solidFill>
+                <a:latin typeface="Noto Sans JP"/>
+              </a:rPr>
+              <a:t>## データ保存</a:t>
+            </a:r>
+          </a:p>
+          <a:p>
+            <a:pPr algn="l">
+              <a:lnSpc>
+                <a:spcPts val="2200"/>
+              </a:lnSpc>
+            </a:pPr>
+            <a:r>
+              <a:rPr sz="1300" b="0">
+                <a:solidFill>
+                  <a:srgbClr val="1A2B4A"/>
+                </a:solidFill>
+                <a:latin typeface="Noto Sans JP"/>
+              </a:rPr>
+              <a:t>・questionnaires/{reservationId}</a:t>
+            </a:r>
+          </a:p>
+          <a:p>
+            <a:pPr algn="l">
+              <a:lnSpc>
+                <a:spcPts val="2200"/>
+              </a:lnSpc>
+            </a:pPr>
+            <a:r>
+              <a:rPr sz="1300" b="0">
+                <a:solidFill>
+                  <a:srgbClr val="1A2B4A"/>
+                </a:solidFill>
+                <a:latin typeface="Noto Sans JP"/>
+              </a:rPr>
+              <a:t>  に Firestore 保存</a:t>
+            </a:r>
+          </a:p>
+          <a:p>
+            <a:pPr algn="l">
+              <a:lnSpc>
+                <a:spcPts val="2200"/>
+              </a:lnSpc>
+            </a:pPr>
+            <a:r>
+              <a:rPr sz="1300" b="0">
+                <a:solidFill>
+                  <a:srgbClr val="1A2B4A"/>
+                </a:solidFill>
+                <a:latin typeface="Noto Sans JP"/>
+              </a:rPr>
+              <a:t/>
+            </a:r>
+          </a:p>
+          <a:p>
+            <a:pPr algn="l">
+              <a:lnSpc>
+                <a:spcPts val="2200"/>
+              </a:lnSpc>
+            </a:pPr>
+            <a:r>
+              <a:rPr sz="1300" b="0">
+                <a:solidFill>
+                  <a:srgbClr val="1A2B4A"/>
+                </a:solidFill>
+                <a:latin typeface="Noto Sans JP"/>
+              </a:rPr>
+              <a:t>## PDF出力</a:t>
+            </a:r>
+          </a:p>
+          <a:p>
+            <a:pPr algn="l">
+              <a:lnSpc>
+                <a:spcPts val="2200"/>
+              </a:lnSpc>
+            </a:pPr>
+            <a:r>
+              <a:rPr sz="1300" b="0">
+                <a:solidFill>
+                  <a:srgbClr val="1A2B4A"/>
+                </a:solidFill>
+                <a:latin typeface="Noto Sans JP"/>
+              </a:rPr>
+              <a:t>・generateQuestionnairePdf()</a:t>
+            </a:r>
+          </a:p>
+          <a:p>
+            <a:pPr algn="l">
+              <a:lnSpc>
+                <a:spcPts val="2200"/>
+              </a:lnSpc>
+            </a:pPr>
+            <a:r>
+              <a:rPr sz="1300" b="0">
+                <a:solidFill>
+                  <a:srgbClr val="1A2B4A"/>
+                </a:solidFill>
+                <a:latin typeface="Noto Sans JP"/>
+              </a:rPr>
+              <a:t>・pdf-lib + fontkit</a:t>
+            </a:r>
+          </a:p>
+          <a:p>
+            <a:pPr algn="l">
+              <a:lnSpc>
+                <a:spcPts val="2200"/>
+              </a:lnSpc>
+            </a:pPr>
+            <a:r>
+              <a:rPr sz="1300" b="0">
+                <a:solidFill>
+                  <a:srgbClr val="1A2B4A"/>
+                </a:solidFill>
+                <a:latin typeface="Noto Sans JP"/>
+              </a:rPr>
+              <a:t>・ファイル名:</a:t>
+            </a:r>
+          </a:p>
+          <a:p>
+            <a:pPr algn="l">
+              <a:lnSpc>
+                <a:spcPts val="2200"/>
+              </a:lnSpc>
+            </a:pPr>
+            <a:r>
+              <a:rPr sz="1300" b="0">
+                <a:solidFill>
+                  <a:srgbClr val="1A2B4A"/>
+                </a:solidFill>
+                <a:latin typeface="Noto Sans JP"/>
+              </a:rPr>
+              <a:t>  問診票_{氏名}_{日付}.pdf</a:t>
+            </a:r>
+          </a:p>
+        </p:txBody>
+      </p:sp>
+    </p:spTree>
+  </p:cSld>
+  <p:clrMapOvr>
+    <a:masterClrMapping/>
+  </p:clrMapOvr>
+</p:sld>
+</file>
+
+<file path=ppt/slides/slide24.xml><?xml version="1.0" encoding="utf-8"?>
+<p:sld xmlns:a="http://schemas.openxmlformats.org/drawingml/2006/main" xmlns:p="http://schemas.openxmlformats.org/presentationml/2006/main" xmlns:r="http://schemas.openxmlformats.org/officeDocument/2006/relationships">
+  <p:cSld>
+    <p:spTree>
+      <p:nvGrpSpPr>
+        <p:cNvPr id="1" name=""/>
+        <p:cNvGrpSpPr/>
+        <p:nvPr/>
+      </p:nvGrpSpPr>
+      <p:grpSpPr/>
+      <p:sp>
+        <p:nvSpPr>
+          <p:cNvPr id="2" name="Rectangle 1"/>
+          <p:cNvSpPr/>
+          <p:nvPr/>
+        </p:nvSpPr>
+        <p:spPr>
+          <a:xfrm>
+            <a:off x="0" y="0"/>
+            <a:ext cx="12188952" cy="6858000"/>
+          </a:xfrm>
+          <a:prstGeom prst="rect">
+            <a:avLst/>
+          </a:prstGeom>
+          <a:solidFill>
+            <a:srgbClr val="F8F5EE"/>
+          </a:solidFill>
+          <a:ln>
+            <a:noFill/>
+          </a:ln>
+        </p:spPr>
+        <p:style>
+          <a:lnRef idx="1">
+            <a:schemeClr val="accent1"/>
+          </a:lnRef>
+          <a:fillRef idx="3">
+            <a:schemeClr val="accent1"/>
+          </a:fillRef>
+          <a:effectRef idx="2">
+            <a:schemeClr val="accent1"/>
+          </a:effectRef>
+          <a:fontRef idx="minor">
+            <a:schemeClr val="lt1"/>
+          </a:fontRef>
+        </p:style>
+        <p:txBody>
+          <a:bodyPr rtlCol="0" anchor="ctr"/>
+          <a:lstStyle/>
+          <a:p>
+            <a:pPr algn="ctr"/>
+          </a:p>
+        </p:txBody>
+      </p:sp>
+      <p:sp>
+        <p:nvSpPr>
+          <p:cNvPr id="3" name="Rectangle 2"/>
+          <p:cNvSpPr/>
+          <p:nvPr/>
+        </p:nvSpPr>
+        <p:spPr>
+          <a:xfrm>
+            <a:off x="0" y="0"/>
+            <a:ext cx="12188952" cy="822960"/>
+          </a:xfrm>
+          <a:prstGeom prst="rect">
+            <a:avLst/>
+          </a:prstGeom>
+          <a:solidFill>
+            <a:srgbClr val="1A2B4A"/>
+          </a:solidFill>
+          <a:ln>
+            <a:noFill/>
+          </a:ln>
+        </p:spPr>
+        <p:style>
+          <a:lnRef idx="1">
+            <a:schemeClr val="accent1"/>
+          </a:lnRef>
+          <a:fillRef idx="3">
+            <a:schemeClr val="accent1"/>
+          </a:fillRef>
+          <a:effectRef idx="2">
+            <a:schemeClr val="accent1"/>
+          </a:effectRef>
+          <a:fontRef idx="minor">
+            <a:schemeClr val="lt1"/>
+          </a:fontRef>
+        </p:style>
+        <p:txBody>
+          <a:bodyPr rtlCol="0" anchor="ctr"/>
+          <a:lstStyle/>
+          <a:p>
+            <a:pPr algn="ctr"/>
+          </a:p>
+        </p:txBody>
+      </p:sp>
+      <p:sp>
+        <p:nvSpPr>
+          <p:cNvPr id="4" name="TextBox 3"/>
+          <p:cNvSpPr txBox="1"/>
+          <p:nvPr/>
+        </p:nvSpPr>
+        <p:spPr>
+          <a:xfrm>
+            <a:off x="365760" y="91440"/>
+            <a:ext cx="9144000" cy="685800"/>
+          </a:xfrm>
+          <a:prstGeom prst="rect">
+            <a:avLst/>
+          </a:prstGeom>
+          <a:noFill/>
+        </p:spPr>
+        <p:txBody>
+          <a:bodyPr wrap="square">
+            <a:spAutoFit/>
+          </a:bodyPr>
+          <a:lstStyle/>
+          <a:p>
+            <a:pPr algn="l"/>
+            <a:r>
+              <a:rPr sz="2600" b="1">
+                <a:solidFill>
+                  <a:srgbClr val="FFFFFF"/>
+                </a:solidFill>
+                <a:latin typeface="Noto Sans JP"/>
+              </a:rPr>
+              <a:t>診察履歴・APPI訂正権対応</a:t>
+            </a:r>
+          </a:p>
+        </p:txBody>
+      </p:sp>
+      <p:sp>
+        <p:nvSpPr>
+          <p:cNvPr id="5" name="Rectangle 4"/>
+          <p:cNvSpPr/>
+          <p:nvPr/>
+        </p:nvSpPr>
+        <p:spPr>
+          <a:xfrm>
+            <a:off x="10332720" y="182880"/>
+            <a:ext cx="1645920" cy="457200"/>
+          </a:xfrm>
+          <a:prstGeom prst="rect">
+            <a:avLst/>
+          </a:prstGeom>
+          <a:solidFill>
+            <a:srgbClr val="D4AF37"/>
+          </a:solidFill>
+          <a:ln>
+            <a:noFill/>
+          </a:ln>
+        </p:spPr>
+        <p:style>
+          <a:lnRef idx="1">
+            <a:schemeClr val="accent1"/>
+          </a:lnRef>
+          <a:fillRef idx="3">
+            <a:schemeClr val="accent1"/>
+          </a:fillRef>
+          <a:effectRef idx="2">
+            <a:schemeClr val="accent1"/>
+          </a:effectRef>
+          <a:fontRef idx="minor">
+            <a:schemeClr val="lt1"/>
+          </a:fontRef>
+        </p:style>
+        <p:txBody>
+          <a:bodyPr rtlCol="0" anchor="ctr"/>
+          <a:lstStyle/>
+          <a:p>
+            <a:pPr algn="ctr"/>
+            <a:r>
+              <a:rPr sz="1200" b="1">
+                <a:solidFill>
+                  <a:srgbClr val="1A2B4A"/>
+                </a:solidFill>
+                <a:latin typeface="Noto Sans JP"/>
+              </a:rPr>
+              <a:t>新機能</a:t>
+            </a:r>
+          </a:p>
+        </p:txBody>
+      </p:sp>
+      <p:sp>
+        <p:nvSpPr>
+          <p:cNvPr id="6" name="Rectangle 5"/>
+          <p:cNvSpPr/>
+          <p:nvPr/>
+        </p:nvSpPr>
+        <p:spPr>
+          <a:xfrm>
+            <a:off x="457200" y="1005840"/>
+            <a:ext cx="5394960" cy="5303520"/>
+          </a:xfrm>
+          <a:prstGeom prst="rect">
+            <a:avLst/>
+          </a:prstGeom>
+          <a:solidFill>
+            <a:srgbClr val="F8F5EE"/>
+          </a:solidFill>
+          <a:ln>
+            <a:noFill/>
+          </a:ln>
+        </p:spPr>
+        <p:style>
+          <a:lnRef idx="1">
+            <a:schemeClr val="accent1"/>
+          </a:lnRef>
+          <a:fillRef idx="3">
+            <a:schemeClr val="accent1"/>
+          </a:fillRef>
+          <a:effectRef idx="2">
+            <a:schemeClr val="accent1"/>
+          </a:effectRef>
+          <a:fontRef idx="minor">
+            <a:schemeClr val="lt1"/>
+          </a:fontRef>
+        </p:style>
+        <p:txBody>
+          <a:bodyPr rtlCol="0" anchor="ctr"/>
+          <a:lstStyle/>
+          <a:p>
+            <a:pPr algn="ctr"/>
+          </a:p>
+        </p:txBody>
+      </p:sp>
+      <p:sp>
+        <p:nvSpPr>
+          <p:cNvPr id="7" name="Rectangle 6"/>
+          <p:cNvSpPr/>
+          <p:nvPr/>
+        </p:nvSpPr>
+        <p:spPr>
+          <a:xfrm>
+            <a:off x="457200" y="1005840"/>
+            <a:ext cx="5394960" cy="502920"/>
+          </a:xfrm>
+          <a:prstGeom prst="rect">
+            <a:avLst/>
+          </a:prstGeom>
+          <a:solidFill>
+            <a:srgbClr val="1A2B4A"/>
+          </a:solidFill>
+          <a:ln>
+            <a:noFill/>
+          </a:ln>
+        </p:spPr>
+        <p:style>
+          <a:lnRef idx="1">
+            <a:schemeClr val="accent1"/>
+          </a:lnRef>
+          <a:fillRef idx="3">
+            <a:schemeClr val="accent1"/>
+          </a:fillRef>
+          <a:effectRef idx="2">
+            <a:schemeClr val="accent1"/>
+          </a:effectRef>
+          <a:fontRef idx="minor">
+            <a:schemeClr val="lt1"/>
+          </a:fontRef>
+        </p:style>
+        <p:txBody>
+          <a:bodyPr rtlCol="0" anchor="ctr"/>
+          <a:lstStyle/>
+          <a:p>
+            <a:pPr algn="ctr"/>
+          </a:p>
+        </p:txBody>
+      </p:sp>
+      <p:sp>
+        <p:nvSpPr>
+          <p:cNvPr id="8" name="TextBox 7"/>
+          <p:cNvSpPr txBox="1"/>
+          <p:nvPr/>
+        </p:nvSpPr>
+        <p:spPr>
+          <a:xfrm>
+            <a:off x="548640" y="1051560"/>
+            <a:ext cx="5212080" cy="457200"/>
+          </a:xfrm>
+          <a:prstGeom prst="rect">
+            <a:avLst/>
+          </a:prstGeom>
+          <a:noFill/>
+        </p:spPr>
+        <p:txBody>
+          <a:bodyPr wrap="square">
+            <a:spAutoFit/>
+          </a:bodyPr>
+          <a:lstStyle/>
+          <a:p>
+            <a:pPr algn="l"/>
+            <a:r>
+              <a:rPr sz="1500" b="1">
+                <a:solidFill>
+                  <a:srgbClr val="FFFFFF"/>
+                </a:solidFill>
+                <a:latin typeface="Noto Sans JP"/>
+              </a:rPr>
+              <a:t>診察履歴（completeVisit CF）</a:t>
+            </a:r>
+          </a:p>
+        </p:txBody>
+      </p:sp>
+      <p:sp>
+        <p:nvSpPr>
+          <p:cNvPr id="9" name="TextBox 8"/>
+          <p:cNvSpPr txBox="1"/>
+          <p:nvPr/>
+        </p:nvSpPr>
+        <p:spPr>
+          <a:xfrm>
+            <a:off x="594360" y="1600200"/>
+            <a:ext cx="5120640" cy="4617720"/>
+          </a:xfrm>
+          <a:prstGeom prst="rect">
+            <a:avLst/>
+          </a:prstGeom>
+          <a:noFill/>
+        </p:spPr>
+        <p:txBody>
+          <a:bodyPr wrap="square">
+            <a:spAutoFit/>
+          </a:bodyPr>
+          <a:lstStyle/>
+          <a:p>
+            <a:pPr algn="l">
+              <a:lnSpc>
+                <a:spcPts val="2000"/>
+              </a:lnSpc>
+            </a:pPr>
+            <a:r>
+              <a:rPr sz="1300" b="0">
+                <a:solidFill>
+                  <a:srgbClr val="1A2B4A"/>
+                </a:solidFill>
+                <a:latin typeface="Noto Sans JP"/>
+              </a:rPr>
+              <a:t>## 診察完了フロー</a:t>
+            </a:r>
+          </a:p>
+          <a:p>
+            <a:pPr algn="l">
+              <a:lnSpc>
+                <a:spcPts val="2000"/>
+              </a:lnSpc>
+            </a:pPr>
+            <a:r>
+              <a:rPr sz="1300" b="0">
+                <a:solidFill>
+                  <a:srgbClr val="1A2B4A"/>
+                </a:solidFill>
+                <a:latin typeface="Noto Sans JP"/>
+              </a:rPr>
+              <a:t>① 管理者が詳細モーダルで</a:t>
+            </a:r>
+          </a:p>
+          <a:p>
+            <a:pPr algn="l">
+              <a:lnSpc>
+                <a:spcPts val="2000"/>
+              </a:lnSpc>
+            </a:pPr>
+            <a:r>
+              <a:rPr sz="1300" b="0">
+                <a:solidFill>
+                  <a:srgbClr val="1A2B4A"/>
+                </a:solidFill>
+                <a:latin typeface="Noto Sans JP"/>
+              </a:rPr>
+              <a:t>  「診察完了」ボタンをクリック</a:t>
+            </a:r>
+          </a:p>
+          <a:p>
+            <a:pPr algn="l">
+              <a:lnSpc>
+                <a:spcPts val="2000"/>
+              </a:lnSpc>
+            </a:pPr>
+            <a:r>
+              <a:rPr sz="1300" b="0">
+                <a:solidFill>
+                  <a:srgbClr val="1A2B4A"/>
+                </a:solidFill>
+                <a:latin typeface="Noto Sans JP"/>
+              </a:rPr>
+              <a:t>② 確認ダイアログ表示</a:t>
+            </a:r>
+          </a:p>
+          <a:p>
+            <a:pPr algn="l">
+              <a:lnSpc>
+                <a:spcPts val="2000"/>
+              </a:lnSpc>
+            </a:pPr>
+            <a:r>
+              <a:rPr sz="1300" b="0">
+                <a:solidFill>
+                  <a:srgbClr val="1A2B4A"/>
+                </a:solidFill>
+                <a:latin typeface="Noto Sans JP"/>
+              </a:rPr>
+              <a:t>③ completeVisit CF 呼び出し</a:t>
+            </a:r>
+          </a:p>
+          <a:p>
+            <a:pPr algn="l">
+              <a:lnSpc>
+                <a:spcPts val="2000"/>
+              </a:lnSpc>
+            </a:pPr>
+            <a:r>
+              <a:rPr sz="1300" b="0">
+                <a:solidFill>
+                  <a:srgbClr val="1A2B4A"/>
+                </a:solidFill>
+                <a:latin typeface="Noto Sans JP"/>
+              </a:rPr>
+              <a:t>   （admin クレーム必須）</a:t>
+            </a:r>
+          </a:p>
+          <a:p>
+            <a:pPr algn="l">
+              <a:lnSpc>
+                <a:spcPts val="2000"/>
+              </a:lnSpc>
+            </a:pPr>
+            <a:r>
+              <a:rPr sz="1300" b="0">
+                <a:solidFill>
+                  <a:srgbClr val="1A2B4A"/>
+                </a:solidFill>
+                <a:latin typeface="Noto Sans JP"/>
+              </a:rPr>
+              <a:t>④ visit_histories/{id} に</a:t>
+            </a:r>
+          </a:p>
+          <a:p>
+            <a:pPr algn="l">
+              <a:lnSpc>
+                <a:spcPts val="2000"/>
+              </a:lnSpc>
+            </a:pPr>
+            <a:r>
+              <a:rPr sz="1300" b="0">
+                <a:solidFill>
+                  <a:srgbClr val="1A2B4A"/>
+                </a:solidFill>
+                <a:latin typeface="Noto Sans JP"/>
+              </a:rPr>
+              <a:t>   予約データをコピー保存</a:t>
+            </a:r>
+          </a:p>
+          <a:p>
+            <a:pPr algn="l">
+              <a:lnSpc>
+                <a:spcPts val="2000"/>
+              </a:lnSpc>
+            </a:pPr>
+            <a:r>
+              <a:rPr sz="1300" b="0">
+                <a:solidFill>
+                  <a:srgbClr val="1A2B4A"/>
+                </a:solidFill>
+                <a:latin typeface="Noto Sans JP"/>
+              </a:rPr>
+              <a:t>⑤ reservations.status</a:t>
+            </a:r>
+          </a:p>
+          <a:p>
+            <a:pPr algn="l">
+              <a:lnSpc>
+                <a:spcPts val="2000"/>
+              </a:lnSpc>
+            </a:pPr>
+            <a:r>
+              <a:rPr sz="1300" b="0">
+                <a:solidFill>
+                  <a:srgbClr val="1A2B4A"/>
+                </a:solidFill>
+                <a:latin typeface="Noto Sans JP"/>
+              </a:rPr>
+              <a:t>   = completed に更新</a:t>
+            </a:r>
+          </a:p>
+          <a:p>
+            <a:pPr algn="l">
+              <a:lnSpc>
+                <a:spcPts val="2000"/>
+              </a:lnSpc>
+            </a:pPr>
+            <a:r>
+              <a:rPr sz="1300" b="0">
+                <a:solidFill>
+                  <a:srgbClr val="1A2B4A"/>
+                </a:solidFill>
+                <a:latin typeface="Noto Sans JP"/>
+              </a:rPr>
+              <a:t/>
+            </a:r>
+          </a:p>
+          <a:p>
+            <a:pPr algn="l">
+              <a:lnSpc>
+                <a:spcPts val="2000"/>
+              </a:lnSpc>
+            </a:pPr>
+            <a:r>
+              <a:rPr sz="1300" b="0">
+                <a:solidFill>
+                  <a:srgbClr val="1A2B4A"/>
+                </a:solidFill>
+                <a:latin typeface="Noto Sans JP"/>
+              </a:rPr>
+              <a:t>## visit_histories コレクション</a:t>
+            </a:r>
+          </a:p>
+          <a:p>
+            <a:pPr algn="l">
+              <a:lnSpc>
+                <a:spcPts val="2000"/>
+              </a:lnSpc>
+            </a:pPr>
+            <a:r>
+              <a:rPr sz="1300" b="0">
+                <a:solidFill>
+                  <a:srgbClr val="1A2B4A"/>
+                </a:solidFill>
+                <a:latin typeface="Noto Sans JP"/>
+              </a:rPr>
+              <a:t>・completedAt: 診察完了日時</a:t>
+            </a:r>
+          </a:p>
+          <a:p>
+            <a:pPr algn="l">
+              <a:lnSpc>
+                <a:spcPts val="2000"/>
+              </a:lnSpc>
+            </a:pPr>
+            <a:r>
+              <a:rPr sz="1300" b="0">
+                <a:solidFill>
+                  <a:srgbClr val="1A2B4A"/>
+                </a:solidFill>
+                <a:latin typeface="Noto Sans JP"/>
+              </a:rPr>
+              <a:t>・completedBy: 管理者UID</a:t>
+            </a:r>
+          </a:p>
+          <a:p>
+            <a:pPr algn="l">
+              <a:lnSpc>
+                <a:spcPts val="2000"/>
+              </a:lnSpc>
+            </a:pPr>
+            <a:r>
+              <a:rPr sz="1300" b="0">
+                <a:solidFill>
+                  <a:srgbClr val="1A2B4A"/>
+                </a:solidFill>
+                <a:latin typeface="Noto Sans JP"/>
+              </a:rPr>
+              <a:t>・予約全フィールドをコピー</a:t>
+            </a:r>
+          </a:p>
+          <a:p>
+            <a:pPr algn="l">
+              <a:lnSpc>
+                <a:spcPts val="2000"/>
+              </a:lnSpc>
+            </a:pPr>
+            <a:r>
+              <a:rPr sz="1300" b="0">
+                <a:solidFill>
+                  <a:srgbClr val="1A2B4A"/>
+                </a:solidFill>
+                <a:latin typeface="Noto Sans JP"/>
+              </a:rPr>
+              <a:t>・immutable Firestore ルール:</a:t>
+            </a:r>
+          </a:p>
+          <a:p>
+            <a:pPr algn="l">
+              <a:lnSpc>
+                <a:spcPts val="2000"/>
+              </a:lnSpc>
+            </a:pPr>
+            <a:r>
+              <a:rPr sz="1300" b="0">
+                <a:solidFill>
+                  <a:srgbClr val="1A2B4A"/>
+                </a:solidFill>
+                <a:latin typeface="Noto Sans JP"/>
+              </a:rPr>
+              <a:t>  管理者も update/delete 不可</a:t>
+            </a:r>
+          </a:p>
+          <a:p>
+            <a:pPr algn="l">
+              <a:lnSpc>
+                <a:spcPts val="2000"/>
+              </a:lnSpc>
+            </a:pPr>
+            <a:r>
+              <a:rPr sz="1300" b="0">
+                <a:solidFill>
+                  <a:srgbClr val="1A2B4A"/>
+                </a:solidFill>
+                <a:latin typeface="Noto Sans JP"/>
+              </a:rPr>
+              <a:t>  （CF のみ書き込み可）</a:t>
+            </a:r>
+          </a:p>
+          <a:p>
+            <a:pPr algn="l">
+              <a:lnSpc>
+                <a:spcPts val="2000"/>
+              </a:lnSpc>
+            </a:pPr>
+            <a:r>
+              <a:rPr sz="1300" b="0">
+                <a:solidFill>
+                  <a:srgbClr val="1A2B4A"/>
+                </a:solidFill>
+                <a:latin typeface="Noto Sans JP"/>
+              </a:rPr>
+              <a:t/>
+            </a:r>
+          </a:p>
+          <a:p>
+            <a:pPr algn="l">
+              <a:lnSpc>
+                <a:spcPts val="2000"/>
+              </a:lnSpc>
+            </a:pPr>
+            <a:r>
+              <a:rPr sz="1300" b="0">
+                <a:solidFill>
+                  <a:srgbClr val="1A2B4A"/>
+                </a:solidFill>
+                <a:latin typeface="Noto Sans JP"/>
+              </a:rPr>
+              <a:t>## 診察履歴ページ</a:t>
+            </a:r>
+          </a:p>
+          <a:p>
+            <a:pPr algn="l">
+              <a:lnSpc>
+                <a:spcPts val="2000"/>
+              </a:lnSpc>
+            </a:pPr>
+            <a:r>
+              <a:rPr sz="1300" b="0">
+                <a:solidFill>
+                  <a:srgbClr val="1A2B4A"/>
+                </a:solidFill>
+                <a:latin typeface="Noto Sans JP"/>
+              </a:rPr>
+              <a:t>・/admin/history</a:t>
+            </a:r>
+          </a:p>
+          <a:p>
+            <a:pPr algn="l">
+              <a:lnSpc>
+                <a:spcPts val="2000"/>
+              </a:lnSpc>
+            </a:pPr>
+            <a:r>
+              <a:rPr sz="1300" b="0">
+                <a:solidFill>
+                  <a:srgbClr val="1A2B4A"/>
+                </a:solidFill>
+                <a:latin typeface="Noto Sans JP"/>
+              </a:rPr>
+              <a:t>・検索・ページネーション（20件）</a:t>
+            </a:r>
+          </a:p>
+          <a:p>
+            <a:pPr algn="l">
+              <a:lnSpc>
+                <a:spcPts val="2000"/>
+              </a:lnSpc>
+            </a:pPr>
+            <a:r>
+              <a:rPr sz="1300" b="0">
+                <a:solidFill>
+                  <a:srgbClr val="1A2B4A"/>
+                </a:solidFill>
+                <a:latin typeface="Noto Sans JP"/>
+              </a:rPr>
+              <a:t>・CSV 出力</a:t>
+            </a:r>
+          </a:p>
+          <a:p>
+            <a:pPr algn="l">
+              <a:lnSpc>
+                <a:spcPts val="2000"/>
+              </a:lnSpc>
+            </a:pPr>
+            <a:r>
+              <a:rPr sz="1300" b="0">
+                <a:solidFill>
+                  <a:srgbClr val="1A2B4A"/>
+                </a:solidFill>
+                <a:latin typeface="Noto Sans JP"/>
+              </a:rPr>
+              <a:t>・詳細モーダル</a:t>
+            </a:r>
+          </a:p>
+        </p:txBody>
+      </p:sp>
+      <p:sp>
+        <p:nvSpPr>
+          <p:cNvPr id="10" name="Rectangle 9"/>
+          <p:cNvSpPr/>
+          <p:nvPr/>
+        </p:nvSpPr>
+        <p:spPr>
+          <a:xfrm>
+            <a:off x="6217920" y="1005840"/>
+            <a:ext cx="5394960" cy="5303520"/>
+          </a:xfrm>
+          <a:prstGeom prst="rect">
+            <a:avLst/>
+          </a:prstGeom>
+          <a:solidFill>
+            <a:srgbClr val="F8F5EE"/>
+          </a:solidFill>
+          <a:ln>
+            <a:noFill/>
+          </a:ln>
+        </p:spPr>
+        <p:style>
+          <a:lnRef idx="1">
+            <a:schemeClr val="accent1"/>
+          </a:lnRef>
+          <a:fillRef idx="3">
+            <a:schemeClr val="accent1"/>
+          </a:fillRef>
+          <a:effectRef idx="2">
+            <a:schemeClr val="accent1"/>
+          </a:effectRef>
+          <a:fontRef idx="minor">
+            <a:schemeClr val="lt1"/>
+          </a:fontRef>
+        </p:style>
+        <p:txBody>
+          <a:bodyPr rtlCol="0" anchor="ctr"/>
+          <a:lstStyle/>
+          <a:p>
+            <a:pPr algn="ctr"/>
+          </a:p>
+        </p:txBody>
+      </p:sp>
+      <p:sp>
+        <p:nvSpPr>
+          <p:cNvPr id="11" name="Rectangle 10"/>
+          <p:cNvSpPr/>
+          <p:nvPr/>
+        </p:nvSpPr>
+        <p:spPr>
+          <a:xfrm>
+            <a:off x="6217920" y="1005840"/>
+            <a:ext cx="5394960" cy="502920"/>
+          </a:xfrm>
+          <a:prstGeom prst="rect">
+            <a:avLst/>
+          </a:prstGeom>
+          <a:solidFill>
+            <a:srgbClr val="1A2B4A"/>
+          </a:solidFill>
+          <a:ln>
+            <a:noFill/>
+          </a:ln>
+        </p:spPr>
+        <p:style>
+          <a:lnRef idx="1">
+            <a:schemeClr val="accent1"/>
+          </a:lnRef>
+          <a:fillRef idx="3">
+            <a:schemeClr val="accent1"/>
+          </a:fillRef>
+          <a:effectRef idx="2">
+            <a:schemeClr val="accent1"/>
+          </a:effectRef>
+          <a:fontRef idx="minor">
+            <a:schemeClr val="lt1"/>
+          </a:fontRef>
+        </p:style>
+        <p:txBody>
+          <a:bodyPr rtlCol="0" anchor="ctr"/>
+          <a:lstStyle/>
+          <a:p>
+            <a:pPr algn="ctr"/>
+          </a:p>
+        </p:txBody>
+      </p:sp>
+      <p:sp>
+        <p:nvSpPr>
+          <p:cNvPr id="12" name="TextBox 11"/>
+          <p:cNvSpPr txBox="1"/>
+          <p:nvPr/>
+        </p:nvSpPr>
+        <p:spPr>
+          <a:xfrm>
+            <a:off x="6309360" y="1051560"/>
+            <a:ext cx="5212080" cy="457200"/>
+          </a:xfrm>
+          <a:prstGeom prst="rect">
+            <a:avLst/>
+          </a:prstGeom>
+          <a:noFill/>
+        </p:spPr>
+        <p:txBody>
+          <a:bodyPr wrap="square">
+            <a:spAutoFit/>
+          </a:bodyPr>
+          <a:lstStyle/>
+          <a:p>
+            <a:pPr algn="l"/>
+            <a:r>
+              <a:rPr sz="1500" b="1">
+                <a:solidFill>
+                  <a:srgbClr val="FFFFFF"/>
+                </a:solidFill>
+                <a:latin typeface="Noto Sans JP"/>
+              </a:rPr>
+              <a:t>APPI 訂正権（第34条）</a:t>
+            </a:r>
+          </a:p>
+        </p:txBody>
+      </p:sp>
+      <p:sp>
+        <p:nvSpPr>
+          <p:cNvPr id="13" name="TextBox 12"/>
+          <p:cNvSpPr txBox="1"/>
+          <p:nvPr/>
+        </p:nvSpPr>
+        <p:spPr>
+          <a:xfrm>
+            <a:off x="6355080" y="1600200"/>
+            <a:ext cx="5120640" cy="4617720"/>
+          </a:xfrm>
+          <a:prstGeom prst="rect">
+            <a:avLst/>
+          </a:prstGeom>
+          <a:noFill/>
+        </p:spPr>
+        <p:txBody>
+          <a:bodyPr wrap="square">
+            <a:spAutoFit/>
+          </a:bodyPr>
+          <a:lstStyle/>
+          <a:p>
+            <a:pPr algn="l">
+              <a:lnSpc>
+                <a:spcPts val="2000"/>
+              </a:lnSpc>
+            </a:pPr>
+            <a:r>
+              <a:rPr sz="1300" b="0">
+                <a:solidFill>
+                  <a:srgbClr val="1A2B4A"/>
+                </a:solidFill>
+                <a:latin typeface="Noto Sans JP"/>
+              </a:rPr>
+              <a:t>## correctVisitHistory CF</a:t>
+            </a:r>
+          </a:p>
+          <a:p>
+            <a:pPr algn="l">
+              <a:lnSpc>
+                <a:spcPts val="2000"/>
+              </a:lnSpc>
+            </a:pPr>
+            <a:r>
+              <a:rPr sz="1300" b="0">
+                <a:solidFill>
+                  <a:srgbClr val="1A2B4A"/>
+                </a:solidFill>
+                <a:latin typeface="Noto Sans JP"/>
+              </a:rPr>
+              <a:t>・admin クレーム必須</a:t>
+            </a:r>
+          </a:p>
+          <a:p>
+            <a:pPr algn="l">
+              <a:lnSpc>
+                <a:spcPts val="2000"/>
+              </a:lnSpc>
+            </a:pPr>
+            <a:r>
+              <a:rPr sz="1300" b="0">
+                <a:solidFill>
+                  <a:srgbClr val="1A2B4A"/>
+                </a:solidFill>
+                <a:latin typeface="Noto Sans JP"/>
+              </a:rPr>
+              <a:t>・訂正理由必須入力</a:t>
+            </a:r>
+          </a:p>
+          <a:p>
+            <a:pPr algn="l">
+              <a:lnSpc>
+                <a:spcPts val="2000"/>
+              </a:lnSpc>
+            </a:pPr>
+            <a:r>
+              <a:rPr sz="1300" b="0">
+                <a:solidFill>
+                  <a:srgbClr val="1A2B4A"/>
+                </a:solidFill>
+                <a:latin typeface="Noto Sans JP"/>
+              </a:rPr>
+              <a:t>・corrections サブコレクション</a:t>
+            </a:r>
+          </a:p>
+          <a:p>
+            <a:pPr algn="l">
+              <a:lnSpc>
+                <a:spcPts val="2000"/>
+              </a:lnSpc>
+            </a:pPr>
+            <a:r>
+              <a:rPr sz="1300" b="0">
+                <a:solidFill>
+                  <a:srgbClr val="1A2B4A"/>
+                </a:solidFill>
+                <a:latin typeface="Noto Sans JP"/>
+              </a:rPr>
+              <a:t>  に immutable 追記</a:t>
+            </a:r>
+          </a:p>
+          <a:p>
+            <a:pPr algn="l">
+              <a:lnSpc>
+                <a:spcPts val="2000"/>
+              </a:lnSpc>
+            </a:pPr>
+            <a:r>
+              <a:rPr sz="1300" b="0">
+                <a:solidFill>
+                  <a:srgbClr val="1A2B4A"/>
+                </a:solidFill>
+                <a:latin typeface="Noto Sans JP"/>
+              </a:rPr>
+              <a:t>  （元レコードは更新しない）</a:t>
+            </a:r>
+          </a:p>
+          <a:p>
+            <a:pPr algn="l">
+              <a:lnSpc>
+                <a:spcPts val="2000"/>
+              </a:lnSpc>
+            </a:pPr>
+            <a:r>
+              <a:rPr sz="1300" b="0">
+                <a:solidFill>
+                  <a:srgbClr val="1A2B4A"/>
+                </a:solidFill>
+                <a:latin typeface="Noto Sans JP"/>
+              </a:rPr>
+              <a:t/>
+            </a:r>
+          </a:p>
+          <a:p>
+            <a:pPr algn="l">
+              <a:lnSpc>
+                <a:spcPts val="2000"/>
+              </a:lnSpc>
+            </a:pPr>
+            <a:r>
+              <a:rPr sz="1300" b="0">
+                <a:solidFill>
+                  <a:srgbClr val="1A2B4A"/>
+                </a:solidFill>
+                <a:latin typeface="Noto Sans JP"/>
+              </a:rPr>
+              <a:t>## 訂正可能フィールド</a:t>
+            </a:r>
+          </a:p>
+          <a:p>
+            <a:pPr algn="l">
+              <a:lnSpc>
+                <a:spcPts val="2000"/>
+              </a:lnSpc>
+            </a:pPr>
+            <a:r>
+              <a:rPr sz="1300" b="0">
+                <a:solidFill>
+                  <a:srgbClr val="1A2B4A"/>
+                </a:solidFill>
+                <a:latin typeface="Noto Sans JP"/>
+              </a:rPr>
+              <a:t>・氏名 / ふりがな</a:t>
+            </a:r>
+          </a:p>
+          <a:p>
+            <a:pPr algn="l">
+              <a:lnSpc>
+                <a:spcPts val="2000"/>
+              </a:lnSpc>
+            </a:pPr>
+            <a:r>
+              <a:rPr sz="1300" b="0">
+                <a:solidFill>
+                  <a:srgbClr val="1A2B4A"/>
+                </a:solidFill>
+                <a:latin typeface="Noto Sans JP"/>
+              </a:rPr>
+              <a:t>・生年月日 / 郵便番号</a:t>
+            </a:r>
+          </a:p>
+          <a:p>
+            <a:pPr algn="l">
+              <a:lnSpc>
+                <a:spcPts val="2000"/>
+              </a:lnSpc>
+            </a:pPr>
+            <a:r>
+              <a:rPr sz="1300" b="0">
+                <a:solidFill>
+                  <a:srgbClr val="1A2B4A"/>
+                </a:solidFill>
+                <a:latin typeface="Noto Sans JP"/>
+              </a:rPr>
+              <a:t>・住所 / 電話番号 / メール</a:t>
+            </a:r>
+          </a:p>
+          <a:p>
+            <a:pPr algn="l">
+              <a:lnSpc>
+                <a:spcPts val="2000"/>
+              </a:lnSpc>
+            </a:pPr>
+            <a:r>
+              <a:rPr sz="1300" b="0">
+                <a:solidFill>
+                  <a:srgbClr val="1A2B4A"/>
+                </a:solidFill>
+                <a:latin typeface="Noto Sans JP"/>
+              </a:rPr>
+              <a:t>・初診/再診 / 保険証</a:t>
+            </a:r>
+          </a:p>
+          <a:p>
+            <a:pPr algn="l">
+              <a:lnSpc>
+                <a:spcPts val="2000"/>
+              </a:lnSpc>
+            </a:pPr>
+            <a:r>
+              <a:rPr sz="1300" b="0">
+                <a:solidFill>
+                  <a:srgbClr val="1A2B4A"/>
+                </a:solidFill>
+                <a:latin typeface="Noto Sans JP"/>
+              </a:rPr>
+              <a:t>・性別</a:t>
+            </a:r>
+          </a:p>
+          <a:p>
+            <a:pPr algn="l">
+              <a:lnSpc>
+                <a:spcPts val="2000"/>
+              </a:lnSpc>
+            </a:pPr>
+            <a:r>
+              <a:rPr sz="1300" b="0">
+                <a:solidFill>
+                  <a:srgbClr val="1A2B4A"/>
+                </a:solidFill>
+                <a:latin typeface="Noto Sans JP"/>
+              </a:rPr>
+              <a:t/>
+            </a:r>
+          </a:p>
+          <a:p>
+            <a:pPr algn="l">
+              <a:lnSpc>
+                <a:spcPts val="2000"/>
+              </a:lnSpc>
+            </a:pPr>
+            <a:r>
+              <a:rPr sz="1300" b="0">
+                <a:solidFill>
+                  <a:srgbClr val="1A2B4A"/>
+                </a:solidFill>
+                <a:latin typeface="Noto Sans JP"/>
+              </a:rPr>
+              <a:t>## 訂正不可フィールド</a:t>
+            </a:r>
+          </a:p>
+          <a:p>
+            <a:pPr algn="l">
+              <a:lnSpc>
+                <a:spcPts val="2000"/>
+              </a:lnSpc>
+            </a:pPr>
+            <a:r>
+              <a:rPr sz="1300" b="0">
+                <a:solidFill>
+                  <a:srgbClr val="1A2B4A"/>
+                </a:solidFill>
+                <a:latin typeface="Noto Sans JP"/>
+              </a:rPr>
+              <a:t>・症状（施術者判断記録）</a:t>
+            </a:r>
+          </a:p>
+          <a:p>
+            <a:pPr algn="l">
+              <a:lnSpc>
+                <a:spcPts val="2000"/>
+              </a:lnSpc>
+            </a:pPr>
+            <a:r>
+              <a:rPr sz="1300" b="0">
+                <a:solidFill>
+                  <a:srgbClr val="1A2B4A"/>
+                </a:solidFill>
+                <a:latin typeface="Noto Sans JP"/>
+              </a:rPr>
+              <a:t>・診察日時 / 完了者</a:t>
+            </a:r>
+          </a:p>
+          <a:p>
+            <a:pPr algn="l">
+              <a:lnSpc>
+                <a:spcPts val="2000"/>
+              </a:lnSpc>
+            </a:pPr>
+            <a:r>
+              <a:rPr sz="1300" b="0">
+                <a:solidFill>
+                  <a:srgbClr val="1A2B4A"/>
+                </a:solidFill>
+                <a:latin typeface="Noto Sans JP"/>
+              </a:rPr>
+              <a:t>・伝達事項</a:t>
+            </a:r>
+          </a:p>
+          <a:p>
+            <a:pPr algn="l">
+              <a:lnSpc>
+                <a:spcPts val="2000"/>
+              </a:lnSpc>
+            </a:pPr>
+            <a:r>
+              <a:rPr sz="1300" b="0">
+                <a:solidFill>
+                  <a:srgbClr val="1A2B4A"/>
+                </a:solidFill>
+                <a:latin typeface="Noto Sans JP"/>
+              </a:rPr>
+              <a:t/>
+            </a:r>
+          </a:p>
+          <a:p>
+            <a:pPr algn="l">
+              <a:lnSpc>
+                <a:spcPts val="2000"/>
+              </a:lnSpc>
+            </a:pPr>
+            <a:r>
+              <a:rPr sz="1300" b="0">
+                <a:solidFill>
+                  <a:srgbClr val="1A2B4A"/>
+                </a:solidFill>
+                <a:latin typeface="Noto Sans JP"/>
+              </a:rPr>
+              <a:t>## 追記（addendum）</a:t>
+            </a:r>
+          </a:p>
+          <a:p>
+            <a:pPr algn="l">
+              <a:lnSpc>
+                <a:spcPts val="2000"/>
+              </a:lnSpc>
+            </a:pPr>
+            <a:r>
+              <a:rPr sz="1300" b="0">
+                <a:solidFill>
+                  <a:srgbClr val="1A2B4A"/>
+                </a:solidFill>
+                <a:latin typeface="Noto Sans JP"/>
+              </a:rPr>
+              <a:t>・症状等は直接訂正不可</a:t>
+            </a:r>
+          </a:p>
+          <a:p>
+            <a:pPr algn="l">
+              <a:lnSpc>
+                <a:spcPts val="2000"/>
+              </a:lnSpc>
+            </a:pPr>
+            <a:r>
+              <a:rPr sz="1300" b="0">
+                <a:solidFill>
+                  <a:srgbClr val="1A2B4A"/>
+                </a:solidFill>
+                <a:latin typeface="Noto Sans JP"/>
+              </a:rPr>
+              <a:t>・addendum フィールドで</a:t>
+            </a:r>
+          </a:p>
+          <a:p>
+            <a:pPr algn="l">
+              <a:lnSpc>
+                <a:spcPts val="2000"/>
+              </a:lnSpc>
+            </a:pPr>
+            <a:r>
+              <a:rPr sz="1300" b="0">
+                <a:solidFill>
+                  <a:srgbClr val="1A2B4A"/>
+                </a:solidFill>
+                <a:latin typeface="Noto Sans JP"/>
+              </a:rPr>
+              <a:t>  事実誤記の補足説明可能</a:t>
+            </a:r>
+          </a:p>
+          <a:p>
+            <a:pPr algn="l">
+              <a:lnSpc>
+                <a:spcPts val="2000"/>
+              </a:lnSpc>
+            </a:pPr>
+            <a:r>
+              <a:rPr sz="1300" b="0">
+                <a:solidFill>
+                  <a:srgbClr val="1A2B4A"/>
+                </a:solidFill>
+                <a:latin typeface="Noto Sans JP"/>
+              </a:rPr>
+              <a:t/>
+            </a:r>
+          </a:p>
+          <a:p>
+            <a:pPr algn="l">
+              <a:lnSpc>
+                <a:spcPts val="2000"/>
+              </a:lnSpc>
+            </a:pPr>
+            <a:r>
+              <a:rPr sz="1300" b="0">
+                <a:solidFill>
+                  <a:srgbClr val="1A2B4A"/>
+                </a:solidFill>
+                <a:latin typeface="Noto Sans JP"/>
+              </a:rPr>
+              <a:t>## 通知</a:t>
+            </a:r>
+          </a:p>
+          <a:p>
+            <a:pPr algn="l">
+              <a:lnSpc>
+                <a:spcPts val="2000"/>
+              </a:lnSpc>
+            </a:pPr>
+            <a:r>
+              <a:rPr sz="1300" b="0">
+                <a:solidFill>
+                  <a:srgbClr val="1A2B4A"/>
+                </a:solidFill>
+                <a:latin typeface="Noto Sans JP"/>
+              </a:rPr>
+              <a:t>・患者メールアドレスがあれば</a:t>
+            </a:r>
+          </a:p>
+          <a:p>
+            <a:pPr algn="l">
+              <a:lnSpc>
+                <a:spcPts val="2000"/>
+              </a:lnSpc>
+            </a:pPr>
+            <a:r>
+              <a:rPr sz="1300" b="0">
+                <a:solidFill>
+                  <a:srgbClr val="1A2B4A"/>
+                </a:solidFill>
+                <a:latin typeface="Noto Sans JP"/>
+              </a:rPr>
+              <a:t>  訂正完了メール送信</a:t>
+            </a:r>
+          </a:p>
+          <a:p>
+            <a:pPr algn="l">
+              <a:lnSpc>
+                <a:spcPts val="2000"/>
+              </a:lnSpc>
+            </a:pPr>
+            <a:r>
+              <a:rPr sz="1300" b="0">
+                <a:solidFill>
+                  <a:srgbClr val="1A2B4A"/>
+                </a:solidFill>
+                <a:latin typeface="Noto Sans JP"/>
+              </a:rPr>
+              <a:t>・未登録時は手動通知を促す</a:t>
+            </a:r>
+          </a:p>
+        </p:txBody>
+      </p:sp>
+    </p:spTree>
+  </p:cSld>
+  <p:clrMapOvr>
+    <a:masterClrMapping/>
+  </p:clrMapOvr>
+</p:sld>
+</file>
+
+<file path=ppt/slides/slide25.xml><?xml version="1.0" encoding="utf-8"?>
+<p:sld xmlns:a="http://schemas.openxmlformats.org/drawingml/2006/main" xmlns:p="http://schemas.openxmlformats.org/presentationml/2006/main" xmlns:r="http://schemas.openxmlformats.org/officeDocument/2006/relationships">
+  <p:cSld>
+    <p:spTree>
+      <p:nvGrpSpPr>
+        <p:cNvPr id="1" name=""/>
+        <p:cNvGrpSpPr/>
+        <p:nvPr/>
+      </p:nvGrpSpPr>
+      <p:grpSpPr/>
+      <p:sp>
+        <p:nvSpPr>
+          <p:cNvPr id="2" name="Rectangle 1"/>
+          <p:cNvSpPr/>
+          <p:nvPr/>
+        </p:nvSpPr>
+        <p:spPr>
+          <a:xfrm>
+            <a:off x="0" y="0"/>
+            <a:ext cx="12188952" cy="6858000"/>
+          </a:xfrm>
+          <a:prstGeom prst="rect">
+            <a:avLst/>
+          </a:prstGeom>
+          <a:solidFill>
+            <a:srgbClr val="F8F5EE"/>
+          </a:solidFill>
+          <a:ln>
+            <a:noFill/>
+          </a:ln>
+        </p:spPr>
+        <p:style>
+          <a:lnRef idx="1">
+            <a:schemeClr val="accent1"/>
+          </a:lnRef>
+          <a:fillRef idx="3">
+            <a:schemeClr val="accent1"/>
+          </a:fillRef>
+          <a:effectRef idx="2">
+            <a:schemeClr val="accent1"/>
+          </a:effectRef>
+          <a:fontRef idx="minor">
+            <a:schemeClr val="lt1"/>
+          </a:fontRef>
+        </p:style>
+        <p:txBody>
+          <a:bodyPr rtlCol="0" anchor="ctr"/>
+          <a:lstStyle/>
+          <a:p>
+            <a:pPr algn="ctr"/>
+          </a:p>
+        </p:txBody>
+      </p:sp>
+      <p:sp>
+        <p:nvSpPr>
+          <p:cNvPr id="3" name="Rectangle 2"/>
+          <p:cNvSpPr/>
+          <p:nvPr/>
+        </p:nvSpPr>
+        <p:spPr>
+          <a:xfrm>
+            <a:off x="0" y="0"/>
+            <a:ext cx="12188952" cy="822960"/>
+          </a:xfrm>
+          <a:prstGeom prst="rect">
+            <a:avLst/>
+          </a:prstGeom>
+          <a:solidFill>
+            <a:srgbClr val="1A2B4A"/>
+          </a:solidFill>
+          <a:ln>
+            <a:noFill/>
+          </a:ln>
+        </p:spPr>
+        <p:style>
+          <a:lnRef idx="1">
+            <a:schemeClr val="accent1"/>
+          </a:lnRef>
+          <a:fillRef idx="3">
+            <a:schemeClr val="accent1"/>
+          </a:fillRef>
+          <a:effectRef idx="2">
+            <a:schemeClr val="accent1"/>
+          </a:effectRef>
+          <a:fontRef idx="minor">
+            <a:schemeClr val="lt1"/>
+          </a:fontRef>
+        </p:style>
+        <p:txBody>
+          <a:bodyPr rtlCol="0" anchor="ctr"/>
+          <a:lstStyle/>
+          <a:p>
+            <a:pPr algn="ctr"/>
+          </a:p>
+        </p:txBody>
+      </p:sp>
+      <p:sp>
+        <p:nvSpPr>
+          <p:cNvPr id="4" name="TextBox 3"/>
+          <p:cNvSpPr txBox="1"/>
+          <p:nvPr/>
+        </p:nvSpPr>
+        <p:spPr>
+          <a:xfrm>
+            <a:off x="365760" y="91440"/>
+            <a:ext cx="9144000" cy="685800"/>
+          </a:xfrm>
+          <a:prstGeom prst="rect">
+            <a:avLst/>
+          </a:prstGeom>
+          <a:noFill/>
+        </p:spPr>
+        <p:txBody>
+          <a:bodyPr wrap="square">
+            <a:spAutoFit/>
+          </a:bodyPr>
+          <a:lstStyle/>
+          <a:p>
+            <a:pPr algn="l"/>
+            <a:r>
+              <a:rPr sz="2600" b="1">
+                <a:solidFill>
+                  <a:srgbClr val="FFFFFF"/>
+                </a:solidFill>
+                <a:latin typeface="Noto Sans JP"/>
+              </a:rPr>
+              <a:t>アクセスログ・リマインダーopt-out</a:t>
+            </a:r>
+          </a:p>
+        </p:txBody>
+      </p:sp>
+      <p:sp>
+        <p:nvSpPr>
+          <p:cNvPr id="5" name="Rectangle 4"/>
+          <p:cNvSpPr/>
+          <p:nvPr/>
+        </p:nvSpPr>
+        <p:spPr>
+          <a:xfrm>
+            <a:off x="10332720" y="182880"/>
+            <a:ext cx="1645920" cy="457200"/>
+          </a:xfrm>
+          <a:prstGeom prst="rect">
+            <a:avLst/>
+          </a:prstGeom>
+          <a:solidFill>
+            <a:srgbClr val="D4AF37"/>
+          </a:solidFill>
+          <a:ln>
+            <a:noFill/>
+          </a:ln>
+        </p:spPr>
+        <p:style>
+          <a:lnRef idx="1">
+            <a:schemeClr val="accent1"/>
+          </a:lnRef>
+          <a:fillRef idx="3">
+            <a:schemeClr val="accent1"/>
+          </a:fillRef>
+          <a:effectRef idx="2">
+            <a:schemeClr val="accent1"/>
+          </a:effectRef>
+          <a:fontRef idx="minor">
+            <a:schemeClr val="lt1"/>
+          </a:fontRef>
+        </p:style>
+        <p:txBody>
+          <a:bodyPr rtlCol="0" anchor="ctr"/>
+          <a:lstStyle/>
+          <a:p>
+            <a:pPr algn="ctr"/>
+            <a:r>
+              <a:rPr sz="1200" b="1">
+                <a:solidFill>
+                  <a:srgbClr val="1A2B4A"/>
+                </a:solidFill>
+                <a:latin typeface="Noto Sans JP"/>
+              </a:rPr>
+              <a:t>新機能</a:t>
+            </a:r>
+          </a:p>
+        </p:txBody>
+      </p:sp>
+      <p:sp>
+        <p:nvSpPr>
+          <p:cNvPr id="6" name="Rectangle 5"/>
+          <p:cNvSpPr/>
+          <p:nvPr/>
+        </p:nvSpPr>
+        <p:spPr>
+          <a:xfrm>
+            <a:off x="457200" y="1005840"/>
+            <a:ext cx="5394960" cy="5303520"/>
+          </a:xfrm>
+          <a:prstGeom prst="rect">
+            <a:avLst/>
+          </a:prstGeom>
+          <a:solidFill>
+            <a:srgbClr val="F8F5EE"/>
+          </a:solidFill>
+          <a:ln>
+            <a:noFill/>
+          </a:ln>
+        </p:spPr>
+        <p:style>
+          <a:lnRef idx="1">
+            <a:schemeClr val="accent1"/>
+          </a:lnRef>
+          <a:fillRef idx="3">
+            <a:schemeClr val="accent1"/>
+          </a:fillRef>
+          <a:effectRef idx="2">
+            <a:schemeClr val="accent1"/>
+          </a:effectRef>
+          <a:fontRef idx="minor">
+            <a:schemeClr val="lt1"/>
+          </a:fontRef>
+        </p:style>
+        <p:txBody>
+          <a:bodyPr rtlCol="0" anchor="ctr"/>
+          <a:lstStyle/>
+          <a:p>
+            <a:pPr algn="ctr"/>
+          </a:p>
+        </p:txBody>
+      </p:sp>
+      <p:sp>
+        <p:nvSpPr>
+          <p:cNvPr id="7" name="Rectangle 6"/>
+          <p:cNvSpPr/>
+          <p:nvPr/>
+        </p:nvSpPr>
+        <p:spPr>
+          <a:xfrm>
+            <a:off x="457200" y="1005840"/>
+            <a:ext cx="5394960" cy="502920"/>
+          </a:xfrm>
+          <a:prstGeom prst="rect">
+            <a:avLst/>
+          </a:prstGeom>
+          <a:solidFill>
+            <a:srgbClr val="1A2B4A"/>
+          </a:solidFill>
+          <a:ln>
+            <a:noFill/>
+          </a:ln>
+        </p:spPr>
+        <p:style>
+          <a:lnRef idx="1">
+            <a:schemeClr val="accent1"/>
+          </a:lnRef>
+          <a:fillRef idx="3">
+            <a:schemeClr val="accent1"/>
+          </a:fillRef>
+          <a:effectRef idx="2">
+            <a:schemeClr val="accent1"/>
+          </a:effectRef>
+          <a:fontRef idx="minor">
+            <a:schemeClr val="lt1"/>
+          </a:fontRef>
+        </p:style>
+        <p:txBody>
+          <a:bodyPr rtlCol="0" anchor="ctr"/>
+          <a:lstStyle/>
+          <a:p>
+            <a:pPr algn="ctr"/>
+          </a:p>
+        </p:txBody>
+      </p:sp>
+      <p:sp>
+        <p:nvSpPr>
+          <p:cNvPr id="8" name="TextBox 7"/>
+          <p:cNvSpPr txBox="1"/>
+          <p:nvPr/>
+        </p:nvSpPr>
+        <p:spPr>
+          <a:xfrm>
+            <a:off x="548640" y="1051560"/>
+            <a:ext cx="5212080" cy="457200"/>
+          </a:xfrm>
+          <a:prstGeom prst="rect">
+            <a:avLst/>
+          </a:prstGeom>
+          <a:noFill/>
+        </p:spPr>
+        <p:txBody>
+          <a:bodyPr wrap="square">
+            <a:spAutoFit/>
+          </a:bodyPr>
+          <a:lstStyle/>
+          <a:p>
+            <a:pPr algn="l"/>
+            <a:r>
+              <a:rPr sz="1500" b="1">
+                <a:solidFill>
+                  <a:srgbClr val="FFFFFF"/>
+                </a:solidFill>
+                <a:latin typeface="Noto Sans JP"/>
+              </a:rPr>
+              <a:t>アクセスログ（logAccess）</a:t>
+            </a:r>
+          </a:p>
+        </p:txBody>
+      </p:sp>
+      <p:sp>
+        <p:nvSpPr>
+          <p:cNvPr id="9" name="TextBox 8"/>
+          <p:cNvSpPr txBox="1"/>
+          <p:nvPr/>
+        </p:nvSpPr>
+        <p:spPr>
+          <a:xfrm>
+            <a:off x="594360" y="1600200"/>
+            <a:ext cx="5120640" cy="4617720"/>
+          </a:xfrm>
+          <a:prstGeom prst="rect">
+            <a:avLst/>
+          </a:prstGeom>
+          <a:noFill/>
+        </p:spPr>
+        <p:txBody>
+          <a:bodyPr wrap="square">
+            <a:spAutoFit/>
+          </a:bodyPr>
+          <a:lstStyle/>
+          <a:p>
+            <a:pPr algn="l">
+              <a:lnSpc>
+                <a:spcPts val="2000"/>
+              </a:lnSpc>
+            </a:pPr>
+            <a:r>
+              <a:rPr sz="1300" b="0">
+                <a:solidFill>
+                  <a:srgbClr val="1A2B4A"/>
+                </a:solidFill>
+                <a:latin typeface="Noto Sans JP"/>
+              </a:rPr>
+              <a:t>## 目的</a:t>
+            </a:r>
+          </a:p>
+          <a:p>
+            <a:pPr algn="l">
+              <a:lnSpc>
+                <a:spcPts val="2000"/>
+              </a:lnSpc>
+            </a:pPr>
+            <a:r>
+              <a:rPr sz="1300" b="0">
+                <a:solidFill>
+                  <a:srgbClr val="1A2B4A"/>
+                </a:solidFill>
+                <a:latin typeface="Noto Sans JP"/>
+              </a:rPr>
+              <a:t>・個人情報アクセスの証跡管理</a:t>
+            </a:r>
+          </a:p>
+          <a:p>
+            <a:pPr algn="l">
+              <a:lnSpc>
+                <a:spcPts val="2000"/>
+              </a:lnSpc>
+            </a:pPr>
+            <a:r>
+              <a:rPr sz="1300" b="0">
+                <a:solidFill>
+                  <a:srgbClr val="1A2B4A"/>
+                </a:solidFill>
+                <a:latin typeface="Noto Sans JP"/>
+              </a:rPr>
+              <a:t>・APPI 対応・内部統制</a:t>
+            </a:r>
+          </a:p>
+          <a:p>
+            <a:pPr algn="l">
+              <a:lnSpc>
+                <a:spcPts val="2000"/>
+              </a:lnSpc>
+            </a:pPr>
+            <a:r>
+              <a:rPr sz="1300" b="0">
+                <a:solidFill>
+                  <a:srgbClr val="1A2B4A"/>
+                </a:solidFill>
+                <a:latin typeface="Noto Sans JP"/>
+              </a:rPr>
+              <a:t/>
+            </a:r>
+          </a:p>
+          <a:p>
+            <a:pPr algn="l">
+              <a:lnSpc>
+                <a:spcPts val="2000"/>
+              </a:lnSpc>
+            </a:pPr>
+            <a:r>
+              <a:rPr sz="1300" b="0">
+                <a:solidFill>
+                  <a:srgbClr val="1A2B4A"/>
+                </a:solidFill>
+                <a:latin typeface="Noto Sans JP"/>
+              </a:rPr>
+              <a:t>## ログ記録タイミング</a:t>
+            </a:r>
+          </a:p>
+          <a:p>
+            <a:pPr algn="l">
+              <a:lnSpc>
+                <a:spcPts val="2000"/>
+              </a:lnSpc>
+            </a:pPr>
+            <a:r>
+              <a:rPr sz="1300" b="0">
+                <a:solidFill>
+                  <a:srgbClr val="1A2B4A"/>
+                </a:solidFill>
+                <a:latin typeface="Noto Sans JP"/>
+              </a:rPr>
+              <a:t>・詳細モーダル閲覧</a:t>
+            </a:r>
+          </a:p>
+          <a:p>
+            <a:pPr algn="l">
+              <a:lnSpc>
+                <a:spcPts val="2000"/>
+              </a:lnSpc>
+            </a:pPr>
+            <a:r>
+              <a:rPr sz="1300" b="0">
+                <a:solidFill>
+                  <a:srgbClr val="1A2B4A"/>
+                </a:solidFill>
+                <a:latin typeface="Noto Sans JP"/>
+              </a:rPr>
+              <a:t>  action: view_reservation</a:t>
+            </a:r>
+          </a:p>
+          <a:p>
+            <a:pPr algn="l">
+              <a:lnSpc>
+                <a:spcPts val="2000"/>
+              </a:lnSpc>
+            </a:pPr>
+            <a:r>
+              <a:rPr sz="1300" b="0">
+                <a:solidFill>
+                  <a:srgbClr val="1A2B4A"/>
+                </a:solidFill>
+                <a:latin typeface="Noto Sans JP"/>
+              </a:rPr>
+              <a:t>  targetId: reservationId</a:t>
+            </a:r>
+          </a:p>
+          <a:p>
+            <a:pPr algn="l">
+              <a:lnSpc>
+                <a:spcPts val="2000"/>
+              </a:lnSpc>
+            </a:pPr>
+            <a:r>
+              <a:rPr sz="1300" b="0">
+                <a:solidFill>
+                  <a:srgbClr val="1A2B4A"/>
+                </a:solidFill>
+                <a:latin typeface="Noto Sans JP"/>
+              </a:rPr>
+              <a:t>  data: { patientName }</a:t>
+            </a:r>
+          </a:p>
+          <a:p>
+            <a:pPr algn="l">
+              <a:lnSpc>
+                <a:spcPts val="2000"/>
+              </a:lnSpc>
+            </a:pPr>
+            <a:r>
+              <a:rPr sz="1300" b="0">
+                <a:solidFill>
+                  <a:srgbClr val="1A2B4A"/>
+                </a:solidFill>
+                <a:latin typeface="Noto Sans JP"/>
+              </a:rPr>
+              <a:t/>
+            </a:r>
+          </a:p>
+          <a:p>
+            <a:pPr algn="l">
+              <a:lnSpc>
+                <a:spcPts val="2000"/>
+              </a:lnSpc>
+            </a:pPr>
+            <a:r>
+              <a:rPr sz="1300" b="0">
+                <a:solidFill>
+                  <a:srgbClr val="1A2B4A"/>
+                </a:solidFill>
+                <a:latin typeface="Noto Sans JP"/>
+              </a:rPr>
+              <a:t>・問診票PDFダウンロード</a:t>
+            </a:r>
+          </a:p>
+          <a:p>
+            <a:pPr algn="l">
+              <a:lnSpc>
+                <a:spcPts val="2000"/>
+              </a:lnSpc>
+            </a:pPr>
+            <a:r>
+              <a:rPr sz="1300" b="0">
+                <a:solidFill>
+                  <a:srgbClr val="1A2B4A"/>
+                </a:solidFill>
+                <a:latin typeface="Noto Sans JP"/>
+              </a:rPr>
+              <a:t>  action: download_questionnaire_pdf</a:t>
+            </a:r>
+          </a:p>
+          <a:p>
+            <a:pPr algn="l">
+              <a:lnSpc>
+                <a:spcPts val="2000"/>
+              </a:lnSpc>
+            </a:pPr>
+            <a:r>
+              <a:rPr sz="1300" b="0">
+                <a:solidFill>
+                  <a:srgbClr val="1A2B4A"/>
+                </a:solidFill>
+                <a:latin typeface="Noto Sans JP"/>
+              </a:rPr>
+              <a:t>  targetId: reservationId</a:t>
+            </a:r>
+          </a:p>
+          <a:p>
+            <a:pPr algn="l">
+              <a:lnSpc>
+                <a:spcPts val="2000"/>
+              </a:lnSpc>
+            </a:pPr>
+            <a:r>
+              <a:rPr sz="1300" b="0">
+                <a:solidFill>
+                  <a:srgbClr val="1A2B4A"/>
+                </a:solidFill>
+                <a:latin typeface="Noto Sans JP"/>
+              </a:rPr>
+              <a:t>  data: { patientName }</a:t>
+            </a:r>
+          </a:p>
+          <a:p>
+            <a:pPr algn="l">
+              <a:lnSpc>
+                <a:spcPts val="2000"/>
+              </a:lnSpc>
+            </a:pPr>
+            <a:r>
+              <a:rPr sz="1300" b="0">
+                <a:solidFill>
+                  <a:srgbClr val="1A2B4A"/>
+                </a:solidFill>
+                <a:latin typeface="Noto Sans JP"/>
+              </a:rPr>
+              <a:t/>
+            </a:r>
+          </a:p>
+          <a:p>
+            <a:pPr algn="l">
+              <a:lnSpc>
+                <a:spcPts val="2000"/>
+              </a:lnSpc>
+            </a:pPr>
+            <a:r>
+              <a:rPr sz="1300" b="0">
+                <a:solidFill>
+                  <a:srgbClr val="1A2B4A"/>
+                </a:solidFill>
+                <a:latin typeface="Noto Sans JP"/>
+              </a:rPr>
+              <a:t>・診察完了処理</a:t>
+            </a:r>
+          </a:p>
+          <a:p>
+            <a:pPr algn="l">
+              <a:lnSpc>
+                <a:spcPts val="2000"/>
+              </a:lnSpc>
+            </a:pPr>
+            <a:r>
+              <a:rPr sz="1300" b="0">
+                <a:solidFill>
+                  <a:srgbClr val="1A2B4A"/>
+                </a:solidFill>
+                <a:latin typeface="Noto Sans JP"/>
+              </a:rPr>
+              <a:t>  action: complete_visit</a:t>
+            </a:r>
+          </a:p>
+          <a:p>
+            <a:pPr algn="l">
+              <a:lnSpc>
+                <a:spcPts val="2000"/>
+              </a:lnSpc>
+            </a:pPr>
+            <a:r>
+              <a:rPr sz="1300" b="0">
+                <a:solidFill>
+                  <a:srgbClr val="1A2B4A"/>
+                </a:solidFill>
+                <a:latin typeface="Noto Sans JP"/>
+              </a:rPr>
+              <a:t>  （CF側でも記録）</a:t>
+            </a:r>
+          </a:p>
+          <a:p>
+            <a:pPr algn="l">
+              <a:lnSpc>
+                <a:spcPts val="2000"/>
+              </a:lnSpc>
+            </a:pPr>
+            <a:r>
+              <a:rPr sz="1300" b="0">
+                <a:solidFill>
+                  <a:srgbClr val="1A2B4A"/>
+                </a:solidFill>
+                <a:latin typeface="Noto Sans JP"/>
+              </a:rPr>
+              <a:t/>
+            </a:r>
+          </a:p>
+          <a:p>
+            <a:pPr algn="l">
+              <a:lnSpc>
+                <a:spcPts val="2000"/>
+              </a:lnSpc>
+            </a:pPr>
+            <a:r>
+              <a:rPr sz="1300" b="0">
+                <a:solidFill>
+                  <a:srgbClr val="1A2B4A"/>
+                </a:solidFill>
+                <a:latin typeface="Noto Sans JP"/>
+              </a:rPr>
+              <a:t>## コレクション</a:t>
+            </a:r>
+          </a:p>
+          <a:p>
+            <a:pPr algn="l">
+              <a:lnSpc>
+                <a:spcPts val="2000"/>
+              </a:lnSpc>
+            </a:pPr>
+            <a:r>
+              <a:rPr sz="1300" b="0">
+                <a:solidFill>
+                  <a:srgbClr val="1A2B4A"/>
+                </a:solidFill>
+                <a:latin typeface="Noto Sans JP"/>
+              </a:rPr>
+              <a:t>access_logs</a:t>
+            </a:r>
+          </a:p>
+          <a:p>
+            <a:pPr algn="l">
+              <a:lnSpc>
+                <a:spcPts val="2000"/>
+              </a:lnSpc>
+            </a:pPr>
+            <a:r>
+              <a:rPr sz="1300" b="0">
+                <a:solidFill>
+                  <a:srgbClr val="1A2B4A"/>
+                </a:solidFill>
+                <a:latin typeface="Noto Sans JP"/>
+              </a:rPr>
+              <a:t>・uid: 操作者UID</a:t>
+            </a:r>
+          </a:p>
+          <a:p>
+            <a:pPr algn="l">
+              <a:lnSpc>
+                <a:spcPts val="2000"/>
+              </a:lnSpc>
+            </a:pPr>
+            <a:r>
+              <a:rPr sz="1300" b="0">
+                <a:solidFill>
+                  <a:srgbClr val="1A2B4A"/>
+                </a:solidFill>
+                <a:latin typeface="Noto Sans JP"/>
+              </a:rPr>
+              <a:t>・action: アクション種別</a:t>
+            </a:r>
+          </a:p>
+          <a:p>
+            <a:pPr algn="l">
+              <a:lnSpc>
+                <a:spcPts val="2000"/>
+              </a:lnSpc>
+            </a:pPr>
+            <a:r>
+              <a:rPr sz="1300" b="0">
+                <a:solidFill>
+                  <a:srgbClr val="1A2B4A"/>
+                </a:solidFill>
+                <a:latin typeface="Noto Sans JP"/>
+              </a:rPr>
+              <a:t>・targetId: 対象ドキュメントID</a:t>
+            </a:r>
+          </a:p>
+          <a:p>
+            <a:pPr algn="l">
+              <a:lnSpc>
+                <a:spcPts val="2000"/>
+              </a:lnSpc>
+            </a:pPr>
+            <a:r>
+              <a:rPr sz="1300" b="0">
+                <a:solidFill>
+                  <a:srgbClr val="1A2B4A"/>
+                </a:solidFill>
+                <a:latin typeface="Noto Sans JP"/>
+              </a:rPr>
+              <a:t>・timestamp: 操作日時</a:t>
+            </a:r>
+          </a:p>
+          <a:p>
+            <a:pPr algn="l">
+              <a:lnSpc>
+                <a:spcPts val="2000"/>
+              </a:lnSpc>
+            </a:pPr>
+            <a:r>
+              <a:rPr sz="1300" b="0">
+                <a:solidFill>
+                  <a:srgbClr val="1A2B4A"/>
+                </a:solidFill>
+                <a:latin typeface="Noto Sans JP"/>
+              </a:rPr>
+              <a:t>・data: 付帯情報</a:t>
+            </a:r>
+          </a:p>
+          <a:p>
+            <a:pPr algn="l">
+              <a:lnSpc>
+                <a:spcPts val="2000"/>
+              </a:lnSpc>
+            </a:pPr>
+            <a:r>
+              <a:rPr sz="1300" b="0">
+                <a:solidFill>
+                  <a:srgbClr val="1A2B4A"/>
+                </a:solidFill>
+                <a:latin typeface="Noto Sans JP"/>
+              </a:rPr>
+              <a:t/>
+            </a:r>
+          </a:p>
+          <a:p>
+            <a:pPr algn="l">
+              <a:lnSpc>
+                <a:spcPts val="2000"/>
+              </a:lnSpc>
+            </a:pPr>
+            <a:r>
+              <a:rPr sz="1300" b="0">
+                <a:solidFill>
+                  <a:srgbClr val="1A2B4A"/>
+                </a:solidFill>
+                <a:latin typeface="Noto Sans JP"/>
+              </a:rPr>
+              <a:t>## Firestore ルール</a:t>
+            </a:r>
+          </a:p>
+          <a:p>
+            <a:pPr algn="l">
+              <a:lnSpc>
+                <a:spcPts val="2000"/>
+              </a:lnSpc>
+            </a:pPr>
+            <a:r>
+              <a:rPr sz="1300" b="0">
+                <a:solidFill>
+                  <a:srgbClr val="1A2B4A"/>
+                </a:solidFill>
+                <a:latin typeface="Noto Sans JP"/>
+              </a:rPr>
+              <a:t>・admin のみ read/create 可</a:t>
+            </a:r>
+          </a:p>
+        </p:txBody>
+      </p:sp>
+      <p:sp>
+        <p:nvSpPr>
+          <p:cNvPr id="10" name="Rectangle 9"/>
+          <p:cNvSpPr/>
+          <p:nvPr/>
+        </p:nvSpPr>
+        <p:spPr>
+          <a:xfrm>
+            <a:off x="6217920" y="1005840"/>
+            <a:ext cx="5394960" cy="5303520"/>
+          </a:xfrm>
+          <a:prstGeom prst="rect">
+            <a:avLst/>
+          </a:prstGeom>
+          <a:solidFill>
+            <a:srgbClr val="F8F5EE"/>
+          </a:solidFill>
+          <a:ln>
+            <a:noFill/>
+          </a:ln>
+        </p:spPr>
+        <p:style>
+          <a:lnRef idx="1">
+            <a:schemeClr val="accent1"/>
+          </a:lnRef>
+          <a:fillRef idx="3">
+            <a:schemeClr val="accent1"/>
+          </a:fillRef>
+          <a:effectRef idx="2">
+            <a:schemeClr val="accent1"/>
+          </a:effectRef>
+          <a:fontRef idx="minor">
+            <a:schemeClr val="lt1"/>
+          </a:fontRef>
+        </p:style>
+        <p:txBody>
+          <a:bodyPr rtlCol="0" anchor="ctr"/>
+          <a:lstStyle/>
+          <a:p>
+            <a:pPr algn="ctr"/>
+          </a:p>
+        </p:txBody>
+      </p:sp>
+      <p:sp>
+        <p:nvSpPr>
+          <p:cNvPr id="11" name="Rectangle 10"/>
+          <p:cNvSpPr/>
+          <p:nvPr/>
+        </p:nvSpPr>
+        <p:spPr>
+          <a:xfrm>
+            <a:off x="6217920" y="1005840"/>
+            <a:ext cx="5394960" cy="502920"/>
+          </a:xfrm>
+          <a:prstGeom prst="rect">
+            <a:avLst/>
+          </a:prstGeom>
+          <a:solidFill>
+            <a:srgbClr val="1A2B4A"/>
+          </a:solidFill>
+          <a:ln>
+            <a:noFill/>
+          </a:ln>
+        </p:spPr>
+        <p:style>
+          <a:lnRef idx="1">
+            <a:schemeClr val="accent1"/>
+          </a:lnRef>
+          <a:fillRef idx="3">
+            <a:schemeClr val="accent1"/>
+          </a:fillRef>
+          <a:effectRef idx="2">
+            <a:schemeClr val="accent1"/>
+          </a:effectRef>
+          <a:fontRef idx="minor">
+            <a:schemeClr val="lt1"/>
+          </a:fontRef>
+        </p:style>
+        <p:txBody>
+          <a:bodyPr rtlCol="0" anchor="ctr"/>
+          <a:lstStyle/>
+          <a:p>
+            <a:pPr algn="ctr"/>
+          </a:p>
+        </p:txBody>
+      </p:sp>
+      <p:sp>
+        <p:nvSpPr>
+          <p:cNvPr id="12" name="TextBox 11"/>
+          <p:cNvSpPr txBox="1"/>
+          <p:nvPr/>
+        </p:nvSpPr>
+        <p:spPr>
+          <a:xfrm>
+            <a:off x="6309360" y="1051560"/>
+            <a:ext cx="5212080" cy="457200"/>
+          </a:xfrm>
+          <a:prstGeom prst="rect">
+            <a:avLst/>
+          </a:prstGeom>
+          <a:noFill/>
+        </p:spPr>
+        <p:txBody>
+          <a:bodyPr wrap="square">
+            <a:spAutoFit/>
+          </a:bodyPr>
+          <a:lstStyle/>
+          <a:p>
+            <a:pPr algn="l"/>
+            <a:r>
+              <a:rPr sz="1500" b="1">
+                <a:solidFill>
+                  <a:srgbClr val="FFFFFF"/>
+                </a:solidFill>
+                <a:latin typeface="Noto Sans JP"/>
+              </a:rPr>
+              <a:t>リマインダーメール opt-out</a:t>
+            </a:r>
+          </a:p>
+        </p:txBody>
+      </p:sp>
+      <p:sp>
+        <p:nvSpPr>
+          <p:cNvPr id="13" name="TextBox 12"/>
+          <p:cNvSpPr txBox="1"/>
+          <p:nvPr/>
+        </p:nvSpPr>
+        <p:spPr>
+          <a:xfrm>
+            <a:off x="6355080" y="1600200"/>
+            <a:ext cx="5120640" cy="4617720"/>
+          </a:xfrm>
+          <a:prstGeom prst="rect">
+            <a:avLst/>
+          </a:prstGeom>
+          <a:noFill/>
+        </p:spPr>
+        <p:txBody>
+          <a:bodyPr wrap="square">
+            <a:spAutoFit/>
+          </a:bodyPr>
+          <a:lstStyle/>
+          <a:p>
+            <a:pPr algn="l">
+              <a:lnSpc>
+                <a:spcPts val="2000"/>
+              </a:lnSpc>
+            </a:pPr>
+            <a:r>
+              <a:rPr sz="1300" b="0">
+                <a:solidFill>
+                  <a:srgbClr val="1A2B4A"/>
+                </a:solidFill>
+                <a:latin typeface="Noto Sans JP"/>
+              </a:rPr>
+              <a:t>## フロー</a:t>
+            </a:r>
+          </a:p>
+          <a:p>
+            <a:pPr algn="l">
+              <a:lnSpc>
+                <a:spcPts val="2000"/>
+              </a:lnSpc>
+            </a:pPr>
+            <a:r>
+              <a:rPr sz="1300" b="0">
+                <a:solidFill>
+                  <a:srgbClr val="1A2B4A"/>
+                </a:solidFill>
+                <a:latin typeface="Noto Sans JP"/>
+              </a:rPr>
+              <a:t>① 予約確認メールに</a:t>
+            </a:r>
+          </a:p>
+          <a:p>
+            <a:pPr algn="l">
+              <a:lnSpc>
+                <a:spcPts val="2000"/>
+              </a:lnSpc>
+            </a:pPr>
+            <a:r>
+              <a:rPr sz="1300" b="0">
+                <a:solidFill>
+                  <a:srgbClr val="1A2B4A"/>
+                </a:solidFill>
+                <a:latin typeface="Noto Sans JP"/>
+              </a:rPr>
+              <a:t>  opt-out URL を記載</a:t>
+            </a:r>
+          </a:p>
+          <a:p>
+            <a:pPr algn="l">
+              <a:lnSpc>
+                <a:spcPts val="2000"/>
+              </a:lnSpc>
+            </a:pPr>
+            <a:r>
+              <a:rPr sz="1300" b="0">
+                <a:solidFill>
+                  <a:srgbClr val="1A2B4A"/>
+                </a:solidFill>
+                <a:latin typeface="Noto Sans JP"/>
+              </a:rPr>
+              <a:t>  （HMAC-SHA256 トークン付き）</a:t>
+            </a:r>
+          </a:p>
+          <a:p>
+            <a:pPr algn="l">
+              <a:lnSpc>
+                <a:spcPts val="2000"/>
+              </a:lnSpc>
+            </a:pPr>
+            <a:r>
+              <a:rPr sz="1300" b="0">
+                <a:solidFill>
+                  <a:srgbClr val="1A2B4A"/>
+                </a:solidFill>
+                <a:latin typeface="Noto Sans JP"/>
+              </a:rPr>
+              <a:t>② 患者がリンクをクリック</a:t>
+            </a:r>
+          </a:p>
+          <a:p>
+            <a:pPr algn="l">
+              <a:lnSpc>
+                <a:spcPts val="2000"/>
+              </a:lnSpc>
+            </a:pPr>
+            <a:r>
+              <a:rPr sz="1300" b="0">
+                <a:solidFill>
+                  <a:srgbClr val="1A2B4A"/>
+                </a:solidFill>
+                <a:latin typeface="Noto Sans JP"/>
+              </a:rPr>
+              <a:t>③ optOutReminder CF に</a:t>
+            </a:r>
+          </a:p>
+          <a:p>
+            <a:pPr algn="l">
+              <a:lnSpc>
+                <a:spcPts val="2000"/>
+              </a:lnSpc>
+            </a:pPr>
+            <a:r>
+              <a:rPr sz="1300" b="0">
+                <a:solidFill>
+                  <a:srgbClr val="1A2B4A"/>
+                </a:solidFill>
+                <a:latin typeface="Noto Sans JP"/>
+              </a:rPr>
+              <a:t>  GET リクエスト</a:t>
+            </a:r>
+          </a:p>
+          <a:p>
+            <a:pPr algn="l">
+              <a:lnSpc>
+                <a:spcPts val="2000"/>
+              </a:lnSpc>
+            </a:pPr>
+            <a:r>
+              <a:rPr sz="1300" b="0">
+                <a:solidFill>
+                  <a:srgbClr val="1A2B4A"/>
+                </a:solidFill>
+                <a:latin typeface="Noto Sans JP"/>
+              </a:rPr>
+              <a:t>④ トークン検証</a:t>
+            </a:r>
+          </a:p>
+          <a:p>
+            <a:pPr algn="l">
+              <a:lnSpc>
+                <a:spcPts val="2000"/>
+              </a:lnSpc>
+            </a:pPr>
+            <a:r>
+              <a:rPr sz="1300" b="0">
+                <a:solidFill>
+                  <a:srgbClr val="1A2B4A"/>
+                </a:solidFill>
+                <a:latin typeface="Noto Sans JP"/>
+              </a:rPr>
+              <a:t>  HMAC-SHA256(reservationId,</a:t>
+            </a:r>
+          </a:p>
+          <a:p>
+            <a:pPr algn="l">
+              <a:lnSpc>
+                <a:spcPts val="2000"/>
+              </a:lnSpc>
+            </a:pPr>
+            <a:r>
+              <a:rPr sz="1300" b="0">
+                <a:solidFill>
+                  <a:srgbClr val="1A2B4A"/>
+                </a:solidFill>
+                <a:latin typeface="Noto Sans JP"/>
+              </a:rPr>
+              <a:t>  SECRET_KEY) と照合</a:t>
+            </a:r>
+          </a:p>
+          <a:p>
+            <a:pPr algn="l">
+              <a:lnSpc>
+                <a:spcPts val="2000"/>
+              </a:lnSpc>
+            </a:pPr>
+            <a:r>
+              <a:rPr sz="1300" b="0">
+                <a:solidFill>
+                  <a:srgbClr val="1A2B4A"/>
+                </a:solidFill>
+                <a:latin typeface="Noto Sans JP"/>
+              </a:rPr>
+              <a:t>⑤ 一致した場合:</a:t>
+            </a:r>
+          </a:p>
+          <a:p>
+            <a:pPr algn="l">
+              <a:lnSpc>
+                <a:spcPts val="2000"/>
+              </a:lnSpc>
+            </a:pPr>
+            <a:r>
+              <a:rPr sz="1300" b="0">
+                <a:solidFill>
+                  <a:srgbClr val="1A2B4A"/>
+                </a:solidFill>
+                <a:latin typeface="Noto Sans JP"/>
+              </a:rPr>
+              <a:t>  reservations/{id}</a:t>
+            </a:r>
+          </a:p>
+          <a:p>
+            <a:pPr algn="l">
+              <a:lnSpc>
+                <a:spcPts val="2000"/>
+              </a:lnSpc>
+            </a:pPr>
+            <a:r>
+              <a:rPr sz="1300" b="0">
+                <a:solidFill>
+                  <a:srgbClr val="1A2B4A"/>
+                </a:solidFill>
+                <a:latin typeface="Noto Sans JP"/>
+              </a:rPr>
+              <a:t>  .reminderConsent = false</a:t>
+            </a:r>
+          </a:p>
+          <a:p>
+            <a:pPr algn="l">
+              <a:lnSpc>
+                <a:spcPts val="2000"/>
+              </a:lnSpc>
+            </a:pPr>
+            <a:r>
+              <a:rPr sz="1300" b="0">
+                <a:solidFill>
+                  <a:srgbClr val="1A2B4A"/>
+                </a:solidFill>
+                <a:latin typeface="Noto Sans JP"/>
+              </a:rPr>
+              <a:t>  に更新</a:t>
+            </a:r>
+          </a:p>
+          <a:p>
+            <a:pPr algn="l">
+              <a:lnSpc>
+                <a:spcPts val="2000"/>
+              </a:lnSpc>
+            </a:pPr>
+            <a:r>
+              <a:rPr sz="1300" b="0">
+                <a:solidFill>
+                  <a:srgbClr val="1A2B4A"/>
+                </a:solidFill>
+                <a:latin typeface="Noto Sans JP"/>
+              </a:rPr>
+              <a:t/>
+            </a:r>
+          </a:p>
+          <a:p>
+            <a:pPr algn="l">
+              <a:lnSpc>
+                <a:spcPts val="2000"/>
+              </a:lnSpc>
+            </a:pPr>
+            <a:r>
+              <a:rPr sz="1300" b="0">
+                <a:solidFill>
+                  <a:srgbClr val="1A2B4A"/>
+                </a:solidFill>
+                <a:latin typeface="Noto Sans JP"/>
+              </a:rPr>
+              <a:t>## セキュリティ</a:t>
+            </a:r>
+          </a:p>
+          <a:p>
+            <a:pPr algn="l">
+              <a:lnSpc>
+                <a:spcPts val="2000"/>
+              </a:lnSpc>
+            </a:pPr>
+            <a:r>
+              <a:rPr sz="1300" b="0">
+                <a:solidFill>
+                  <a:srgbClr val="1A2B4A"/>
+                </a:solidFill>
+                <a:latin typeface="Noto Sans JP"/>
+              </a:rPr>
+              <a:t>・トークンは URL-safe Base64</a:t>
+            </a:r>
+          </a:p>
+          <a:p>
+            <a:pPr algn="l">
+              <a:lnSpc>
+                <a:spcPts val="2000"/>
+              </a:lnSpc>
+            </a:pPr>
+            <a:r>
+              <a:rPr sz="1300" b="0">
+                <a:solidFill>
+                  <a:srgbClr val="1A2B4A"/>
+                </a:solidFill>
+                <a:latin typeface="Noto Sans JP"/>
+              </a:rPr>
+              <a:t>・SECRET_KEY は</a:t>
+            </a:r>
+          </a:p>
+          <a:p>
+            <a:pPr algn="l">
+              <a:lnSpc>
+                <a:spcPts val="2000"/>
+              </a:lnSpc>
+            </a:pPr>
+            <a:r>
+              <a:rPr sz="1300" b="0">
+                <a:solidFill>
+                  <a:srgbClr val="1A2B4A"/>
+                </a:solidFill>
+                <a:latin typeface="Noto Sans JP"/>
+              </a:rPr>
+              <a:t>  Firebase Secret Manager で管理</a:t>
+            </a:r>
+          </a:p>
+          <a:p>
+            <a:pPr algn="l">
+              <a:lnSpc>
+                <a:spcPts val="2000"/>
+              </a:lnSpc>
+            </a:pPr>
+            <a:r>
+              <a:rPr sz="1300" b="0">
+                <a:solidFill>
+                  <a:srgbClr val="1A2B4A"/>
+                </a:solidFill>
+                <a:latin typeface="Noto Sans JP"/>
+              </a:rPr>
+              <a:t>・トークン不一致: 403 Forbidden</a:t>
+            </a:r>
+          </a:p>
+          <a:p>
+            <a:pPr algn="l">
+              <a:lnSpc>
+                <a:spcPts val="2000"/>
+              </a:lnSpc>
+            </a:pPr>
+            <a:r>
+              <a:rPr sz="1300" b="0">
+                <a:solidFill>
+                  <a:srgbClr val="1A2B4A"/>
+                </a:solidFill>
+                <a:latin typeface="Noto Sans JP"/>
+              </a:rPr>
+              <a:t/>
+            </a:r>
+          </a:p>
+          <a:p>
+            <a:pPr algn="l">
+              <a:lnSpc>
+                <a:spcPts val="2000"/>
+              </a:lnSpc>
+            </a:pPr>
+            <a:r>
+              <a:rPr sz="1300" b="0">
+                <a:solidFill>
+                  <a:srgbClr val="1A2B4A"/>
+                </a:solidFill>
+                <a:latin typeface="Noto Sans JP"/>
+              </a:rPr>
+              <a:t>## opt-in 設定（Settings）</a:t>
+            </a:r>
+          </a:p>
+          <a:p>
+            <a:pPr algn="l">
+              <a:lnSpc>
+                <a:spcPts val="2000"/>
+              </a:lnSpc>
+            </a:pPr>
+            <a:r>
+              <a:rPr sz="1300" b="0">
+                <a:solidFill>
+                  <a:srgbClr val="1A2B4A"/>
+                </a:solidFill>
+                <a:latin typeface="Noto Sans JP"/>
+              </a:rPr>
+              <a:t>・ポリシータブで機能 ON/OFF</a:t>
+            </a:r>
+          </a:p>
+          <a:p>
+            <a:pPr algn="l">
+              <a:lnSpc>
+                <a:spcPts val="2000"/>
+              </a:lnSpc>
+            </a:pPr>
+            <a:r>
+              <a:rPr sz="1300" b="0">
+                <a:solidFill>
+                  <a:srgbClr val="1A2B4A"/>
+                </a:solidFill>
+                <a:latin typeface="Noto Sans JP"/>
+              </a:rPr>
+              <a:t>・ON 時: 予約フォームに</a:t>
+            </a:r>
+          </a:p>
+          <a:p>
+            <a:pPr algn="l">
+              <a:lnSpc>
+                <a:spcPts val="2000"/>
+              </a:lnSpc>
+            </a:pPr>
+            <a:r>
+              <a:rPr sz="1300" b="0">
+                <a:solidFill>
+                  <a:srgbClr val="1A2B4A"/>
+                </a:solidFill>
+                <a:latin typeface="Noto Sans JP"/>
+              </a:rPr>
+              <a:t>  「リマインダーメールを受け取る」</a:t>
+            </a:r>
+          </a:p>
+          <a:p>
+            <a:pPr algn="l">
+              <a:lnSpc>
+                <a:spcPts val="2000"/>
+              </a:lnSpc>
+            </a:pPr>
+            <a:r>
+              <a:rPr sz="1300" b="0">
+                <a:solidFill>
+                  <a:srgbClr val="1A2B4A"/>
+                </a:solidFill>
+                <a:latin typeface="Noto Sans JP"/>
+              </a:rPr>
+              <a:t>  チェックボックスを表示</a:t>
+            </a:r>
+          </a:p>
+          <a:p>
+            <a:pPr algn="l">
+              <a:lnSpc>
+                <a:spcPts val="2000"/>
+              </a:lnSpc>
+            </a:pPr>
+            <a:r>
+              <a:rPr sz="1300" b="0">
+                <a:solidFill>
+                  <a:srgbClr val="1A2B4A"/>
+                </a:solidFill>
+                <a:latin typeface="Noto Sans JP"/>
+              </a:rPr>
+              <a:t>・患者が同意した場合のみ</a:t>
+            </a:r>
+          </a:p>
+          <a:p>
+            <a:pPr algn="l">
+              <a:lnSpc>
+                <a:spcPts val="2000"/>
+              </a:lnSpc>
+            </a:pPr>
+            <a:r>
+              <a:rPr sz="1300" b="0">
+                <a:solidFill>
+                  <a:srgbClr val="1A2B4A"/>
+                </a:solidFill>
+                <a:latin typeface="Noto Sans JP"/>
+              </a:rPr>
+              <a:t>  sendDailyReminders で送信</a:t>
+            </a:r>
+          </a:p>
+        </p:txBody>
+      </p:sp>
+    </p:spTree>
+  </p:cSld>
+  <p:clrMapOvr>
+    <a:masterClrMapping/>
+  </p:clrMapOvr>
+</p:sld>
+</file>
+
+<file path=ppt/slides/slide26.xml><?xml version="1.0" encoding="utf-8"?>
+<p:sld xmlns:a="http://schemas.openxmlformats.org/drawingml/2006/main" xmlns:p="http://schemas.openxmlformats.org/presentationml/2006/main" xmlns:r="http://schemas.openxmlformats.org/officeDocument/2006/relationships">
+  <p:cSld>
+    <p:spTree>
+      <p:nvGrpSpPr>
+        <p:cNvPr id="1" name=""/>
+        <p:cNvGrpSpPr/>
+        <p:nvPr/>
+      </p:nvGrpSpPr>
+      <p:grpSpPr/>
+      <p:sp>
+        <p:nvSpPr>
+          <p:cNvPr id="2" name="Rectangle 1"/>
+          <p:cNvSpPr/>
+          <p:nvPr/>
+        </p:nvSpPr>
+        <p:spPr>
+          <a:xfrm>
+            <a:off x="0" y="0"/>
+            <a:ext cx="12188952" cy="6858000"/>
+          </a:xfrm>
+          <a:prstGeom prst="rect">
+            <a:avLst/>
+          </a:prstGeom>
+          <a:solidFill>
+            <a:srgbClr val="1A2B4A"/>
+          </a:solidFill>
+          <a:ln>
+            <a:noFill/>
+          </a:ln>
+        </p:spPr>
+        <p:style>
+          <a:lnRef idx="1">
+            <a:schemeClr val="accent1"/>
+          </a:lnRef>
+          <a:fillRef idx="3">
+            <a:schemeClr val="accent1"/>
+          </a:fillRef>
+          <a:effectRef idx="2">
+            <a:schemeClr val="accent1"/>
+          </a:effectRef>
+          <a:fontRef idx="minor">
+            <a:schemeClr val="lt1"/>
+          </a:fontRef>
+        </p:style>
+        <p:txBody>
+          <a:bodyPr rtlCol="0" anchor="ctr"/>
+          <a:lstStyle/>
+          <a:p>
+            <a:pPr algn="ctr"/>
+          </a:p>
+        </p:txBody>
+      </p:sp>
+      <p:sp>
+        <p:nvSpPr>
+          <p:cNvPr id="3" name="Rectangle 2"/>
+          <p:cNvSpPr/>
+          <p:nvPr/>
+        </p:nvSpPr>
+        <p:spPr>
+          <a:xfrm>
+            <a:off x="0" y="5760720"/>
+            <a:ext cx="12188952" cy="1097280"/>
+          </a:xfrm>
+          <a:prstGeom prst="rect">
+            <a:avLst/>
+          </a:prstGeom>
+          <a:solidFill>
+            <a:srgbClr val="D4AF37"/>
+          </a:solidFill>
+          <a:ln>
+            <a:noFill/>
+          </a:ln>
+        </p:spPr>
+        <p:style>
+          <a:lnRef idx="1">
+            <a:schemeClr val="accent1"/>
+          </a:lnRef>
+          <a:fillRef idx="3">
+            <a:schemeClr val="accent1"/>
+          </a:fillRef>
+          <a:effectRef idx="2">
+            <a:schemeClr val="accent1"/>
+          </a:effectRef>
+          <a:fontRef idx="minor">
+            <a:schemeClr val="lt1"/>
+          </a:fontRef>
+        </p:style>
+        <p:txBody>
+          <a:bodyPr rtlCol="0" anchor="ctr"/>
+          <a:lstStyle/>
+          <a:p>
+            <a:pPr algn="ctr"/>
+          </a:p>
+        </p:txBody>
+      </p:sp>
+      <p:sp>
+        <p:nvSpPr>
+          <p:cNvPr id="4" name="Rectangle 3"/>
+          <p:cNvSpPr/>
+          <p:nvPr/>
+        </p:nvSpPr>
+        <p:spPr>
+          <a:xfrm>
+            <a:off x="457200" y="1828800"/>
+            <a:ext cx="11274552" cy="54864"/>
+          </a:xfrm>
+          <a:prstGeom prst="rect">
+            <a:avLst/>
+          </a:prstGeom>
+          <a:solidFill>
+            <a:srgbClr val="D4AF37"/>
+          </a:solidFill>
+          <a:ln>
+            <a:noFill/>
+          </a:ln>
+        </p:spPr>
+        <p:style>
+          <a:lnRef idx="1">
+            <a:schemeClr val="accent1"/>
+          </a:lnRef>
+          <a:fillRef idx="3">
+            <a:schemeClr val="accent1"/>
+          </a:fillRef>
+          <a:effectRef idx="2">
+            <a:schemeClr val="accent1"/>
+          </a:effectRef>
+          <a:fontRef idx="minor">
+            <a:schemeClr val="lt1"/>
+          </a:fontRef>
+        </p:style>
+        <p:txBody>
+          <a:bodyPr rtlCol="0" anchor="ctr"/>
+          <a:lstStyle/>
+          <a:p>
+            <a:pPr algn="ctr"/>
+          </a:p>
+        </p:txBody>
+      </p:sp>
+      <p:sp>
+        <p:nvSpPr>
+          <p:cNvPr id="5" name="TextBox 4"/>
+          <p:cNvSpPr txBox="1"/>
+          <p:nvPr/>
+        </p:nvSpPr>
+        <p:spPr>
+          <a:xfrm>
+            <a:off x="457200" y="914400"/>
+            <a:ext cx="10972800" cy="914400"/>
+          </a:xfrm>
+          <a:prstGeom prst="rect">
+            <a:avLst/>
+          </a:prstGeom>
+          <a:noFill/>
+        </p:spPr>
+        <p:txBody>
+          <a:bodyPr wrap="square">
+            <a:spAutoFit/>
+          </a:bodyPr>
+          <a:lstStyle/>
+          <a:p>
+            <a:pPr algn="l"/>
+            <a:r>
+              <a:rPr sz="4000" b="1">
+                <a:solidFill>
+                  <a:srgbClr val="FFFFFF"/>
+                </a:solidFill>
+                <a:latin typeface="Noto Sans JP"/>
+              </a:rPr>
+              <a:t>6. 運用・デプロイ</a:t>
+            </a:r>
+          </a:p>
+        </p:txBody>
+      </p:sp>
+      <p:sp>
+        <p:nvSpPr>
+          <p:cNvPr id="6" name="TextBox 5"/>
+          <p:cNvSpPr txBox="1"/>
+          <p:nvPr/>
+        </p:nvSpPr>
+        <p:spPr>
+          <a:xfrm>
+            <a:off x="640080" y="2103120"/>
+            <a:ext cx="10972800" cy="457200"/>
+          </a:xfrm>
+          <a:prstGeom prst="rect">
+            <a:avLst/>
+          </a:prstGeom>
+          <a:noFill/>
+        </p:spPr>
+        <p:txBody>
+          <a:bodyPr wrap="square">
+            <a:spAutoFit/>
+          </a:bodyPr>
+          <a:lstStyle/>
+          <a:p>
+            <a:pPr algn="l"/>
+            <a:r>
+              <a:rPr sz="1600" b="0">
+                <a:solidFill>
+                  <a:srgbClr val="F8F5EE"/>
+                </a:solidFill>
+                <a:latin typeface="Noto Sans JP"/>
+              </a:rPr>
+              <a:t>  Firebase Hosting マルチサイト構成</a:t>
+            </a:r>
+          </a:p>
+        </p:txBody>
+      </p:sp>
+      <p:sp>
+        <p:nvSpPr>
+          <p:cNvPr id="7" name="TextBox 6"/>
+          <p:cNvSpPr txBox="1"/>
+          <p:nvPr/>
+        </p:nvSpPr>
+        <p:spPr>
+          <a:xfrm>
+            <a:off x="640080" y="2560320"/>
+            <a:ext cx="10972800" cy="457200"/>
+          </a:xfrm>
+          <a:prstGeom prst="rect">
+            <a:avLst/>
+          </a:prstGeom>
+          <a:noFill/>
+        </p:spPr>
+        <p:txBody>
+          <a:bodyPr wrap="square">
+            <a:spAutoFit/>
+          </a:bodyPr>
+          <a:lstStyle/>
+          <a:p>
+            <a:pPr algn="l"/>
+            <a:r>
+              <a:rPr sz="1600" b="0">
+                <a:solidFill>
+                  <a:srgbClr val="F8F5EE"/>
+                </a:solidFill>
+                <a:latin typeface="Noto Sans JP"/>
+              </a:rPr>
+              <a:t>  デプロイコマンド（--only スコープ厳守）</a:t>
+            </a:r>
+          </a:p>
+        </p:txBody>
+      </p:sp>
+      <p:sp>
+        <p:nvSpPr>
+          <p:cNvPr id="8" name="TextBox 7"/>
+          <p:cNvSpPr txBox="1"/>
+          <p:nvPr/>
+        </p:nvSpPr>
+        <p:spPr>
+          <a:xfrm>
+            <a:off x="640080" y="3017520"/>
+            <a:ext cx="10972800" cy="457200"/>
+          </a:xfrm>
+          <a:prstGeom prst="rect">
+            <a:avLst/>
+          </a:prstGeom>
+          <a:noFill/>
+        </p:spPr>
+        <p:txBody>
+          <a:bodyPr wrap="square">
+            <a:spAutoFit/>
+          </a:bodyPr>
+          <a:lstStyle/>
+          <a:p>
+            <a:pPr algn="l"/>
+            <a:r>
+              <a:rPr sz="1600" b="0">
+                <a:solidFill>
+                  <a:srgbClr val="F8F5EE"/>
+                </a:solidFill>
+                <a:latin typeface="Noto Sans JP"/>
+              </a:rPr>
+              <a:t>  レガシー URL リダイレクト</a:t>
+            </a:r>
+          </a:p>
+        </p:txBody>
+      </p:sp>
+    </p:spTree>
+  </p:cSld>
+  <p:clrMapOvr>
+    <a:masterClrMapping/>
+  </p:clrMapOvr>
+</p:sld>
+</file>
+
+<file path=ppt/slides/slide27.xml><?xml version="1.0" encoding="utf-8"?>
+<p:sld xmlns:a="http://schemas.openxmlformats.org/drawingml/2006/main" xmlns:p="http://schemas.openxmlformats.org/presentationml/2006/main" xmlns:r="http://schemas.openxmlformats.org/officeDocument/2006/relationships">
+  <p:cSld>
+    <p:spTree>
+      <p:nvGrpSpPr>
+        <p:cNvPr id="1" name=""/>
+        <p:cNvGrpSpPr/>
+        <p:nvPr/>
+      </p:nvGrpSpPr>
+      <p:grpSpPr/>
+      <p:sp>
+        <p:nvSpPr>
+          <p:cNvPr id="2" name="Rectangle 1"/>
+          <p:cNvSpPr/>
+          <p:nvPr/>
+        </p:nvSpPr>
+        <p:spPr>
+          <a:xfrm>
+            <a:off x="0" y="0"/>
+            <a:ext cx="12188952" cy="6858000"/>
+          </a:xfrm>
+          <a:prstGeom prst="rect">
+            <a:avLst/>
+          </a:prstGeom>
+          <a:solidFill>
+            <a:srgbClr val="F8F5EE"/>
+          </a:solidFill>
+          <a:ln>
+            <a:noFill/>
+          </a:ln>
+        </p:spPr>
+        <p:style>
+          <a:lnRef idx="1">
+            <a:schemeClr val="accent1"/>
+          </a:lnRef>
+          <a:fillRef idx="3">
+            <a:schemeClr val="accent1"/>
+          </a:fillRef>
+          <a:effectRef idx="2">
+            <a:schemeClr val="accent1"/>
+          </a:effectRef>
+          <a:fontRef idx="minor">
+            <a:schemeClr val="lt1"/>
+          </a:fontRef>
+        </p:style>
+        <p:txBody>
+          <a:bodyPr rtlCol="0" anchor="ctr"/>
+          <a:lstStyle/>
+          <a:p>
+            <a:pPr algn="ctr"/>
+          </a:p>
+        </p:txBody>
+      </p:sp>
+      <p:sp>
+        <p:nvSpPr>
+          <p:cNvPr id="3" name="Rectangle 2"/>
+          <p:cNvSpPr/>
+          <p:nvPr/>
+        </p:nvSpPr>
+        <p:spPr>
+          <a:xfrm>
+            <a:off x="0" y="0"/>
+            <a:ext cx="12188952" cy="822960"/>
+          </a:xfrm>
+          <a:prstGeom prst="rect">
+            <a:avLst/>
+          </a:prstGeom>
+          <a:solidFill>
+            <a:srgbClr val="1A2B4A"/>
+          </a:solidFill>
+          <a:ln>
+            <a:noFill/>
+          </a:ln>
+        </p:spPr>
+        <p:style>
+          <a:lnRef idx="1">
+            <a:schemeClr val="accent1"/>
+          </a:lnRef>
+          <a:fillRef idx="3">
+            <a:schemeClr val="accent1"/>
+          </a:fillRef>
+          <a:effectRef idx="2">
+            <a:schemeClr val="accent1"/>
+          </a:effectRef>
+          <a:fontRef idx="minor">
+            <a:schemeClr val="lt1"/>
+          </a:fontRef>
+        </p:style>
+        <p:txBody>
+          <a:bodyPr rtlCol="0" anchor="ctr"/>
+          <a:lstStyle/>
+          <a:p>
+            <a:pPr algn="ctr"/>
+          </a:p>
+        </p:txBody>
+      </p:sp>
+      <p:sp>
+        <p:nvSpPr>
+          <p:cNvPr id="4" name="TextBox 3"/>
+          <p:cNvSpPr txBox="1"/>
+          <p:nvPr/>
+        </p:nvSpPr>
+        <p:spPr>
+          <a:xfrm>
+            <a:off x="365760" y="91440"/>
+            <a:ext cx="9144000" cy="685800"/>
+          </a:xfrm>
+          <a:prstGeom prst="rect">
+            <a:avLst/>
+          </a:prstGeom>
+          <a:noFill/>
+        </p:spPr>
+        <p:txBody>
+          <a:bodyPr wrap="square">
+            <a:spAutoFit/>
+          </a:bodyPr>
+          <a:lstStyle/>
+          <a:p>
+            <a:pPr algn="l"/>
+            <a:r>
+              <a:rPr sz="2600" b="1">
+                <a:solidFill>
+                  <a:srgbClr val="FFFFFF"/>
+                </a:solidFill>
+                <a:latin typeface="Noto Sans JP"/>
+              </a:rPr>
+              <a:t>デプロイ構成</a:t>
+            </a:r>
+          </a:p>
+        </p:txBody>
+      </p:sp>
+      <p:sp>
+        <p:nvSpPr>
+          <p:cNvPr id="5" name="Rectangle 4"/>
+          <p:cNvSpPr/>
+          <p:nvPr/>
+        </p:nvSpPr>
+        <p:spPr>
+          <a:xfrm>
+            <a:off x="10332720" y="182880"/>
+            <a:ext cx="1645920" cy="457200"/>
+          </a:xfrm>
+          <a:prstGeom prst="rect">
+            <a:avLst/>
+          </a:prstGeom>
+          <a:solidFill>
+            <a:srgbClr val="D4AF37"/>
+          </a:solidFill>
+          <a:ln>
+            <a:noFill/>
+          </a:ln>
+        </p:spPr>
+        <p:style>
+          <a:lnRef idx="1">
+            <a:schemeClr val="accent1"/>
+          </a:lnRef>
+          <a:fillRef idx="3">
+            <a:schemeClr val="accent1"/>
+          </a:fillRef>
+          <a:effectRef idx="2">
+            <a:schemeClr val="accent1"/>
+          </a:effectRef>
+          <a:fontRef idx="minor">
+            <a:schemeClr val="lt1"/>
+          </a:fontRef>
+        </p:style>
+        <p:txBody>
+          <a:bodyPr rtlCol="0" anchor="ctr"/>
+          <a:lstStyle/>
+          <a:p>
+            <a:pPr algn="ctr"/>
+            <a:r>
+              <a:rPr sz="1200" b="1">
+                <a:solidFill>
+                  <a:srgbClr val="1A2B4A"/>
+                </a:solidFill>
+                <a:latin typeface="Noto Sans JP"/>
+              </a:rPr>
+              <a:t>運用</a:t>
+            </a:r>
+          </a:p>
+        </p:txBody>
+      </p:sp>
+      <p:sp>
+        <p:nvSpPr>
+          <p:cNvPr id="6" name="Rectangle 5"/>
+          <p:cNvSpPr/>
+          <p:nvPr/>
+        </p:nvSpPr>
+        <p:spPr>
+          <a:xfrm>
+            <a:off x="457200" y="1005840"/>
+            <a:ext cx="11274552" cy="5303520"/>
+          </a:xfrm>
+          <a:prstGeom prst="rect">
+            <a:avLst/>
+          </a:prstGeom>
+          <a:solidFill>
+            <a:srgbClr val="F8F5EE"/>
+          </a:solidFill>
+          <a:ln>
+            <a:noFill/>
+          </a:ln>
+        </p:spPr>
+        <p:style>
+          <a:lnRef idx="1">
+            <a:schemeClr val="accent1"/>
+          </a:lnRef>
+          <a:fillRef idx="3">
+            <a:schemeClr val="accent1"/>
+          </a:fillRef>
+          <a:effectRef idx="2">
+            <a:schemeClr val="accent1"/>
+          </a:effectRef>
+          <a:fontRef idx="minor">
+            <a:schemeClr val="lt1"/>
+          </a:fontRef>
+        </p:style>
+        <p:txBody>
+          <a:bodyPr rtlCol="0" anchor="ctr"/>
+          <a:lstStyle/>
+          <a:p>
+            <a:pPr algn="ctr"/>
+          </a:p>
+        </p:txBody>
+      </p:sp>
+      <p:sp>
+        <p:nvSpPr>
+          <p:cNvPr id="7" name="TextBox 6"/>
+          <p:cNvSpPr txBox="1"/>
+          <p:nvPr/>
+        </p:nvSpPr>
+        <p:spPr>
+          <a:xfrm>
+            <a:off x="731520" y="1188720"/>
+            <a:ext cx="10972800" cy="5029200"/>
+          </a:xfrm>
+          <a:prstGeom prst="rect">
+            <a:avLst/>
+          </a:prstGeom>
+          <a:noFill/>
+        </p:spPr>
+        <p:txBody>
+          <a:bodyPr wrap="square">
+            <a:spAutoFit/>
+          </a:bodyPr>
+          <a:lstStyle/>
+          <a:p>
+            <a:pPr algn="l">
+              <a:lnSpc>
+                <a:spcPts val="2100"/>
+              </a:lnSpc>
+            </a:pPr>
+            <a:r>
+              <a:rPr sz="1250" b="0">
+                <a:solidFill>
+                  <a:srgbClr val="1A2B4A"/>
+                </a:solidFill>
+                <a:latin typeface="Courier New"/>
+              </a:rPr>
+              <a:t>## Firebase Hosting マルチサイト</a:t>
+            </a:r>
+          </a:p>
+          <a:p>
+            <a:pPr algn="l">
+              <a:lnSpc>
+                <a:spcPts val="2100"/>
+              </a:lnSpc>
+            </a:pPr>
+            <a:r>
+              <a:rPr sz="1250" b="0">
+                <a:solidFill>
+                  <a:srgbClr val="1A2B4A"/>
+                </a:solidFill>
+                <a:latin typeface="Courier New"/>
+              </a:rPr>
+              <a:t>・portfolio: kojinius.jp</a:t>
+            </a:r>
+          </a:p>
+          <a:p>
+            <a:pPr algn="l">
+              <a:lnSpc>
+                <a:spcPts val="2100"/>
+              </a:lnSpc>
+            </a:pPr>
+            <a:r>
+              <a:rPr sz="1250" b="0">
+                <a:solidFill>
+                  <a:srgbClr val="1A2B4A"/>
+                </a:solidFill>
+                <a:latin typeface="Courier New"/>
+              </a:rPr>
+              <a:t>・oas: oas.kojinius.jp  ← OAS SPA の配信先</a:t>
+            </a:r>
+          </a:p>
+          <a:p>
+            <a:pPr algn="l">
+              <a:lnSpc>
+                <a:spcPts val="2100"/>
+              </a:lnSpc>
+            </a:pPr>
+            <a:r>
+              <a:rPr sz="1250" b="0">
+                <a:solidFill>
+                  <a:srgbClr val="1A2B4A"/>
+                </a:solidFill>
+                <a:latin typeface="Courier New"/>
+              </a:rPr>
+              <a:t/>
+            </a:r>
+          </a:p>
+          <a:p>
+            <a:pPr algn="l">
+              <a:lnSpc>
+                <a:spcPts val="2100"/>
+              </a:lnSpc>
+            </a:pPr>
+            <a:r>
+              <a:rPr sz="1250" b="0">
+                <a:solidFill>
+                  <a:srgbClr val="1A2B4A"/>
+                </a:solidFill>
+                <a:latin typeface="Courier New"/>
+              </a:rPr>
+              <a:t>## デプロイコマンド（スコープ指定を厳守）</a:t>
+            </a:r>
+          </a:p>
+          <a:p>
+            <a:pPr algn="l">
+              <a:lnSpc>
+                <a:spcPts val="2100"/>
+              </a:lnSpc>
+            </a:pPr>
+            <a:r>
+              <a:rPr sz="1250" b="0">
+                <a:solidFill>
+                  <a:srgbClr val="1A2B4A"/>
+                </a:solidFill>
+                <a:latin typeface="Courier New"/>
+              </a:rPr>
+              <a:t># Firestore ルール</a:t>
+            </a:r>
+          </a:p>
+          <a:p>
+            <a:pPr algn="l">
+              <a:lnSpc>
+                <a:spcPts val="2100"/>
+              </a:lnSpc>
+            </a:pPr>
+            <a:r>
+              <a:rPr sz="1250" b="0">
+                <a:solidFill>
+                  <a:srgbClr val="1A2B4A"/>
+                </a:solidFill>
+                <a:latin typeface="Courier New"/>
+              </a:rPr>
+              <a:t>firebase deploy --only firestore:rules --project project-3040e21e-879f-4c66-a7d</a:t>
+            </a:r>
+          </a:p>
+          <a:p>
+            <a:pPr algn="l">
+              <a:lnSpc>
+                <a:spcPts val="2100"/>
+              </a:lnSpc>
+            </a:pPr>
+            <a:r>
+              <a:rPr sz="1250" b="0">
+                <a:solidFill>
+                  <a:srgbClr val="1A2B4A"/>
+                </a:solidFill>
+                <a:latin typeface="Courier New"/>
+              </a:rPr>
+              <a:t/>
+            </a:r>
+          </a:p>
+          <a:p>
+            <a:pPr algn="l">
+              <a:lnSpc>
+                <a:spcPts val="2100"/>
+              </a:lnSpc>
+            </a:pPr>
+            <a:r>
+              <a:rPr sz="1250" b="0">
+                <a:solidFill>
+                  <a:srgbClr val="1A2B4A"/>
+                </a:solidFill>
+                <a:latin typeface="Courier New"/>
+              </a:rPr>
+              <a:t># Cloud Functions</a:t>
+            </a:r>
+          </a:p>
+          <a:p>
+            <a:pPr algn="l">
+              <a:lnSpc>
+                <a:spcPts val="2100"/>
+              </a:lnSpc>
+            </a:pPr>
+            <a:r>
+              <a:rPr sz="1250" b="0">
+                <a:solidFill>
+                  <a:srgbClr val="1A2B4A"/>
+                </a:solidFill>
+                <a:latin typeface="Courier New"/>
+              </a:rPr>
+              <a:t>firebase deploy --only functions --project project-3040e21e-879f-4c66-a7d</a:t>
+            </a:r>
+          </a:p>
+          <a:p>
+            <a:pPr algn="l">
+              <a:lnSpc>
+                <a:spcPts val="2100"/>
+              </a:lnSpc>
+            </a:pPr>
+            <a:r>
+              <a:rPr sz="1250" b="0">
+                <a:solidFill>
+                  <a:srgbClr val="1A2B4A"/>
+                </a:solidFill>
+                <a:latin typeface="Courier New"/>
+              </a:rPr>
+              <a:t/>
+            </a:r>
+          </a:p>
+          <a:p>
+            <a:pPr algn="l">
+              <a:lnSpc>
+                <a:spcPts val="2100"/>
+              </a:lnSpc>
+            </a:pPr>
+            <a:r>
+              <a:rPr sz="1250" b="0">
+                <a:solidFill>
+                  <a:srgbClr val="1A2B4A"/>
+                </a:solidFill>
+                <a:latin typeface="Courier New"/>
+              </a:rPr>
+              <a:t># Hosting (OAS SPA + portfolio)</a:t>
+            </a:r>
+          </a:p>
+          <a:p>
+            <a:pPr algn="l">
+              <a:lnSpc>
+                <a:spcPts val="2100"/>
+              </a:lnSpc>
+            </a:pPr>
+            <a:r>
+              <a:rPr sz="1250" b="0">
+                <a:solidFill>
+                  <a:srgbClr val="1A2B4A"/>
+                </a:solidFill>
+                <a:latin typeface="Courier New"/>
+              </a:rPr>
+              <a:t>firebase deploy --only hosting:oas,hosting:portfolio --project project-3040e21e-879f-4c66-a7d</a:t>
+            </a:r>
+          </a:p>
+          <a:p>
+            <a:pPr algn="l">
+              <a:lnSpc>
+                <a:spcPts val="2100"/>
+              </a:lnSpc>
+            </a:pPr>
+            <a:r>
+              <a:rPr sz="1250" b="0">
+                <a:solidFill>
+                  <a:srgbClr val="1A2B4A"/>
+                </a:solidFill>
+                <a:latin typeface="Courier New"/>
+              </a:rPr>
+              <a:t/>
+            </a:r>
+          </a:p>
+          <a:p>
+            <a:pPr algn="l">
+              <a:lnSpc>
+                <a:spcPts val="2100"/>
+              </a:lnSpc>
+            </a:pPr>
+            <a:r>
+              <a:rPr sz="1250" b="0">
+                <a:solidFill>
+                  <a:srgbClr val="1A2B4A"/>
+                </a:solidFill>
+                <a:latin typeface="Courier New"/>
+              </a:rPr>
+              <a:t>## レガシー URL リダイレクト</a:t>
+            </a:r>
+          </a:p>
+          <a:p>
+            <a:pPr algn="l">
+              <a:lnSpc>
+                <a:spcPts val="2100"/>
+              </a:lnSpc>
+            </a:pPr>
+            <a:r>
+              <a:rPr sz="1250" b="0">
+                <a:solidFill>
+                  <a:srgbClr val="1A2B4A"/>
+                </a:solidFill>
+                <a:latin typeface="Courier New"/>
+              </a:rPr>
+              <a:t>・旧 MPA URL（/index.html 等）→ SPA ルート（/）に 301 リダイレクト</a:t>
+            </a:r>
+          </a:p>
+          <a:p>
+            <a:pPr algn="l">
+              <a:lnSpc>
+                <a:spcPts val="2100"/>
+              </a:lnSpc>
+            </a:pPr>
+            <a:r>
+              <a:rPr sz="1250" b="0">
+                <a:solidFill>
+                  <a:srgbClr val="1A2B4A"/>
+                </a:solidFill>
+                <a:latin typeface="Courier New"/>
+              </a:rPr>
+              <a:t>・クライアントへ旧 URL を案内済みの場合も自動転送</a:t>
+            </a:r>
+          </a:p>
+          <a:p>
+            <a:pPr algn="l">
+              <a:lnSpc>
+                <a:spcPts val="2100"/>
+              </a:lnSpc>
+            </a:pPr>
+            <a:r>
+              <a:rPr sz="1250" b="0">
+                <a:solidFill>
+                  <a:srgbClr val="1A2B4A"/>
+                </a:solidFill>
+                <a:latin typeface="Courier New"/>
+              </a:rPr>
+              <a:t/>
+            </a:r>
+          </a:p>
+          <a:p>
+            <a:pPr algn="l">
+              <a:lnSpc>
+                <a:spcPts val="2100"/>
+              </a:lnSpc>
+            </a:pPr>
+            <a:r>
+              <a:rPr sz="1250" b="0">
+                <a:solidFill>
+                  <a:srgbClr val="1A2B4A"/>
+                </a:solidFill>
+                <a:latin typeface="Courier New"/>
+              </a:rPr>
+              <a:t>## Firebase プロジェクト</a:t>
+            </a:r>
+          </a:p>
+          <a:p>
+            <a:pPr algn="l">
+              <a:lnSpc>
+                <a:spcPts val="2100"/>
+              </a:lnSpc>
+            </a:pPr>
+            <a:r>
+              <a:rPr sz="1250" b="0">
+                <a:solidFill>
+                  <a:srgbClr val="1A2B4A"/>
+                </a:solidFill>
+                <a:latin typeface="Courier New"/>
+              </a:rPr>
+              <a:t>・project-3040e21e-879f-4c66-a7d（AMS と共有）</a:t>
+            </a:r>
+          </a:p>
+        </p:txBody>
+      </p:sp>
+    </p:spTree>
+  </p:cSld>
+  <p:clrMapOvr>
+    <a:masterClrMapping/>
+  </p:clrMapOvr>
+</p:sld>
+</file>
+
+<file path=ppt/slides/slide28.xml><?xml version="1.0" encoding="utf-8"?>
+<p:sld xmlns:a="http://schemas.openxmlformats.org/drawingml/2006/main" xmlns:p="http://schemas.openxmlformats.org/presentationml/2006/main" xmlns:r="http://schemas.openxmlformats.org/officeDocument/2006/relationships">
+  <p:cSld>
+    <p:spTree>
+      <p:nvGrpSpPr>
+        <p:cNvPr id="1" name=""/>
+        <p:cNvGrpSpPr/>
+        <p:nvPr/>
+      </p:nvGrpSpPr>
+      <p:grpSpPr/>
+      <p:sp>
+        <p:nvSpPr>
+          <p:cNvPr id="2" name="Rectangle 1"/>
+          <p:cNvSpPr/>
+          <p:nvPr/>
+        </p:nvSpPr>
+        <p:spPr>
+          <a:xfrm>
+            <a:off x="0" y="0"/>
+            <a:ext cx="12188952" cy="6858000"/>
+          </a:xfrm>
+          <a:prstGeom prst="rect">
+            <a:avLst/>
+          </a:prstGeom>
+          <a:solidFill>
             <a:srgbClr val="1A2B4A"/>
           </a:solidFill>
           <a:ln>
@@ -13958,7 +21039,7 @@
                 </a:solidFill>
                 <a:latin typeface="Noto Sans JP"/>
               </a:rPr>
-              <a:t>  技術スタック（React SPA v3 + Firebase + Node.js 24）</a:t>
+              <a:t>  技術スタック（React SPA v4 + Firebase + Node.js 24 + i18n/PWA）</a:t>
             </a:r>
           </a:p>
         </p:txBody>
@@ -15383,6 +22464,38 @@
               <a:t>・clsx / tailwind-merge</a:t>
             </a:r>
           </a:p>
+          <a:p>
+            <a:pPr algn="l">
+              <a:lnSpc>
+                <a:spcPts val="2000"/>
+              </a:lnSpc>
+            </a:pPr>
+            <a:r>
+              <a:rPr sz="1300" b="0">
+                <a:solidFill>
+                  <a:srgbClr val="1A2B4A"/>
+                </a:solidFill>
+                <a:latin typeface="Noto Sans JP"/>
+              </a:rPr>
+              <a:t>・react-i18next（7言語対応）</a:t>
+            </a:r>
+          </a:p>
+          <a:p>
+            <a:pPr algn="l">
+              <a:lnSpc>
+                <a:spcPts val="2000"/>
+              </a:lnSpc>
+            </a:pPr>
+            <a:r>
+              <a:rPr sz="1300" b="0">
+                <a:solidFill>
+                  <a:srgbClr val="1A2B4A"/>
+                </a:solidFill>
+                <a:latin typeface="Noto Sans JP"/>
+              </a:rPr>
+              <a:t>・vite-plugin-pwa（PWA）</a:t>
+            </a:r>
+          </a:p>
         </p:txBody>
       </p:sp>
       <p:sp>
@@ -16125,7 +23238,7 @@
                 </a:solidFill>
                 <a:latin typeface="Noto Sans JP"/>
               </a:rPr>
-              <a:t>  ディレクトリ構成（oas-spa/ SPA 構造）</a:t>
+              <a:t>  ディレクトリ構成（oas-spa/ SPA 構造 / i18n / questionnaire追加）</a:t>
             </a:r>
           </a:p>
         </p:txBody>
@@ -16160,7 +23273,7 @@
                 </a:solidFill>
                 <a:latin typeface="Noto Sans JP"/>
               </a:rPr>
-              <a:t>  Firestore データモデル（5 コレクション）</a:t>
+              <a:t>  Firestore データモデル（8 コレクション / visit_histories / access_logs）</a:t>
             </a:r>
           </a:p>
         </p:txBody>
@@ -16195,7 +23308,7 @@
                 </a:solidFill>
                 <a:latin typeface="Noto Sans JP"/>
               </a:rPr>
-              <a:t>  Cloud Functions 設計（7 functions）</a:t>
+              <a:t>  Cloud Functions 設計（10 functions）</a:t>
             </a:r>
           </a:p>
         </p:txBody>
@@ -16599,7 +23712,7 @@
                 </a:solidFill>
                 <a:latin typeface="Courier New"/>
               </a:rPr>
-              <a:t>│   │   │   ├── admin/          # Dashboard / Settings / ChangePassword</a:t>
+              <a:t>│   │   │   ├── admin/          # Dashboard / Settings / ChangePassword / History</a:t>
             </a:r>
           </a:p>
           <a:p>
@@ -16615,6 +23728,22 @@
                 </a:solidFill>
                 <a:latin typeface="Courier New"/>
               </a:rPr>
+              <a:t>│   │   │   ├── questionnaire/  # /questionnaire（問診票）</a:t>
+            </a:r>
+          </a:p>
+          <a:p>
+            <a:pPr algn="l">
+              <a:lnSpc>
+                <a:spcPts val="2100"/>
+              </a:lnSpc>
+            </a:pPr>
+            <a:r>
+              <a:rPr sz="1300" b="0">
+                <a:solidFill>
+                  <a:srgbClr val="1A2B4A"/>
+                </a:solidFill>
+                <a:latin typeface="Courier New"/>
+              </a:rPr>
               <a:t>│   │   │   ├── Cancel.tsx      # /cancel</a:t>
             </a:r>
           </a:p>
@@ -16711,7 +23840,7 @@
                 </a:solidFill>
                 <a:latin typeface="Courier New"/>
               </a:rPr>
-              <a:t>│   │   ├── types/              # TypeScript 型定義</a:t>
+              <a:t>│   │   ├── i18n/               # react-i18next 設定 / 7言語 / 5ネームスペース</a:t>
             </a:r>
           </a:p>
           <a:p>
@@ -16727,6 +23856,38 @@
                 </a:solidFill>
                 <a:latin typeface="Courier New"/>
               </a:rPr>
+              <a:t>│   │   │   └── locales/{ja,en,zh,ko,vi,pt,es}/</a:t>
+            </a:r>
+          </a:p>
+          <a:p>
+            <a:pPr algn="l">
+              <a:lnSpc>
+                <a:spcPts val="2100"/>
+              </a:lnSpc>
+            </a:pPr>
+            <a:r>
+              <a:rPr sz="1300" b="0">
+                <a:solidFill>
+                  <a:srgbClr val="1A2B4A"/>
+                </a:solidFill>
+                <a:latin typeface="Courier New"/>
+              </a:rPr>
+              <a:t>│   │   ├── types/              # TypeScript 型定義（questionnaire.ts 追加）</a:t>
+            </a:r>
+          </a:p>
+          <a:p>
+            <a:pPr algn="l">
+              <a:lnSpc>
+                <a:spcPts val="2100"/>
+              </a:lnSpc>
+            </a:pPr>
+            <a:r>
+              <a:rPr sz="1300" b="0">
+                <a:solidFill>
+                  <a:srgbClr val="1A2B4A"/>
+                </a:solidFill>
+                <a:latin typeface="Courier New"/>
+              </a:rPr>
               <a:t>│   │   └── utils/              # cn / date / validation / security / zip</a:t>
             </a:r>
           </a:p>
@@ -16743,6 +23904,22 @@
                 </a:solidFill>
                 <a:latin typeface="Courier New"/>
               </a:rPr>
+              <a:t>│   │                           #   questionnairePdf.ts（pdf-lib PDF生成）</a:t>
+            </a:r>
+          </a:p>
+          <a:p>
+            <a:pPr algn="l">
+              <a:lnSpc>
+                <a:spcPts val="2100"/>
+              </a:lnSpc>
+            </a:pPr>
+            <a:r>
+              <a:rPr sz="1300" b="0">
+                <a:solidFill>
+                  <a:srgbClr val="1A2B4A"/>
+                </a:solidFill>
+                <a:latin typeface="Courier New"/>
+              </a:rPr>
               <a:t>│   └── dist/                   # ビルド出力</a:t>
             </a:r>
           </a:p>
@@ -16759,7 +23936,7 @@
                 </a:solidFill>
                 <a:latin typeface="Courier New"/>
               </a:rPr>
-              <a:t>├── functions/index.js          # Cloud Functions (7 functions)</a:t>
+              <a:t>├── functions/index.js          # Cloud Functions (10+ functions)</a:t>
             </a:r>
           </a:p>
           <a:p>
@@ -17481,6 +24658,166 @@
               <a:t>　event, data, severity, timestamp</a:t>
             </a:r>
           </a:p>
+          <a:p>
+            <a:pPr algn="l">
+              <a:lnSpc>
+                <a:spcPts val="2000"/>
+              </a:lnSpc>
+            </a:pPr>
+            <a:r>
+              <a:rPr sz="1300" b="0">
+                <a:solidFill>
+                  <a:srgbClr val="1A2B4A"/>
+                </a:solidFill>
+                <a:latin typeface="Noto Sans JP"/>
+              </a:rPr>
+              <a:t/>
+            </a:r>
+          </a:p>
+          <a:p>
+            <a:pPr algn="l">
+              <a:lnSpc>
+                <a:spcPts val="2000"/>
+              </a:lnSpc>
+            </a:pPr>
+            <a:r>
+              <a:rPr sz="1300" b="0">
+                <a:solidFill>
+                  <a:srgbClr val="1A2B4A"/>
+                </a:solidFill>
+                <a:latin typeface="Noto Sans JP"/>
+              </a:rPr>
+              <a:t>questionnaires / {reservationId}</a:t>
+            </a:r>
+          </a:p>
+          <a:p>
+            <a:pPr algn="l">
+              <a:lnSpc>
+                <a:spcPts val="2000"/>
+              </a:lnSpc>
+            </a:pPr>
+            <a:r>
+              <a:rPr sz="1300" b="0">
+                <a:solidFill>
+                  <a:srgbClr val="1A2B4A"/>
+                </a:solidFill>
+                <a:latin typeface="Noto Sans JP"/>
+              </a:rPr>
+              <a:t>　18フィールド / 問診票データ</a:t>
+            </a:r>
+          </a:p>
+          <a:p>
+            <a:pPr algn="l">
+              <a:lnSpc>
+                <a:spcPts val="2000"/>
+              </a:lnSpc>
+            </a:pPr>
+            <a:r>
+              <a:rPr sz="1300" b="0">
+                <a:solidFill>
+                  <a:srgbClr val="1A2B4A"/>
+                </a:solidFill>
+                <a:latin typeface="Noto Sans JP"/>
+              </a:rPr>
+              <a:t/>
+            </a:r>
+          </a:p>
+          <a:p>
+            <a:pPr algn="l">
+              <a:lnSpc>
+                <a:spcPts val="2000"/>
+              </a:lnSpc>
+            </a:pPr>
+            <a:r>
+              <a:rPr sz="1300" b="0">
+                <a:solidFill>
+                  <a:srgbClr val="1A2B4A"/>
+                </a:solidFill>
+                <a:latin typeface="Noto Sans JP"/>
+              </a:rPr>
+              <a:t>visit_histories / {id}</a:t>
+            </a:r>
+          </a:p>
+          <a:p>
+            <a:pPr algn="l">
+              <a:lnSpc>
+                <a:spcPts val="2000"/>
+              </a:lnSpc>
+            </a:pPr>
+            <a:r>
+              <a:rPr sz="1300" b="0">
+                <a:solidFill>
+                  <a:srgbClr val="1A2B4A"/>
+                </a:solidFill>
+                <a:latin typeface="Noto Sans JP"/>
+              </a:rPr>
+              <a:t>　（immutable）診察完了記録</a:t>
+            </a:r>
+          </a:p>
+          <a:p>
+            <a:pPr algn="l">
+              <a:lnSpc>
+                <a:spcPts val="2000"/>
+              </a:lnSpc>
+            </a:pPr>
+            <a:r>
+              <a:rPr sz="1300" b="0">
+                <a:solidFill>
+                  <a:srgbClr val="1A2B4A"/>
+                </a:solidFill>
+                <a:latin typeface="Noto Sans JP"/>
+              </a:rPr>
+              <a:t>　→ corrections/ サブコレクション</a:t>
+            </a:r>
+          </a:p>
+          <a:p>
+            <a:pPr algn="l">
+              <a:lnSpc>
+                <a:spcPts val="2000"/>
+              </a:lnSpc>
+            </a:pPr>
+            <a:r>
+              <a:rPr sz="1300" b="0">
+                <a:solidFill>
+                  <a:srgbClr val="1A2B4A"/>
+                </a:solidFill>
+                <a:latin typeface="Noto Sans JP"/>
+              </a:rPr>
+              <a:t/>
+            </a:r>
+          </a:p>
+          <a:p>
+            <a:pPr algn="l">
+              <a:lnSpc>
+                <a:spcPts val="2000"/>
+              </a:lnSpc>
+            </a:pPr>
+            <a:r>
+              <a:rPr sz="1300" b="0">
+                <a:solidFill>
+                  <a:srgbClr val="1A2B4A"/>
+                </a:solidFill>
+                <a:latin typeface="Noto Sans JP"/>
+              </a:rPr>
+              <a:t>access_logs</a:t>
+            </a:r>
+          </a:p>
+          <a:p>
+            <a:pPr algn="l">
+              <a:lnSpc>
+                <a:spcPts val="2000"/>
+              </a:lnSpc>
+            </a:pPr>
+            <a:r>
+              <a:rPr sz="1300" b="0">
+                <a:solidFill>
+                  <a:srgbClr val="1A2B4A"/>
+                </a:solidFill>
+                <a:latin typeface="Noto Sans JP"/>
+              </a:rPr>
+              <a:t>　uid, action, targetId, timestamp</a:t>
+            </a:r>
+          </a:p>
         </p:txBody>
       </p:sp>
       <p:sp>
@@ -17599,7 +24936,7 @@
                 </a:solidFill>
                 <a:latin typeface="Noto Sans JP"/>
               </a:rPr>
-              <a:t>status の値</a:t>
+              <a:t>status・追加コレクション詳細</a:t>
             </a:r>
           </a:p>
         </p:txBody>
@@ -17702,6 +25039,22 @@
                 </a:solidFill>
                 <a:latin typeface="Noto Sans JP"/>
               </a:rPr>
+              <a:t>・completed  → 診察完了</a:t>
+            </a:r>
+          </a:p>
+          <a:p>
+            <a:pPr algn="l">
+              <a:lnSpc>
+                <a:spcPts val="2000"/>
+              </a:lnSpc>
+            </a:pPr>
+            <a:r>
+              <a:rPr sz="1300" b="0">
+                <a:solidFill>
+                  <a:srgbClr val="1A2B4A"/>
+                </a:solidFill>
+                <a:latin typeface="Noto Sans JP"/>
+              </a:rPr>
               <a:t/>
             </a:r>
           </a:p>
@@ -17718,55 +25071,103 @@
                 </a:solidFill>
                 <a:latin typeface="Noto Sans JP"/>
               </a:rPr>
-              <a:t>slots コレクション</a:t>
-            </a:r>
-          </a:p>
-          <a:p>
-            <a:pPr algn="l">
-              <a:lnSpc>
-                <a:spcPts val="2000"/>
-              </a:lnSpc>
-            </a:pPr>
-            <a:r>
-              <a:rPr sz="1300" b="0">
-                <a:solidFill>
-                  <a:srgbClr val="1A2B4A"/>
-                </a:solidFill>
-                <a:latin typeface="Noto Sans JP"/>
-              </a:rPr>
-              <a:t>・slots は公開読み取り可</a:t>
-            </a:r>
-          </a:p>
-          <a:p>
-            <a:pPr algn="l">
-              <a:lnSpc>
-                <a:spcPts val="2000"/>
-              </a:lnSpc>
-            </a:pPr>
-            <a:r>
-              <a:rPr sz="1300" b="0">
-                <a:solidFill>
-                  <a:srgbClr val="1A2B4A"/>
-                </a:solidFill>
-                <a:latin typeface="Noto Sans JP"/>
-              </a:rPr>
-              <a:t>  （患者向けカレンダー用）</a:t>
-            </a:r>
-          </a:p>
-          <a:p>
-            <a:pPr algn="l">
-              <a:lnSpc>
-                <a:spcPts val="2000"/>
-              </a:lnSpc>
-            </a:pPr>
-            <a:r>
-              <a:rPr sz="1300" b="0">
-                <a:solidFill>
-                  <a:srgbClr val="1A2B4A"/>
-                </a:solidFill>
-                <a:latin typeface="Noto Sans JP"/>
-              </a:rPr>
-              <a:t>・書き込みは管理者のみ</a:t>
+              <a:t>visit_histories フィールド</a:t>
+            </a:r>
+          </a:p>
+          <a:p>
+            <a:pPr algn="l">
+              <a:lnSpc>
+                <a:spcPts val="2000"/>
+              </a:lnSpc>
+            </a:pPr>
+            <a:r>
+              <a:rPr sz="1300" b="0">
+                <a:solidFill>
+                  <a:srgbClr val="1A2B4A"/>
+                </a:solidFill>
+                <a:latin typeface="Noto Sans JP"/>
+              </a:rPr>
+              <a:t>・completedAt, completedBy</a:t>
+            </a:r>
+          </a:p>
+          <a:p>
+            <a:pPr algn="l">
+              <a:lnSpc>
+                <a:spcPts val="2000"/>
+              </a:lnSpc>
+            </a:pPr>
+            <a:r>
+              <a:rPr sz="1300" b="0">
+                <a:solidFill>
+                  <a:srgbClr val="1A2B4A"/>
+                </a:solidFill>
+                <a:latin typeface="Noto Sans JP"/>
+              </a:rPr>
+              <a:t>・（予約データをコピー保存）</a:t>
+            </a:r>
+          </a:p>
+          <a:p>
+            <a:pPr algn="l">
+              <a:lnSpc>
+                <a:spcPts val="2000"/>
+              </a:lnSpc>
+            </a:pPr>
+            <a:r>
+              <a:rPr sz="1300" b="0">
+                <a:solidFill>
+                  <a:srgbClr val="1A2B4A"/>
+                </a:solidFill>
+                <a:latin typeface="Noto Sans JP"/>
+              </a:rPr>
+              <a:t>・immutable rules:</a:t>
+            </a:r>
+          </a:p>
+          <a:p>
+            <a:pPr algn="l">
+              <a:lnSpc>
+                <a:spcPts val="2000"/>
+              </a:lnSpc>
+            </a:pPr>
+            <a:r>
+              <a:rPr sz="1300" b="0">
+                <a:solidFill>
+                  <a:srgbClr val="1A2B4A"/>
+                </a:solidFill>
+                <a:latin typeface="Noto Sans JP"/>
+              </a:rPr>
+              <a:t>  update/delete 管理者も不可</a:t>
+            </a:r>
+          </a:p>
+          <a:p>
+            <a:pPr algn="l">
+              <a:lnSpc>
+                <a:spcPts val="2000"/>
+              </a:lnSpc>
+            </a:pPr>
+            <a:r>
+              <a:rPr sz="1300" b="0">
+                <a:solidFill>
+                  <a:srgbClr val="1A2B4A"/>
+                </a:solidFill>
+                <a:latin typeface="Noto Sans JP"/>
+              </a:rPr>
+              <a:t>  correctVisitHistory CF のみ</a:t>
+            </a:r>
+          </a:p>
+          <a:p>
+            <a:pPr algn="l">
+              <a:lnSpc>
+                <a:spcPts val="2000"/>
+              </a:lnSpc>
+            </a:pPr>
+            <a:r>
+              <a:rPr sz="1300" b="0">
+                <a:solidFill>
+                  <a:srgbClr val="1A2B4A"/>
+                </a:solidFill>
+                <a:latin typeface="Noto Sans JP"/>
+              </a:rPr>
+              <a:t>  corrections サブコレクションに追記</a:t>
             </a:r>
           </a:p>
           <a:p>
@@ -17895,6 +25296,86 @@
                 <a:latin typeface="Noto Sans JP"/>
               </a:rPr>
               <a:t>・rate_limit.exceeded</a:t>
+            </a:r>
+          </a:p>
+          <a:p>
+            <a:pPr algn="l">
+              <a:lnSpc>
+                <a:spcPts val="2000"/>
+              </a:lnSpc>
+            </a:pPr>
+            <a:r>
+              <a:rPr sz="1300" b="0">
+                <a:solidFill>
+                  <a:srgbClr val="1A2B4A"/>
+                </a:solidFill>
+                <a:latin typeface="Noto Sans JP"/>
+              </a:rPr>
+              <a:t/>
+            </a:r>
+          </a:p>
+          <a:p>
+            <a:pPr algn="l">
+              <a:lnSpc>
+                <a:spcPts val="2000"/>
+              </a:lnSpc>
+            </a:pPr>
+            <a:r>
+              <a:rPr sz="1300" b="0">
+                <a:solidFill>
+                  <a:srgbClr val="1A2B4A"/>
+                </a:solidFill>
+                <a:latin typeface="Noto Sans JP"/>
+              </a:rPr>
+              <a:t>access_logs アクション</a:t>
+            </a:r>
+          </a:p>
+          <a:p>
+            <a:pPr algn="l">
+              <a:lnSpc>
+                <a:spcPts val="2000"/>
+              </a:lnSpc>
+            </a:pPr>
+            <a:r>
+              <a:rPr sz="1300" b="0">
+                <a:solidFill>
+                  <a:srgbClr val="1A2B4A"/>
+                </a:solidFill>
+                <a:latin typeface="Noto Sans JP"/>
+              </a:rPr>
+              <a:t>・view_reservation</a:t>
+            </a:r>
+          </a:p>
+          <a:p>
+            <a:pPr algn="l">
+              <a:lnSpc>
+                <a:spcPts val="2000"/>
+              </a:lnSpc>
+            </a:pPr>
+            <a:r>
+              <a:rPr sz="1300" b="0">
+                <a:solidFill>
+                  <a:srgbClr val="1A2B4A"/>
+                </a:solidFill>
+                <a:latin typeface="Noto Sans JP"/>
+              </a:rPr>
+              <a:t>・download_questionnaire_pdf</a:t>
+            </a:r>
+          </a:p>
+          <a:p>
+            <a:pPr algn="l">
+              <a:lnSpc>
+                <a:spcPts val="2000"/>
+              </a:lnSpc>
+            </a:pPr>
+            <a:r>
+              <a:rPr sz="1300" b="0">
+                <a:solidFill>
+                  <a:srgbClr val="1A2B4A"/>
+                </a:solidFill>
+                <a:latin typeface="Noto Sans JP"/>
+              </a:rPr>
+              <a:t>・complete_visit</a:t>
             </a:r>
           </a:p>
         </p:txBody>
@@ -18033,7 +25514,7 @@
                 </a:solidFill>
                 <a:latin typeface="Noto Sans JP"/>
               </a:rPr>
-              <a:t>Cloud Functions 設計（7 functions）</a:t>
+              <a:t>Cloud Functions 設計（10 functions）</a:t>
             </a:r>
           </a:p>
         </p:txBody>
@@ -19422,7 +26903,580 @@
                 </a:solidFill>
                 <a:latin typeface="Noto Sans JP"/>
               </a:rPr>
-              <a:t>翌日予約へのリマインダーメール一括送信</a:t>
+              <a:t>翌日予約へのリマインダーメール一括送信（opt-in 患者のみ）</a:t>
+            </a:r>
+          </a:p>
+        </p:txBody>
+      </p:sp>
+      <p:sp>
+        <p:nvSpPr>
+          <p:cNvPr id="41" name="Rectangle 40"/>
+          <p:cNvSpPr/>
+          <p:nvPr/>
+        </p:nvSpPr>
+        <p:spPr>
+          <a:xfrm>
+            <a:off x="457200" y="5934456"/>
+            <a:ext cx="2926080" cy="658368"/>
+          </a:xfrm>
+          <a:prstGeom prst="rect">
+            <a:avLst/>
+          </a:prstGeom>
+          <a:solidFill>
+            <a:srgbClr val="1A2B4A"/>
+          </a:solidFill>
+          <a:ln>
+            <a:noFill/>
+          </a:ln>
+        </p:spPr>
+        <p:style>
+          <a:lnRef idx="1">
+            <a:schemeClr val="accent1"/>
+          </a:lnRef>
+          <a:fillRef idx="3">
+            <a:schemeClr val="accent1"/>
+          </a:fillRef>
+          <a:effectRef idx="2">
+            <a:schemeClr val="accent1"/>
+          </a:effectRef>
+          <a:fontRef idx="minor">
+            <a:schemeClr val="lt1"/>
+          </a:fontRef>
+        </p:style>
+        <p:txBody>
+          <a:bodyPr rtlCol="0" anchor="ctr"/>
+          <a:lstStyle/>
+          <a:p>
+            <a:pPr algn="ctr"/>
+          </a:p>
+        </p:txBody>
+      </p:sp>
+      <p:sp>
+        <p:nvSpPr>
+          <p:cNvPr id="42" name="TextBox 41"/>
+          <p:cNvSpPr txBox="1"/>
+          <p:nvPr/>
+        </p:nvSpPr>
+        <p:spPr>
+          <a:xfrm>
+            <a:off x="548640" y="6007608"/>
+            <a:ext cx="2743200" cy="320040"/>
+          </a:xfrm>
+          <a:prstGeom prst="rect">
+            <a:avLst/>
+          </a:prstGeom>
+          <a:noFill/>
+        </p:spPr>
+        <p:txBody>
+          <a:bodyPr wrap="square">
+            <a:spAutoFit/>
+          </a:bodyPr>
+          <a:lstStyle/>
+          <a:p>
+            <a:pPr algn="l"/>
+            <a:r>
+              <a:rPr sz="1300" b="1">
+                <a:solidFill>
+                  <a:srgbClr val="FFFFFF"/>
+                </a:solidFill>
+                <a:latin typeface="Noto Sans JP"/>
+              </a:rPr>
+              <a:t>completeVisit</a:t>
+            </a:r>
+          </a:p>
+        </p:txBody>
+      </p:sp>
+      <p:sp>
+        <p:nvSpPr>
+          <p:cNvPr id="43" name="TextBox 42"/>
+          <p:cNvSpPr txBox="1"/>
+          <p:nvPr/>
+        </p:nvSpPr>
+        <p:spPr>
+          <a:xfrm>
+            <a:off x="548640" y="6318504"/>
+            <a:ext cx="2743200" cy="237744"/>
+          </a:xfrm>
+          <a:prstGeom prst="rect">
+            <a:avLst/>
+          </a:prstGeom>
+          <a:noFill/>
+        </p:spPr>
+        <p:txBody>
+          <a:bodyPr wrap="square">
+            <a:spAutoFit/>
+          </a:bodyPr>
+          <a:lstStyle/>
+          <a:p>
+            <a:pPr algn="l"/>
+            <a:r>
+              <a:rPr sz="1000" b="0">
+                <a:solidFill>
+                  <a:srgbClr val="D4AF37"/>
+                </a:solidFill>
+                <a:latin typeface="Noto Sans JP"/>
+              </a:rPr>
+              <a:t>onRequest</a:t>
+            </a:r>
+          </a:p>
+        </p:txBody>
+      </p:sp>
+      <p:sp>
+        <p:nvSpPr>
+          <p:cNvPr id="44" name="Rectangle 43"/>
+          <p:cNvSpPr/>
+          <p:nvPr/>
+        </p:nvSpPr>
+        <p:spPr>
+          <a:xfrm>
+            <a:off x="3383280" y="5934456"/>
+            <a:ext cx="8412480" cy="658368"/>
+          </a:xfrm>
+          <a:prstGeom prst="rect">
+            <a:avLst/>
+          </a:prstGeom>
+          <a:solidFill>
+            <a:srgbClr val="F8F5EE"/>
+          </a:solidFill>
+          <a:ln>
+            <a:noFill/>
+          </a:ln>
+        </p:spPr>
+        <p:style>
+          <a:lnRef idx="1">
+            <a:schemeClr val="accent1"/>
+          </a:lnRef>
+          <a:fillRef idx="3">
+            <a:schemeClr val="accent1"/>
+          </a:fillRef>
+          <a:effectRef idx="2">
+            <a:schemeClr val="accent1"/>
+          </a:effectRef>
+          <a:fontRef idx="minor">
+            <a:schemeClr val="lt1"/>
+          </a:fontRef>
+        </p:style>
+        <p:txBody>
+          <a:bodyPr rtlCol="0" anchor="ctr"/>
+          <a:lstStyle/>
+          <a:p>
+            <a:pPr algn="ctr"/>
+          </a:p>
+        </p:txBody>
+      </p:sp>
+      <p:sp>
+        <p:nvSpPr>
+          <p:cNvPr id="45" name="TextBox 44"/>
+          <p:cNvSpPr txBox="1"/>
+          <p:nvPr/>
+        </p:nvSpPr>
+        <p:spPr>
+          <a:xfrm>
+            <a:off x="3520440" y="6071616"/>
+            <a:ext cx="8229600" cy="457200"/>
+          </a:xfrm>
+          <a:prstGeom prst="rect">
+            <a:avLst/>
+          </a:prstGeom>
+          <a:noFill/>
+        </p:spPr>
+        <p:txBody>
+          <a:bodyPr wrap="square">
+            <a:spAutoFit/>
+          </a:bodyPr>
+          <a:lstStyle/>
+          <a:p>
+            <a:pPr algn="l"/>
+            <a:r>
+              <a:rPr sz="1300" b="0">
+                <a:solidFill>
+                  <a:srgbClr val="1A2B4A"/>
+                </a:solidFill>
+                <a:latin typeface="Noto Sans JP"/>
+              </a:rPr>
+              <a:t>診察完了処理: visit_histories 保存 + status=completed。admin クレーム必須</a:t>
+            </a:r>
+          </a:p>
+        </p:txBody>
+      </p:sp>
+      <p:sp>
+        <p:nvSpPr>
+          <p:cNvPr id="46" name="Rectangle 45"/>
+          <p:cNvSpPr/>
+          <p:nvPr/>
+        </p:nvSpPr>
+        <p:spPr>
+          <a:xfrm>
+            <a:off x="457200" y="6638544"/>
+            <a:ext cx="2926080" cy="658368"/>
+          </a:xfrm>
+          <a:prstGeom prst="rect">
+            <a:avLst/>
+          </a:prstGeom>
+          <a:solidFill>
+            <a:srgbClr val="1A2B4A"/>
+          </a:solidFill>
+          <a:ln>
+            <a:noFill/>
+          </a:ln>
+        </p:spPr>
+        <p:style>
+          <a:lnRef idx="1">
+            <a:schemeClr val="accent1"/>
+          </a:lnRef>
+          <a:fillRef idx="3">
+            <a:schemeClr val="accent1"/>
+          </a:fillRef>
+          <a:effectRef idx="2">
+            <a:schemeClr val="accent1"/>
+          </a:effectRef>
+          <a:fontRef idx="minor">
+            <a:schemeClr val="lt1"/>
+          </a:fontRef>
+        </p:style>
+        <p:txBody>
+          <a:bodyPr rtlCol="0" anchor="ctr"/>
+          <a:lstStyle/>
+          <a:p>
+            <a:pPr algn="ctr"/>
+          </a:p>
+        </p:txBody>
+      </p:sp>
+      <p:sp>
+        <p:nvSpPr>
+          <p:cNvPr id="47" name="TextBox 46"/>
+          <p:cNvSpPr txBox="1"/>
+          <p:nvPr/>
+        </p:nvSpPr>
+        <p:spPr>
+          <a:xfrm>
+            <a:off x="548640" y="6711696"/>
+            <a:ext cx="2743200" cy="320040"/>
+          </a:xfrm>
+          <a:prstGeom prst="rect">
+            <a:avLst/>
+          </a:prstGeom>
+          <a:noFill/>
+        </p:spPr>
+        <p:txBody>
+          <a:bodyPr wrap="square">
+            <a:spAutoFit/>
+          </a:bodyPr>
+          <a:lstStyle/>
+          <a:p>
+            <a:pPr algn="l"/>
+            <a:r>
+              <a:rPr sz="1300" b="1">
+                <a:solidFill>
+                  <a:srgbClr val="FFFFFF"/>
+                </a:solidFill>
+                <a:latin typeface="Noto Sans JP"/>
+              </a:rPr>
+              <a:t>correctVisitHistory</a:t>
+            </a:r>
+          </a:p>
+        </p:txBody>
+      </p:sp>
+      <p:sp>
+        <p:nvSpPr>
+          <p:cNvPr id="48" name="TextBox 47"/>
+          <p:cNvSpPr txBox="1"/>
+          <p:nvPr/>
+        </p:nvSpPr>
+        <p:spPr>
+          <a:xfrm>
+            <a:off x="548640" y="7022592"/>
+            <a:ext cx="2743200" cy="237744"/>
+          </a:xfrm>
+          <a:prstGeom prst="rect">
+            <a:avLst/>
+          </a:prstGeom>
+          <a:noFill/>
+        </p:spPr>
+        <p:txBody>
+          <a:bodyPr wrap="square">
+            <a:spAutoFit/>
+          </a:bodyPr>
+          <a:lstStyle/>
+          <a:p>
+            <a:pPr algn="l"/>
+            <a:r>
+              <a:rPr sz="1000" b="0">
+                <a:solidFill>
+                  <a:srgbClr val="D4AF37"/>
+                </a:solidFill>
+                <a:latin typeface="Noto Sans JP"/>
+              </a:rPr>
+              <a:t>onRequest</a:t>
+            </a:r>
+          </a:p>
+        </p:txBody>
+      </p:sp>
+      <p:sp>
+        <p:nvSpPr>
+          <p:cNvPr id="49" name="Rectangle 48"/>
+          <p:cNvSpPr/>
+          <p:nvPr/>
+        </p:nvSpPr>
+        <p:spPr>
+          <a:xfrm>
+            <a:off x="3383280" y="6638544"/>
+            <a:ext cx="8412480" cy="658368"/>
+          </a:xfrm>
+          <a:prstGeom prst="rect">
+            <a:avLst/>
+          </a:prstGeom>
+          <a:solidFill>
+            <a:srgbClr val="F8F5EE"/>
+          </a:solidFill>
+          <a:ln>
+            <a:noFill/>
+          </a:ln>
+        </p:spPr>
+        <p:style>
+          <a:lnRef idx="1">
+            <a:schemeClr val="accent1"/>
+          </a:lnRef>
+          <a:fillRef idx="3">
+            <a:schemeClr val="accent1"/>
+          </a:fillRef>
+          <a:effectRef idx="2">
+            <a:schemeClr val="accent1"/>
+          </a:effectRef>
+          <a:fontRef idx="minor">
+            <a:schemeClr val="lt1"/>
+          </a:fontRef>
+        </p:style>
+        <p:txBody>
+          <a:bodyPr rtlCol="0" anchor="ctr"/>
+          <a:lstStyle/>
+          <a:p>
+            <a:pPr algn="ctr"/>
+          </a:p>
+        </p:txBody>
+      </p:sp>
+      <p:sp>
+        <p:nvSpPr>
+          <p:cNvPr id="50" name="TextBox 49"/>
+          <p:cNvSpPr txBox="1"/>
+          <p:nvPr/>
+        </p:nvSpPr>
+        <p:spPr>
+          <a:xfrm>
+            <a:off x="3520440" y="6775704"/>
+            <a:ext cx="8229600" cy="457200"/>
+          </a:xfrm>
+          <a:prstGeom prst="rect">
+            <a:avLst/>
+          </a:prstGeom>
+          <a:noFill/>
+        </p:spPr>
+        <p:txBody>
+          <a:bodyPr wrap="square">
+            <a:spAutoFit/>
+          </a:bodyPr>
+          <a:lstStyle/>
+          <a:p>
+            <a:pPr algn="l"/>
+            <a:r>
+              <a:rPr sz="1300" b="0">
+                <a:solidFill>
+                  <a:srgbClr val="1A2B4A"/>
+                </a:solidFill>
+                <a:latin typeface="Noto Sans JP"/>
+              </a:rPr>
+              <a:t>診察履歴訂正（APPI第34条）: corrections サブコレクションに immutable 追記</a:t>
+            </a:r>
+          </a:p>
+        </p:txBody>
+      </p:sp>
+      <p:sp>
+        <p:nvSpPr>
+          <p:cNvPr id="51" name="Rectangle 50"/>
+          <p:cNvSpPr/>
+          <p:nvPr/>
+        </p:nvSpPr>
+        <p:spPr>
+          <a:xfrm>
+            <a:off x="457200" y="7342632"/>
+            <a:ext cx="2926080" cy="658368"/>
+          </a:xfrm>
+          <a:prstGeom prst="rect">
+            <a:avLst/>
+          </a:prstGeom>
+          <a:solidFill>
+            <a:srgbClr val="1A2B4A"/>
+          </a:solidFill>
+          <a:ln>
+            <a:noFill/>
+          </a:ln>
+        </p:spPr>
+        <p:style>
+          <a:lnRef idx="1">
+            <a:schemeClr val="accent1"/>
+          </a:lnRef>
+          <a:fillRef idx="3">
+            <a:schemeClr val="accent1"/>
+          </a:fillRef>
+          <a:effectRef idx="2">
+            <a:schemeClr val="accent1"/>
+          </a:effectRef>
+          <a:fontRef idx="minor">
+            <a:schemeClr val="lt1"/>
+          </a:fontRef>
+        </p:style>
+        <p:txBody>
+          <a:bodyPr rtlCol="0" anchor="ctr"/>
+          <a:lstStyle/>
+          <a:p>
+            <a:pPr algn="ctr"/>
+          </a:p>
+        </p:txBody>
+      </p:sp>
+      <p:sp>
+        <p:nvSpPr>
+          <p:cNvPr id="52" name="TextBox 51"/>
+          <p:cNvSpPr txBox="1"/>
+          <p:nvPr/>
+        </p:nvSpPr>
+        <p:spPr>
+          <a:xfrm>
+            <a:off x="548640" y="7415784"/>
+            <a:ext cx="2743200" cy="320040"/>
+          </a:xfrm>
+          <a:prstGeom prst="rect">
+            <a:avLst/>
+          </a:prstGeom>
+          <a:noFill/>
+        </p:spPr>
+        <p:txBody>
+          <a:bodyPr wrap="square">
+            <a:spAutoFit/>
+          </a:bodyPr>
+          <a:lstStyle/>
+          <a:p>
+            <a:pPr algn="l"/>
+            <a:r>
+              <a:rPr sz="1300" b="1">
+                <a:solidFill>
+                  <a:srgbClr val="FFFFFF"/>
+                </a:solidFill>
+                <a:latin typeface="Noto Sans JP"/>
+              </a:rPr>
+              <a:t>optOutReminder</a:t>
+            </a:r>
+          </a:p>
+        </p:txBody>
+      </p:sp>
+      <p:sp>
+        <p:nvSpPr>
+          <p:cNvPr id="53" name="TextBox 52"/>
+          <p:cNvSpPr txBox="1"/>
+          <p:nvPr/>
+        </p:nvSpPr>
+        <p:spPr>
+          <a:xfrm>
+            <a:off x="548640" y="7726680"/>
+            <a:ext cx="2743200" cy="237744"/>
+          </a:xfrm>
+          <a:prstGeom prst="rect">
+            <a:avLst/>
+          </a:prstGeom>
+          <a:noFill/>
+        </p:spPr>
+        <p:txBody>
+          <a:bodyPr wrap="square">
+            <a:spAutoFit/>
+          </a:bodyPr>
+          <a:lstStyle/>
+          <a:p>
+            <a:pPr algn="l"/>
+            <a:r>
+              <a:rPr sz="1000" b="0">
+                <a:solidFill>
+                  <a:srgbClr val="D4AF37"/>
+                </a:solidFill>
+                <a:latin typeface="Noto Sans JP"/>
+              </a:rPr>
+              <a:t>onRequest</a:t>
+            </a:r>
+          </a:p>
+        </p:txBody>
+      </p:sp>
+      <p:sp>
+        <p:nvSpPr>
+          <p:cNvPr id="54" name="Rectangle 53"/>
+          <p:cNvSpPr/>
+          <p:nvPr/>
+        </p:nvSpPr>
+        <p:spPr>
+          <a:xfrm>
+            <a:off x="3383280" y="7342632"/>
+            <a:ext cx="8412480" cy="658368"/>
+          </a:xfrm>
+          <a:prstGeom prst="rect">
+            <a:avLst/>
+          </a:prstGeom>
+          <a:solidFill>
+            <a:srgbClr val="F8F5EE"/>
+          </a:solidFill>
+          <a:ln>
+            <a:noFill/>
+          </a:ln>
+        </p:spPr>
+        <p:style>
+          <a:lnRef idx="1">
+            <a:schemeClr val="accent1"/>
+          </a:lnRef>
+          <a:fillRef idx="3">
+            <a:schemeClr val="accent1"/>
+          </a:fillRef>
+          <a:effectRef idx="2">
+            <a:schemeClr val="accent1"/>
+          </a:effectRef>
+          <a:fontRef idx="minor">
+            <a:schemeClr val="lt1"/>
+          </a:fontRef>
+        </p:style>
+        <p:txBody>
+          <a:bodyPr rtlCol="0" anchor="ctr"/>
+          <a:lstStyle/>
+          <a:p>
+            <a:pPr algn="ctr"/>
+          </a:p>
+        </p:txBody>
+      </p:sp>
+      <p:sp>
+        <p:nvSpPr>
+          <p:cNvPr id="55" name="TextBox 54"/>
+          <p:cNvSpPr txBox="1"/>
+          <p:nvPr/>
+        </p:nvSpPr>
+        <p:spPr>
+          <a:xfrm>
+            <a:off x="3520440" y="7479792"/>
+            <a:ext cx="8229600" cy="457200"/>
+          </a:xfrm>
+          <a:prstGeom prst="rect">
+            <a:avLst/>
+          </a:prstGeom>
+          <a:noFill/>
+        </p:spPr>
+        <p:txBody>
+          <a:bodyPr wrap="square">
+            <a:spAutoFit/>
+          </a:bodyPr>
+          <a:lstStyle/>
+          <a:p>
+            <a:pPr algn="l"/>
+            <a:r>
+              <a:rPr sz="1300" b="0">
+                <a:solidFill>
+                  <a:srgbClr val="1A2B4A"/>
+                </a:solidFill>
+                <a:latin typeface="Noto Sans JP"/>
+              </a:rPr>
+              <a:t>HMAC-SHA256 トークン検証後 reminderConsent=false に更新（メール配信停止）</a:t>
             </a:r>
           </a:p>
         </p:txBody>
